--- a/public/course-materials/pptx/Module-06-Les-stablecoins-USDT-pourquoi-cest-utile.pptx
+++ b/public/course-materials/pptx/Module-06-Les-stablecoins-USDT-pourquoi-cest-utile.pptx
@@ -3108,28 +3108,96 @@
         </p:nvSpPr>
         <p:spPr>
           <a:xfrm>
+            <a:off x="6400800" y="-457200"/>
+            <a:ext cx="3657600" cy="3657600"/>
+          </a:xfrm>
+          <a:prstGeom prst="ellipse">
+            <a:avLst/>
+          </a:prstGeom>
+          <a:solidFill>
+            <a:srgbClr val="06B6D4">
+              <a:alpha val="8000"/>
+            </a:srgbClr>
+          </a:solidFill>
+          <a:ln/>
+        </p:spPr>
+      </p:sp>
+      <p:sp>
+        <p:nvSpPr>
+          <p:cNvPr id="3" name="Shape 1"/>
+          <p:cNvSpPr/>
+          <p:nvPr/>
+        </p:nvSpPr>
+        <p:spPr>
+          <a:xfrm>
+            <a:off x="7315200" y="2286000"/>
+            <a:ext cx="2743200" cy="2743200"/>
+          </a:xfrm>
+          <a:prstGeom prst="ellipse">
+            <a:avLst/>
+          </a:prstGeom>
+          <a:solidFill>
+            <a:srgbClr val="06B6D4">
+              <a:alpha val="5000"/>
+            </a:srgbClr>
+          </a:solidFill>
+          <a:ln/>
+        </p:spPr>
+      </p:sp>
+      <p:sp>
+        <p:nvSpPr>
+          <p:cNvPr id="4" name="Shape 2"/>
+          <p:cNvSpPr/>
+          <p:nvPr/>
+        </p:nvSpPr>
+        <p:spPr>
+          <a:xfrm>
             <a:off x="0" y="0"/>
-            <a:ext cx="9144000" cy="54864"/>
+            <a:ext cx="9144000" cy="45720"/>
           </a:xfrm>
           <a:prstGeom prst="rect">
             <a:avLst/>
           </a:prstGeom>
           <a:solidFill>
-            <a:srgbClr val="00BFA6"/>
+            <a:srgbClr val="06B6D4"/>
           </a:solidFill>
           <a:ln/>
         </p:spPr>
       </p:sp>
-      <p:sp>
-        <p:nvSpPr>
-          <p:cNvPr id="3" name="Text 1"/>
-          <p:cNvSpPr txBox="1"/>
-          <p:nvPr/>
-        </p:nvSpPr>
-        <p:spPr>
-          <a:xfrm>
-            <a:off x="731520" y="1097280"/>
-            <a:ext cx="2286000" cy="457200"/>
+      <p:pic>
+        <p:nvPicPr>
+          <p:cNvPr id="5" name="Image 0" descr="preencoded.png">    </p:cNvPr>
+          <p:cNvPicPr>
+            <a:picLocks noChangeAspect="1"/>
+          </p:cNvPicPr>
+          <p:nvPr/>
+        </p:nvPicPr>
+        <p:blipFill>
+          <a:blip r:embed="rId1"/>
+          <a:stretch>
+            <a:fillRect/>
+          </a:stretch>
+        </p:blipFill>
+        <p:spPr>
+          <a:xfrm>
+            <a:off x="7132320" y="1097280"/>
+            <a:ext cx="1463040" cy="1463040"/>
+          </a:xfrm>
+          <a:prstGeom prst="rect">
+            <a:avLst/>
+          </a:prstGeom>
+        </p:spPr>
+      </p:pic>
+      <p:sp>
+        <p:nvSpPr>
+          <p:cNvPr id="6" name="Text 3"/>
+          <p:cNvSpPr txBox="1"/>
+          <p:nvPr/>
+        </p:nvSpPr>
+        <p:spPr>
+          <a:xfrm>
+            <a:off x="731520" y="914400"/>
+            <a:ext cx="2286000" cy="365760"/>
           </a:xfrm>
           <a:prstGeom prst="rect">
             <a:avLst/>
@@ -3145,9 +3213,9 @@
               <a:buNone/>
             </a:pPr>
             <a:r>
-              <a:rPr lang="en-US" sz="1400" b="1" spc="400" kern="0" dirty="0">
-                <a:solidFill>
-                  <a:srgbClr val="00BFA6"/>
+              <a:rPr lang="en-US" sz="1300" b="1" spc="400" kern="0" dirty="0">
+                <a:solidFill>
+                  <a:srgbClr val="06B6D4"/>
                 </a:solidFill>
                 <a:latin typeface="Calibri" pitchFamily="34" charset="0"/>
                 <a:ea typeface="Calibri" pitchFamily="34" charset="-122"/>
@@ -3155,20 +3223,20 @@
               </a:rPr>
               <a:t>MODULE 6</a:t>
             </a:r>
-            <a:endParaRPr lang="en-US" sz="1400" dirty="0"/>
-          </a:p>
-        </p:txBody>
-      </p:sp>
-      <p:sp>
-        <p:nvSpPr>
-          <p:cNvPr id="4" name="Text 2"/>
-          <p:cNvSpPr txBox="1"/>
-          <p:nvPr/>
-        </p:nvSpPr>
-        <p:spPr>
-          <a:xfrm>
-            <a:off x="731520" y="1645920"/>
-            <a:ext cx="7680960" cy="1463040"/>
+            <a:endParaRPr lang="en-US" sz="1300" dirty="0"/>
+          </a:p>
+        </p:txBody>
+      </p:sp>
+      <p:sp>
+        <p:nvSpPr>
+          <p:cNvPr id="7" name="Text 4"/>
+          <p:cNvSpPr txBox="1"/>
+          <p:nvPr/>
+        </p:nvSpPr>
+        <p:spPr>
+          <a:xfrm>
+            <a:off x="731520" y="1371600"/>
+            <a:ext cx="5943600" cy="1645920"/>
           </a:xfrm>
           <a:prstGeom prst="rect">
             <a:avLst/>
@@ -3200,14 +3268,34 @@
       </p:sp>
       <p:sp>
         <p:nvSpPr>
-          <p:cNvPr id="5" name="Text 3"/>
-          <p:cNvSpPr txBox="1"/>
-          <p:nvPr/>
-        </p:nvSpPr>
-        <p:spPr>
-          <a:xfrm>
-            <a:off x="731520" y="4023360"/>
-            <a:ext cx="2743200" cy="365760"/>
+          <p:cNvPr id="8" name="Shape 5"/>
+          <p:cNvSpPr/>
+          <p:nvPr/>
+        </p:nvSpPr>
+        <p:spPr>
+          <a:xfrm>
+            <a:off x="731520" y="3291840"/>
+            <a:ext cx="1828800" cy="36576"/>
+          </a:xfrm>
+          <a:prstGeom prst="rect">
+            <a:avLst/>
+          </a:prstGeom>
+          <a:solidFill>
+            <a:srgbClr val="06B6D4"/>
+          </a:solidFill>
+          <a:ln/>
+        </p:spPr>
+      </p:sp>
+      <p:sp>
+        <p:nvSpPr>
+          <p:cNvPr id="9" name="Text 6"/>
+          <p:cNvSpPr txBox="1"/>
+          <p:nvPr/>
+        </p:nvSpPr>
+        <p:spPr>
+          <a:xfrm>
+            <a:off x="731520" y="3566160"/>
+            <a:ext cx="2743200" cy="320040"/>
           </a:xfrm>
           <a:prstGeom prst="rect">
             <a:avLst/>
@@ -3223,7 +3311,7 @@
               <a:buNone/>
             </a:pPr>
             <a:r>
-              <a:rPr lang="en-US" sz="1200" spc="300" kern="0" dirty="0">
+              <a:rPr lang="en-US" sz="1100" spc="300" kern="0" dirty="0">
                 <a:solidFill>
                   <a:srgbClr val="64748B"/>
                 </a:solidFill>
@@ -3233,20 +3321,20 @@
               </a:rPr>
               <a:t>TEREX ACADEMY</a:t>
             </a:r>
-            <a:endParaRPr lang="en-US" sz="1200" dirty="0"/>
-          </a:p>
-        </p:txBody>
-      </p:sp>
-      <p:sp>
-        <p:nvSpPr>
-          <p:cNvPr id="6" name="Text 4"/>
-          <p:cNvSpPr txBox="1"/>
-          <p:nvPr/>
-        </p:nvSpPr>
-        <p:spPr>
-          <a:xfrm>
-            <a:off x="731520" y="4389120"/>
-            <a:ext cx="3657600" cy="320040"/>
+            <a:endParaRPr lang="en-US" sz="1100" dirty="0"/>
+          </a:p>
+        </p:txBody>
+      </p:sp>
+      <p:sp>
+        <p:nvSpPr>
+          <p:cNvPr id="10" name="Text 7"/>
+          <p:cNvSpPr txBox="1"/>
+          <p:nvPr/>
+        </p:nvSpPr>
+        <p:spPr>
+          <a:xfrm>
+            <a:off x="731520" y="3931920"/>
+            <a:ext cx="3657600" cy="274320"/>
           </a:xfrm>
           <a:prstGeom prst="rect">
             <a:avLst/>
@@ -3310,7 +3398,53 @@
       </p:grpSpPr>
       <p:sp>
         <p:nvSpPr>
-          <p:cNvPr id="2" name="Text 0"/>
+          <p:cNvPr id="2" name="Shape 0"/>
+          <p:cNvSpPr/>
+          <p:nvPr/>
+        </p:nvSpPr>
+        <p:spPr>
+          <a:xfrm>
+            <a:off x="7955280" y="182880"/>
+            <a:ext cx="640080" cy="640080"/>
+          </a:xfrm>
+          <a:prstGeom prst="ellipse">
+            <a:avLst/>
+          </a:prstGeom>
+          <a:solidFill>
+            <a:srgbClr val="06B6D4">
+              <a:alpha val="12000"/>
+            </a:srgbClr>
+          </a:solidFill>
+          <a:ln/>
+        </p:spPr>
+      </p:sp>
+      <p:pic>
+        <p:nvPicPr>
+          <p:cNvPr id="3" name="Image 0" descr="preencoded.png">    </p:cNvPr>
+          <p:cNvPicPr>
+            <a:picLocks noChangeAspect="1"/>
+          </p:cNvPicPr>
+          <p:nvPr/>
+        </p:nvPicPr>
+        <p:blipFill>
+          <a:blip r:embed="rId1"/>
+          <a:stretch>
+            <a:fillRect/>
+          </a:stretch>
+        </p:blipFill>
+        <p:spPr>
+          <a:xfrm>
+            <a:off x="8028432" y="256032"/>
+            <a:ext cx="493776" cy="493776"/>
+          </a:xfrm>
+          <a:prstGeom prst="rect">
+            <a:avLst/>
+          </a:prstGeom>
+        </p:spPr>
+      </p:pic>
+      <p:sp>
+        <p:nvSpPr>
+          <p:cNvPr id="4" name="Text 1"/>
           <p:cNvSpPr txBox="1"/>
           <p:nvPr/>
         </p:nvSpPr>
@@ -3345,15 +3479,36 @@
                 <a:ea typeface="Calibri" pitchFamily="34" charset="-122"/>
                 <a:cs typeface="Calibri" pitchFamily="34" charset="-120"/>
               </a:rPr>
-              <a:t>USDT (Tether) est le stablecoin le plus utilisé au monde. Lancé en 2014, il représente aujourd'hui plus de 60% du marché des stablecoins, avec une capitalisation de plus de 200 ...</a:t>
+              <a:t>USDT (Tether) est le stablecoin le plus utilisé au monde.</a:t>
             </a:r>
             <a:endParaRPr lang="en-US" sz="1400" dirty="0"/>
           </a:p>
-        </p:txBody>
-      </p:sp>
-      <p:sp>
-        <p:nvSpPr>
-          <p:cNvPr id="3" name="Text 1"/>
+          <a:p>
+            <a:pPr marL="342900" indent="-342900">
+              <a:spcAft>
+                <a:spcPts val="800"/>
+              </a:spcAft>
+              <a:buSzPct val="100000"/>
+              <a:buChar char="•"/>
+            </a:pPr>
+            <a:r>
+              <a:rPr lang="en-US" sz="1400" dirty="0">
+                <a:solidFill>
+                  <a:srgbClr val="FFFFFF"/>
+                </a:solidFill>
+                <a:latin typeface="Calibri" pitchFamily="34" charset="0"/>
+                <a:ea typeface="Calibri" pitchFamily="34" charset="-122"/>
+                <a:cs typeface="Calibri" pitchFamily="34" charset="-120"/>
+              </a:rPr>
+              <a:t>Lancé en 2014, il représente aujourd'hui plus de 60% du marché des stablecoins, avec une capitalisation de plus de 200 milliards de dollars.</a:t>
+            </a:r>
+            <a:endParaRPr lang="en-US" sz="1400" dirty="0"/>
+          </a:p>
+        </p:txBody>
+      </p:sp>
+      <p:sp>
+        <p:nvSpPr>
+          <p:cNvPr id="5" name="Text 2"/>
           <p:cNvSpPr txBox="1"/>
           <p:nvPr/>
         </p:nvSpPr>
@@ -3384,7 +3539,7 @@
                 <a:ea typeface="Calibri" pitchFamily="34" charset="-122"/>
                 <a:cs typeface="Calibri" pitchFamily="34" charset="-120"/>
               </a:rPr>
-              <a:t>Module 6 — Lecon 2</a:t>
+              <a:t>Module 6 — Leçon 2</a:t>
             </a:r>
             <a:endParaRPr lang="en-US" sz="900" dirty="0"/>
           </a:p>
@@ -3430,8 +3585,8 @@
         </p:nvSpPr>
         <p:spPr>
           <a:xfrm>
-            <a:off x="731520" y="365760"/>
-            <a:ext cx="7680960" cy="548640"/>
+            <a:off x="731520" y="274320"/>
+            <a:ext cx="7680960" cy="502920"/>
           </a:xfrm>
           <a:prstGeom prst="rect">
             <a:avLst/>
@@ -3447,9 +3602,9 @@
               <a:buNone/>
             </a:pPr>
             <a:r>
-              <a:rPr lang="en-US" sz="2200" b="1" dirty="0">
-                <a:solidFill>
-                  <a:srgbClr val="00BFA6"/>
+              <a:rPr lang="en-US" sz="2000" b="1" dirty="0">
+                <a:solidFill>
+                  <a:srgbClr val="06B6D4"/>
                 </a:solidFill>
                 <a:latin typeface="Calibri" pitchFamily="34" charset="0"/>
                 <a:ea typeface="Calibri" pitchFamily="34" charset="-122"/>
@@ -3457,7 +3612,7 @@
               </a:rPr>
               <a:t>Pourquoi USDT est-il devenu la référence en Afrique ?</a:t>
             </a:r>
-            <a:endParaRPr lang="en-US" sz="2200" dirty="0"/>
+            <a:endParaRPr lang="en-US" sz="2000" dirty="0"/>
           </a:p>
         </p:txBody>
       </p:sp>
@@ -3469,8 +3624,8 @@
         </p:nvSpPr>
         <p:spPr>
           <a:xfrm>
-            <a:off x="731520" y="1051560"/>
-            <a:ext cx="7680960" cy="3657600"/>
+            <a:off x="731520" y="1005840"/>
+            <a:ext cx="4206240" cy="3474720"/>
           </a:xfrm>
           <a:prstGeom prst="rect">
             <a:avLst/>
@@ -3484,13 +3639,13 @@
           <a:p>
             <a:pPr marL="342900" indent="-342900">
               <a:spcAft>
-                <a:spcPts val="800"/>
+                <a:spcPts val="600"/>
               </a:spcAft>
               <a:buSzPct val="100000"/>
               <a:buChar char="•"/>
             </a:pPr>
             <a:r>
-              <a:rPr lang="en-US" sz="1400" dirty="0">
+              <a:rPr lang="en-US" sz="1300" dirty="0">
                 <a:solidFill>
                   <a:srgbClr val="FFFFFF"/>
                 </a:solidFill>
@@ -3498,20 +3653,20 @@
                 <a:ea typeface="Calibri" pitchFamily="34" charset="-122"/>
                 <a:cs typeface="Calibri" pitchFamily="34" charset="-120"/>
               </a:rPr>
-              <a:t>Il est partout : accepté sur toutes les plateformes d'échange, tous les portefeuilles, tous les marchands crypto africains.</a:t>
-            </a:r>
-            <a:endParaRPr lang="en-US" sz="1400" dirty="0"/>
+              <a:t>Il est partout : accepté sur toutes les plateformes d'échange, tous les portefeuilles, tous les marchands crypto afri...</a:t>
+            </a:r>
+            <a:endParaRPr lang="en-US" sz="1300" dirty="0"/>
           </a:p>
           <a:p>
             <a:pPr marL="342900" indent="-342900">
               <a:spcAft>
-                <a:spcPts val="800"/>
+                <a:spcPts val="600"/>
               </a:spcAft>
               <a:buSzPct val="100000"/>
               <a:buChar char="•"/>
             </a:pPr>
             <a:r>
-              <a:rPr lang="en-US" sz="1400" dirty="0">
+              <a:rPr lang="en-US" sz="1300" dirty="0">
                 <a:solidFill>
                   <a:srgbClr val="FFFFFF"/>
                 </a:solidFill>
@@ -3521,18 +3676,18 @@
               </a:rPr>
               <a:t>Il est stable : 1 USDT ≈ 1 USD, à quelques dixièmes de cent près.</a:t>
             </a:r>
-            <a:endParaRPr lang="en-US" sz="1400" dirty="0"/>
+            <a:endParaRPr lang="en-US" sz="1300" dirty="0"/>
           </a:p>
           <a:p>
             <a:pPr marL="342900" indent="-342900">
               <a:spcAft>
-                <a:spcPts val="800"/>
+                <a:spcPts val="600"/>
               </a:spcAft>
               <a:buSzPct val="100000"/>
               <a:buChar char="•"/>
             </a:pPr>
             <a:r>
-              <a:rPr lang="en-US" sz="1400" dirty="0">
+              <a:rPr lang="en-US" sz="1300" dirty="0">
                 <a:solidFill>
                   <a:srgbClr val="FFFFFF"/>
                 </a:solidFill>
@@ -3540,20 +3695,84 @@
                 <a:ea typeface="Calibri" pitchFamily="34" charset="-122"/>
                 <a:cs typeface="Calibri" pitchFamily="34" charset="-120"/>
               </a:rPr>
-              <a:t>Il protège contre l'inflation locale : le franc CFA est stable, mais dans d'autres pays africains (Nigeria, Ghana, Zimbabwe), les monnaies locales perdent 10 à 50% par an. Déten...</a:t>
-            </a:r>
-            <a:endParaRPr lang="en-US" sz="1400" dirty="0"/>
-          </a:p>
-          <a:p>
-            <a:pPr marL="342900" indent="-342900">
-              <a:spcAft>
-                <a:spcPts val="800"/>
-              </a:spcAft>
-              <a:buSzPct val="100000"/>
-              <a:buChar char="•"/>
-            </a:pPr>
-            <a:r>
-              <a:rPr lang="en-US" sz="1400" dirty="0">
+              <a:t>Il protège contre l'inflation locale : le franc CFA est stable, mais dans d'autres pays africains (Nigeria, Ghana, Zi...</a:t>
+            </a:r>
+            <a:endParaRPr lang="en-US" sz="1300" dirty="0"/>
+          </a:p>
+        </p:txBody>
+      </p:sp>
+      <p:sp>
+        <p:nvSpPr>
+          <p:cNvPr id="4" name="Shape 2"/>
+          <p:cNvSpPr/>
+          <p:nvPr/>
+        </p:nvSpPr>
+        <p:spPr>
+          <a:xfrm>
+            <a:off x="5120640" y="1005840"/>
+            <a:ext cx="3474720" cy="640080"/>
+          </a:xfrm>
+          <a:prstGeom prst="roundRect">
+            <a:avLst>
+              <a:gd name="adj" fmla="val 14286"/>
+            </a:avLst>
+          </a:prstGeom>
+          <a:solidFill>
+            <a:srgbClr val="1A2332"/>
+          </a:solidFill>
+          <a:ln/>
+        </p:spPr>
+      </p:sp>
+      <p:pic>
+        <p:nvPicPr>
+          <p:cNvPr id="5" name="Image 0" descr="preencoded.png">    </p:cNvPr>
+          <p:cNvPicPr>
+            <a:picLocks noChangeAspect="1"/>
+          </p:cNvPicPr>
+          <p:nvPr/>
+        </p:nvPicPr>
+        <p:blipFill>
+          <a:blip r:embed="rId1"/>
+          <a:stretch>
+            <a:fillRect/>
+          </a:stretch>
+        </p:blipFill>
+        <p:spPr>
+          <a:xfrm>
+            <a:off x="5257800" y="1106424"/>
+            <a:ext cx="438912" cy="438912"/>
+          </a:xfrm>
+          <a:prstGeom prst="rect">
+            <a:avLst/>
+          </a:prstGeom>
+        </p:spPr>
+      </p:pic>
+      <p:sp>
+        <p:nvSpPr>
+          <p:cNvPr id="6" name="Text 3"/>
+          <p:cNvSpPr txBox="1"/>
+          <p:nvPr/>
+        </p:nvSpPr>
+        <p:spPr>
+          <a:xfrm>
+            <a:off x="5806440" y="1005840"/>
+            <a:ext cx="2651760" cy="640080"/>
+          </a:xfrm>
+          <a:prstGeom prst="rect">
+            <a:avLst/>
+          </a:prstGeom>
+          <a:noFill/>
+          <a:ln/>
+        </p:spPr>
+        <p:txBody>
+          <a:bodyPr wrap="square" lIns="0" tIns="0" rIns="0" bIns="0" rtlCol="0" anchor="ctr"/>
+          <a:lstStyle/>
+          <a:p>
+            <a:pPr indent="0" marL="0">
+              <a:buNone/>
+            </a:pPr>
+            <a:r>
+              <a:rPr lang="en-US" sz="1200" dirty="0">
                 <a:solidFill>
                   <a:srgbClr val="FFFFFF"/>
                 </a:solidFill>
@@ -3561,20 +3780,84 @@
                 <a:ea typeface="Calibri" pitchFamily="34" charset="-122"/>
                 <a:cs typeface="Calibri" pitchFamily="34" charset="-120"/>
               </a:rPr>
-              <a:t>Il traverse les frontières : envoyer 500 USDT du Sénégal au Cameroun prend 10 minutes et coûte moins de 1$. Impossible avec un virement bancaire classique.</a:t>
-            </a:r>
-            <a:endParaRPr lang="en-US" sz="1400" dirty="0"/>
-          </a:p>
-          <a:p>
-            <a:pPr marL="342900" indent="-342900">
-              <a:spcAft>
-                <a:spcPts val="800"/>
-              </a:spcAft>
-              <a:buSzPct val="100000"/>
-              <a:buChar char="•"/>
-            </a:pPr>
-            <a:r>
-              <a:rPr lang="en-US" sz="1400" dirty="0">
+              <a:t>Il traverse les frontières : envoyer 500 USDT du Sénégal au Cameroun prend 10...</a:t>
+            </a:r>
+            <a:endParaRPr lang="en-US" sz="1200" dirty="0"/>
+          </a:p>
+        </p:txBody>
+      </p:sp>
+      <p:sp>
+        <p:nvSpPr>
+          <p:cNvPr id="7" name="Shape 4"/>
+          <p:cNvSpPr/>
+          <p:nvPr/>
+        </p:nvSpPr>
+        <p:spPr>
+          <a:xfrm>
+            <a:off x="5120640" y="1737360"/>
+            <a:ext cx="3474720" cy="640080"/>
+          </a:xfrm>
+          <a:prstGeom prst="roundRect">
+            <a:avLst>
+              <a:gd name="adj" fmla="val 14286"/>
+            </a:avLst>
+          </a:prstGeom>
+          <a:solidFill>
+            <a:srgbClr val="1A2332"/>
+          </a:solidFill>
+          <a:ln/>
+        </p:spPr>
+      </p:sp>
+      <p:pic>
+        <p:nvPicPr>
+          <p:cNvPr id="8" name="Image 1" descr="preencoded.png">    </p:cNvPr>
+          <p:cNvPicPr>
+            <a:picLocks noChangeAspect="1"/>
+          </p:cNvPicPr>
+          <p:nvPr/>
+        </p:nvPicPr>
+        <p:blipFill>
+          <a:blip r:embed="rId2"/>
+          <a:stretch>
+            <a:fillRect/>
+          </a:stretch>
+        </p:blipFill>
+        <p:spPr>
+          <a:xfrm>
+            <a:off x="5257800" y="1837944"/>
+            <a:ext cx="438912" cy="438912"/>
+          </a:xfrm>
+          <a:prstGeom prst="rect">
+            <a:avLst/>
+          </a:prstGeom>
+        </p:spPr>
+      </p:pic>
+      <p:sp>
+        <p:nvSpPr>
+          <p:cNvPr id="9" name="Text 5"/>
+          <p:cNvSpPr txBox="1"/>
+          <p:nvPr/>
+        </p:nvSpPr>
+        <p:spPr>
+          <a:xfrm>
+            <a:off x="5806440" y="1737360"/>
+            <a:ext cx="2651760" cy="640080"/>
+          </a:xfrm>
+          <a:prstGeom prst="rect">
+            <a:avLst/>
+          </a:prstGeom>
+          <a:noFill/>
+          <a:ln/>
+        </p:spPr>
+        <p:txBody>
+          <a:bodyPr wrap="square" lIns="0" tIns="0" rIns="0" bIns="0" rtlCol="0" anchor="ctr"/>
+          <a:lstStyle/>
+          <a:p>
+            <a:pPr indent="0" marL="0">
+              <a:buNone/>
+            </a:pPr>
+            <a:r>
+              <a:rPr lang="en-US" sz="1200" dirty="0">
                 <a:solidFill>
                   <a:srgbClr val="FFFFFF"/>
                 </a:solidFill>
@@ -3582,48 +3865,9 @@
                 <a:ea typeface="Calibri" pitchFamily="34" charset="-122"/>
                 <a:cs typeface="Calibri" pitchFamily="34" charset="-120"/>
               </a:rPr>
-              <a:t>Il est disponible sur plusieurs réseaux : Tron, Ethereum, BNB Chain, Solana, Polygon. Vous choisissez selon votre besoin.</a:t>
-            </a:r>
-            <a:endParaRPr lang="en-US" sz="1400" dirty="0"/>
-          </a:p>
-        </p:txBody>
-      </p:sp>
-      <p:sp>
-        <p:nvSpPr>
-          <p:cNvPr id="4" name="Text 2"/>
-          <p:cNvSpPr txBox="1"/>
-          <p:nvPr/>
-        </p:nvSpPr>
-        <p:spPr>
-          <a:xfrm>
-            <a:off x="731520" y="4709160"/>
-            <a:ext cx="7680960" cy="274320"/>
-          </a:xfrm>
-          <a:prstGeom prst="rect">
-            <a:avLst/>
-          </a:prstGeom>
-          <a:noFill/>
-          <a:ln/>
-        </p:spPr>
-        <p:txBody>
-          <a:bodyPr wrap="square" lIns="0" tIns="0" rIns="0" bIns="0" rtlCol="0" anchor="ctr"/>
-          <a:lstStyle/>
-          <a:p>
-            <a:pPr algn="r" indent="0" marL="0">
-              <a:buNone/>
-            </a:pPr>
-            <a:r>
-              <a:rPr lang="en-US" sz="900" dirty="0">
-                <a:solidFill>
-                  <a:srgbClr val="64748B"/>
-                </a:solidFill>
-                <a:latin typeface="Calibri" pitchFamily="34" charset="0"/>
-                <a:ea typeface="Calibri" pitchFamily="34" charset="-122"/>
-                <a:cs typeface="Calibri" pitchFamily="34" charset="-120"/>
-              </a:rPr>
-              <a:t>Module 6 — Lecon 2</a:t>
-            </a:r>
-            <a:endParaRPr lang="en-US" sz="900" dirty="0"/>
+              <a:t>Il est disponible sur plusieurs réseaux : Tron, Ethereum, BNB Chain, Solana, ...</a:t>
+            </a:r>
+            <a:endParaRPr lang="en-US" sz="1200" dirty="0"/>
           </a:p>
         </p:txBody>
       </p:sp>
@@ -3667,8 +3911,8 @@
         </p:nvSpPr>
         <p:spPr>
           <a:xfrm>
-            <a:off x="731520" y="365760"/>
-            <a:ext cx="7680960" cy="548640"/>
+            <a:off x="731520" y="274320"/>
+            <a:ext cx="7680960" cy="502920"/>
           </a:xfrm>
           <a:prstGeom prst="rect">
             <a:avLst/>
@@ -3684,9 +3928,9 @@
               <a:buNone/>
             </a:pPr>
             <a:r>
-              <a:rPr lang="en-US" sz="2200" b="1" dirty="0">
-                <a:solidFill>
-                  <a:srgbClr val="00BFA6"/>
+              <a:rPr lang="en-US" sz="2000" b="1" dirty="0">
+                <a:solidFill>
+                  <a:srgbClr val="06B6D4"/>
                 </a:solidFill>
                 <a:latin typeface="Calibri" pitchFamily="34" charset="0"/>
                 <a:ea typeface="Calibri" pitchFamily="34" charset="-122"/>
@@ -3694,20 +3938,66 @@
               </a:rPr>
               <a:t>Les cas d'usage concrets en Afrique</a:t>
             </a:r>
-            <a:endParaRPr lang="en-US" sz="2200" dirty="0"/>
-          </a:p>
-        </p:txBody>
-      </p:sp>
-      <p:sp>
-        <p:nvSpPr>
-          <p:cNvPr id="3" name="Text 1"/>
-          <p:cNvSpPr txBox="1"/>
-          <p:nvPr/>
-        </p:nvSpPr>
-        <p:spPr>
-          <a:xfrm>
-            <a:off x="731520" y="1051560"/>
-            <a:ext cx="7680960" cy="3657600"/>
+            <a:endParaRPr lang="en-US" sz="2000" dirty="0"/>
+          </a:p>
+        </p:txBody>
+      </p:sp>
+      <p:sp>
+        <p:nvSpPr>
+          <p:cNvPr id="3" name="Shape 1"/>
+          <p:cNvSpPr/>
+          <p:nvPr/>
+        </p:nvSpPr>
+        <p:spPr>
+          <a:xfrm>
+            <a:off x="594360" y="1005840"/>
+            <a:ext cx="2468880" cy="1371600"/>
+          </a:xfrm>
+          <a:prstGeom prst="roundRect">
+            <a:avLst>
+              <a:gd name="adj" fmla="val 6667"/>
+            </a:avLst>
+          </a:prstGeom>
+          <a:solidFill>
+            <a:srgbClr val="1A2332"/>
+          </a:solidFill>
+          <a:ln/>
+        </p:spPr>
+      </p:sp>
+      <p:pic>
+        <p:nvPicPr>
+          <p:cNvPr id="4" name="Image 0" descr="preencoded.png">    </p:cNvPr>
+          <p:cNvPicPr>
+            <a:picLocks noChangeAspect="1"/>
+          </p:cNvPicPr>
+          <p:nvPr/>
+        </p:nvPicPr>
+        <p:blipFill>
+          <a:blip r:embed="rId1"/>
+          <a:stretch>
+            <a:fillRect/>
+          </a:stretch>
+        </p:blipFill>
+        <p:spPr>
+          <a:xfrm>
+            <a:off x="731520" y="1143000"/>
+            <a:ext cx="502920" cy="502920"/>
+          </a:xfrm>
+          <a:prstGeom prst="rect">
+            <a:avLst/>
+          </a:prstGeom>
+        </p:spPr>
+      </p:pic>
+      <p:sp>
+        <p:nvSpPr>
+          <p:cNvPr id="5" name="Text 2"/>
+          <p:cNvSpPr txBox="1"/>
+          <p:nvPr/>
+        </p:nvSpPr>
+        <p:spPr>
+          <a:xfrm>
+            <a:off x="731520" y="1719072"/>
+            <a:ext cx="2194560" cy="320040"/>
           </a:xfrm>
           <a:prstGeom prst="rect">
             <a:avLst/>
@@ -3719,15 +4009,11 @@
           <a:bodyPr wrap="square" lIns="0" tIns="0" rIns="0" bIns="0" rtlCol="0" anchor="t"/>
           <a:lstStyle/>
           <a:p>
-            <a:pPr marL="342900" indent="-342900">
-              <a:spcAft>
-                <a:spcPts val="800"/>
-              </a:spcAft>
-              <a:buSzPct val="100000"/>
-              <a:buChar char="•"/>
-            </a:pPr>
-            <a:r>
-              <a:rPr lang="en-US" sz="1400" dirty="0">
+            <a:pPr indent="0" marL="0">
+              <a:buNone/>
+            </a:pPr>
+            <a:r>
+              <a:rPr lang="en-US" sz="1100" b="1" dirty="0">
                 <a:solidFill>
                   <a:srgbClr val="FFFFFF"/>
                 </a:solidFill>
@@ -3735,20 +4021,123 @@
                 <a:ea typeface="Calibri" pitchFamily="34" charset="-122"/>
                 <a:cs typeface="Calibri" pitchFamily="34" charset="-120"/>
               </a:rPr>
-              <a:t>Épargner en dollars sans banque : impossible d'ouvrir un compte USD au Sénégal ? Achetez des USDT sur Terex.</a:t>
-            </a:r>
-            <a:endParaRPr lang="en-US" sz="1400" dirty="0"/>
-          </a:p>
-          <a:p>
-            <a:pPr marL="342900" indent="-342900">
-              <a:spcAft>
-                <a:spcPts val="800"/>
-              </a:spcAft>
-              <a:buSzPct val="100000"/>
-              <a:buChar char="•"/>
-            </a:pPr>
-            <a:r>
-              <a:rPr lang="en-US" sz="1400" dirty="0">
+              <a:t>Épargner en dollars sans banque : impossible d'ouvrir un ...</a:t>
+            </a:r>
+            <a:endParaRPr lang="en-US" sz="1100" dirty="0"/>
+          </a:p>
+        </p:txBody>
+      </p:sp>
+      <p:sp>
+        <p:nvSpPr>
+          <p:cNvPr id="6" name="Text 3"/>
+          <p:cNvSpPr txBox="1"/>
+          <p:nvPr/>
+        </p:nvSpPr>
+        <p:spPr>
+          <a:xfrm>
+            <a:off x="731520" y="2011680"/>
+            <a:ext cx="2194560" cy="274320"/>
+          </a:xfrm>
+          <a:prstGeom prst="rect">
+            <a:avLst/>
+          </a:prstGeom>
+          <a:noFill/>
+          <a:ln/>
+        </p:spPr>
+        <p:txBody>
+          <a:bodyPr wrap="square" lIns="0" tIns="0" rIns="0" bIns="0" rtlCol="0" anchor="t"/>
+          <a:lstStyle/>
+          <a:p>
+            <a:pPr indent="0" marL="0">
+              <a:buNone/>
+            </a:pPr>
+            <a:r>
+              <a:rPr lang="en-US" sz="900" dirty="0">
+                <a:solidFill>
+                  <a:srgbClr val="94A3B8"/>
+                </a:solidFill>
+                <a:latin typeface="Calibri" pitchFamily="34" charset="0"/>
+                <a:ea typeface="Calibri" pitchFamily="34" charset="-122"/>
+                <a:cs typeface="Calibri" pitchFamily="34" charset="-120"/>
+              </a:rPr>
+              <a:t> Sénégal ? Achetez des USDT sur Terex.</a:t>
+            </a:r>
+            <a:endParaRPr lang="en-US" sz="900" dirty="0"/>
+          </a:p>
+        </p:txBody>
+      </p:sp>
+      <p:sp>
+        <p:nvSpPr>
+          <p:cNvPr id="7" name="Shape 4"/>
+          <p:cNvSpPr/>
+          <p:nvPr/>
+        </p:nvSpPr>
+        <p:spPr>
+          <a:xfrm>
+            <a:off x="3246120" y="1005840"/>
+            <a:ext cx="2468880" cy="1371600"/>
+          </a:xfrm>
+          <a:prstGeom prst="roundRect">
+            <a:avLst>
+              <a:gd name="adj" fmla="val 6667"/>
+            </a:avLst>
+          </a:prstGeom>
+          <a:solidFill>
+            <a:srgbClr val="1A2332"/>
+          </a:solidFill>
+          <a:ln/>
+        </p:spPr>
+      </p:sp>
+      <p:pic>
+        <p:nvPicPr>
+          <p:cNvPr id="8" name="Image 1" descr="preencoded.png">    </p:cNvPr>
+          <p:cNvPicPr>
+            <a:picLocks noChangeAspect="1"/>
+          </p:cNvPicPr>
+          <p:nvPr/>
+        </p:nvPicPr>
+        <p:blipFill>
+          <a:blip r:embed="rId2"/>
+          <a:stretch>
+            <a:fillRect/>
+          </a:stretch>
+        </p:blipFill>
+        <p:spPr>
+          <a:xfrm>
+            <a:off x="3383280" y="1143000"/>
+            <a:ext cx="502920" cy="502920"/>
+          </a:xfrm>
+          <a:prstGeom prst="rect">
+            <a:avLst/>
+          </a:prstGeom>
+        </p:spPr>
+      </p:pic>
+      <p:sp>
+        <p:nvSpPr>
+          <p:cNvPr id="9" name="Text 5"/>
+          <p:cNvSpPr txBox="1"/>
+          <p:nvPr/>
+        </p:nvSpPr>
+        <p:spPr>
+          <a:xfrm>
+            <a:off x="3383280" y="1719072"/>
+            <a:ext cx="2194560" cy="320040"/>
+          </a:xfrm>
+          <a:prstGeom prst="rect">
+            <a:avLst/>
+          </a:prstGeom>
+          <a:noFill/>
+          <a:ln/>
+        </p:spPr>
+        <p:txBody>
+          <a:bodyPr wrap="square" lIns="0" tIns="0" rIns="0" bIns="0" rtlCol="0" anchor="t"/>
+          <a:lstStyle/>
+          <a:p>
+            <a:pPr indent="0" marL="0">
+              <a:buNone/>
+            </a:pPr>
+            <a:r>
+              <a:rPr lang="en-US" sz="1100" b="1" dirty="0">
                 <a:solidFill>
                   <a:srgbClr val="FFFFFF"/>
                 </a:solidFill>
@@ -3756,20 +4145,123 @@
                 <a:ea typeface="Calibri" pitchFamily="34" charset="-122"/>
                 <a:cs typeface="Calibri" pitchFamily="34" charset="-120"/>
               </a:rPr>
-              <a:t>Payer un fournisseur en Chine : plus rapide et moins cher qu'un virement bancaire.</a:t>
-            </a:r>
-            <a:endParaRPr lang="en-US" sz="1400" dirty="0"/>
-          </a:p>
-          <a:p>
-            <a:pPr marL="342900" indent="-342900">
-              <a:spcAft>
-                <a:spcPts val="800"/>
-              </a:spcAft>
-              <a:buSzPct val="100000"/>
-              <a:buChar char="•"/>
-            </a:pPr>
-            <a:r>
-              <a:rPr lang="en-US" sz="1400" dirty="0">
+              <a:t>Payer un fournisseur en Chine : plus rapide et moins cher...</a:t>
+            </a:r>
+            <a:endParaRPr lang="en-US" sz="1100" dirty="0"/>
+          </a:p>
+        </p:txBody>
+      </p:sp>
+      <p:sp>
+        <p:nvSpPr>
+          <p:cNvPr id="10" name="Text 6"/>
+          <p:cNvSpPr txBox="1"/>
+          <p:nvPr/>
+        </p:nvSpPr>
+        <p:spPr>
+          <a:xfrm>
+            <a:off x="3383280" y="2011680"/>
+            <a:ext cx="2194560" cy="274320"/>
+          </a:xfrm>
+          <a:prstGeom prst="rect">
+            <a:avLst/>
+          </a:prstGeom>
+          <a:noFill/>
+          <a:ln/>
+        </p:spPr>
+        <p:txBody>
+          <a:bodyPr wrap="square" lIns="0" tIns="0" rIns="0" bIns="0" rtlCol="0" anchor="t"/>
+          <a:lstStyle/>
+          <a:p>
+            <a:pPr indent="0" marL="0">
+              <a:buNone/>
+            </a:pPr>
+            <a:r>
+              <a:rPr lang="en-US" sz="900" dirty="0">
+                <a:solidFill>
+                  <a:srgbClr val="94A3B8"/>
+                </a:solidFill>
+                <a:latin typeface="Calibri" pitchFamily="34" charset="0"/>
+                <a:ea typeface="Calibri" pitchFamily="34" charset="-122"/>
+                <a:cs typeface="Calibri" pitchFamily="34" charset="-120"/>
+              </a:rPr>
+              <a:t>nt bancaire.</a:t>
+            </a:r>
+            <a:endParaRPr lang="en-US" sz="900" dirty="0"/>
+          </a:p>
+        </p:txBody>
+      </p:sp>
+      <p:sp>
+        <p:nvSpPr>
+          <p:cNvPr id="11" name="Shape 7"/>
+          <p:cNvSpPr/>
+          <p:nvPr/>
+        </p:nvSpPr>
+        <p:spPr>
+          <a:xfrm>
+            <a:off x="5897880" y="1005840"/>
+            <a:ext cx="2468880" cy="1371600"/>
+          </a:xfrm>
+          <a:prstGeom prst="roundRect">
+            <a:avLst>
+              <a:gd name="adj" fmla="val 6667"/>
+            </a:avLst>
+          </a:prstGeom>
+          <a:solidFill>
+            <a:srgbClr val="1A2332"/>
+          </a:solidFill>
+          <a:ln/>
+        </p:spPr>
+      </p:sp>
+      <p:pic>
+        <p:nvPicPr>
+          <p:cNvPr id="12" name="Image 2" descr="preencoded.png">    </p:cNvPr>
+          <p:cNvPicPr>
+            <a:picLocks noChangeAspect="1"/>
+          </p:cNvPicPr>
+          <p:nvPr/>
+        </p:nvPicPr>
+        <p:blipFill>
+          <a:blip r:embed="rId3"/>
+          <a:stretch>
+            <a:fillRect/>
+          </a:stretch>
+        </p:blipFill>
+        <p:spPr>
+          <a:xfrm>
+            <a:off x="6035040" y="1143000"/>
+            <a:ext cx="502920" cy="502920"/>
+          </a:xfrm>
+          <a:prstGeom prst="rect">
+            <a:avLst/>
+          </a:prstGeom>
+        </p:spPr>
+      </p:pic>
+      <p:sp>
+        <p:nvSpPr>
+          <p:cNvPr id="13" name="Text 8"/>
+          <p:cNvSpPr txBox="1"/>
+          <p:nvPr/>
+        </p:nvSpPr>
+        <p:spPr>
+          <a:xfrm>
+            <a:off x="6035040" y="1719072"/>
+            <a:ext cx="2194560" cy="320040"/>
+          </a:xfrm>
+          <a:prstGeom prst="rect">
+            <a:avLst/>
+          </a:prstGeom>
+          <a:noFill/>
+          <a:ln/>
+        </p:spPr>
+        <p:txBody>
+          <a:bodyPr wrap="square" lIns="0" tIns="0" rIns="0" bIns="0" rtlCol="0" anchor="t"/>
+          <a:lstStyle/>
+          <a:p>
+            <a:pPr indent="0" marL="0">
+              <a:buNone/>
+            </a:pPr>
+            <a:r>
+              <a:rPr lang="en-US" sz="1100" b="1" dirty="0">
                 <a:solidFill>
                   <a:srgbClr val="FFFFFF"/>
                 </a:solidFill>
@@ -3777,20 +4269,123 @@
                 <a:ea typeface="Calibri" pitchFamily="34" charset="-122"/>
                 <a:cs typeface="Calibri" pitchFamily="34" charset="-120"/>
               </a:rPr>
-              <a:t>Envoyer de l'argent à la famille à l'étranger : votre neveu en France reçoit ses USDT en 10 minutes.</a:t>
-            </a:r>
-            <a:endParaRPr lang="en-US" sz="1400" dirty="0"/>
-          </a:p>
-          <a:p>
-            <a:pPr marL="342900" indent="-342900">
-              <a:spcAft>
-                <a:spcPts val="800"/>
-              </a:spcAft>
-              <a:buSzPct val="100000"/>
-              <a:buChar char="•"/>
-            </a:pPr>
-            <a:r>
-              <a:rPr lang="en-US" sz="1400" dirty="0">
+              <a:t>Envoyer de l'argent à la famille à l'étranger : votre nev...</a:t>
+            </a:r>
+            <a:endParaRPr lang="en-US" sz="1100" dirty="0"/>
+          </a:p>
+        </p:txBody>
+      </p:sp>
+      <p:sp>
+        <p:nvSpPr>
+          <p:cNvPr id="14" name="Text 9"/>
+          <p:cNvSpPr txBox="1"/>
+          <p:nvPr/>
+        </p:nvSpPr>
+        <p:spPr>
+          <a:xfrm>
+            <a:off x="6035040" y="2011680"/>
+            <a:ext cx="2194560" cy="274320"/>
+          </a:xfrm>
+          <a:prstGeom prst="rect">
+            <a:avLst/>
+          </a:prstGeom>
+          <a:noFill/>
+          <a:ln/>
+        </p:spPr>
+        <p:txBody>
+          <a:bodyPr wrap="square" lIns="0" tIns="0" rIns="0" bIns="0" rtlCol="0" anchor="t"/>
+          <a:lstStyle/>
+          <a:p>
+            <a:pPr indent="0" marL="0">
+              <a:buNone/>
+            </a:pPr>
+            <a:r>
+              <a:rPr lang="en-US" sz="900" dirty="0">
+                <a:solidFill>
+                  <a:srgbClr val="94A3B8"/>
+                </a:solidFill>
+                <a:latin typeface="Calibri" pitchFamily="34" charset="0"/>
+                <a:ea typeface="Calibri" pitchFamily="34" charset="-122"/>
+                <a:cs typeface="Calibri" pitchFamily="34" charset="-120"/>
+              </a:rPr>
+              <a:t>reçoit ses USDT en 10 minutes.</a:t>
+            </a:r>
+            <a:endParaRPr lang="en-US" sz="900" dirty="0"/>
+          </a:p>
+        </p:txBody>
+      </p:sp>
+      <p:sp>
+        <p:nvSpPr>
+          <p:cNvPr id="15" name="Shape 10"/>
+          <p:cNvSpPr/>
+          <p:nvPr/>
+        </p:nvSpPr>
+        <p:spPr>
+          <a:xfrm>
+            <a:off x="594360" y="2514600"/>
+            <a:ext cx="2468880" cy="1371600"/>
+          </a:xfrm>
+          <a:prstGeom prst="roundRect">
+            <a:avLst>
+              <a:gd name="adj" fmla="val 6667"/>
+            </a:avLst>
+          </a:prstGeom>
+          <a:solidFill>
+            <a:srgbClr val="1A2332"/>
+          </a:solidFill>
+          <a:ln/>
+        </p:spPr>
+      </p:sp>
+      <p:pic>
+        <p:nvPicPr>
+          <p:cNvPr id="16" name="Image 3" descr="preencoded.png">    </p:cNvPr>
+          <p:cNvPicPr>
+            <a:picLocks noChangeAspect="1"/>
+          </p:cNvPicPr>
+          <p:nvPr/>
+        </p:nvPicPr>
+        <p:blipFill>
+          <a:blip r:embed="rId4"/>
+          <a:stretch>
+            <a:fillRect/>
+          </a:stretch>
+        </p:blipFill>
+        <p:spPr>
+          <a:xfrm>
+            <a:off x="731520" y="2651760"/>
+            <a:ext cx="502920" cy="502920"/>
+          </a:xfrm>
+          <a:prstGeom prst="rect">
+            <a:avLst/>
+          </a:prstGeom>
+        </p:spPr>
+      </p:pic>
+      <p:sp>
+        <p:nvSpPr>
+          <p:cNvPr id="17" name="Text 11"/>
+          <p:cNvSpPr txBox="1"/>
+          <p:nvPr/>
+        </p:nvSpPr>
+        <p:spPr>
+          <a:xfrm>
+            <a:off x="731520" y="3227832"/>
+            <a:ext cx="2194560" cy="320040"/>
+          </a:xfrm>
+          <a:prstGeom prst="rect">
+            <a:avLst/>
+          </a:prstGeom>
+          <a:noFill/>
+          <a:ln/>
+        </p:spPr>
+        <p:txBody>
+          <a:bodyPr wrap="square" lIns="0" tIns="0" rIns="0" bIns="0" rtlCol="0" anchor="t"/>
+          <a:lstStyle/>
+          <a:p>
+            <a:pPr indent="0" marL="0">
+              <a:buNone/>
+            </a:pPr>
+            <a:r>
+              <a:rPr lang="en-US" sz="1100" b="1" dirty="0">
                 <a:solidFill>
                   <a:srgbClr val="FFFFFF"/>
                 </a:solidFill>
@@ -3798,20 +4393,123 @@
                 <a:ea typeface="Calibri" pitchFamily="34" charset="-122"/>
                 <a:cs typeface="Calibri" pitchFamily="34" charset="-120"/>
               </a:rPr>
-              <a:t>Recevoir un paiement d'un client international : freelance, e-commerce, consultant — vous êtes payé sans commission bancaire de 3-5%.</a:t>
-            </a:r>
-            <a:endParaRPr lang="en-US" sz="1400" dirty="0"/>
-          </a:p>
-          <a:p>
-            <a:pPr marL="342900" indent="-342900">
-              <a:spcAft>
-                <a:spcPts val="800"/>
-              </a:spcAft>
-              <a:buSzPct val="100000"/>
-              <a:buChar char="•"/>
-            </a:pPr>
-            <a:r>
-              <a:rPr lang="en-US" sz="1400" dirty="0">
+              <a:t>Recevoir un paiement d'un client international : freelanc...</a:t>
+            </a:r>
+            <a:endParaRPr lang="en-US" sz="1100" dirty="0"/>
+          </a:p>
+        </p:txBody>
+      </p:sp>
+      <p:sp>
+        <p:nvSpPr>
+          <p:cNvPr id="18" name="Text 12"/>
+          <p:cNvSpPr txBox="1"/>
+          <p:nvPr/>
+        </p:nvSpPr>
+        <p:spPr>
+          <a:xfrm>
+            <a:off x="731520" y="3520440"/>
+            <a:ext cx="2194560" cy="274320"/>
+          </a:xfrm>
+          <a:prstGeom prst="rect">
+            <a:avLst/>
+          </a:prstGeom>
+          <a:noFill/>
+          <a:ln/>
+        </p:spPr>
+        <p:txBody>
+          <a:bodyPr wrap="square" lIns="0" tIns="0" rIns="0" bIns="0" rtlCol="0" anchor="t"/>
+          <a:lstStyle/>
+          <a:p>
+            <a:pPr indent="0" marL="0">
+              <a:buNone/>
+            </a:pPr>
+            <a:r>
+              <a:rPr lang="en-US" sz="900" dirty="0">
+                <a:solidFill>
+                  <a:srgbClr val="94A3B8"/>
+                </a:solidFill>
+                <a:latin typeface="Calibri" pitchFamily="34" charset="0"/>
+                <a:ea typeface="Calibri" pitchFamily="34" charset="-122"/>
+                <a:cs typeface="Calibri" pitchFamily="34" charset="-120"/>
+              </a:rPr>
+              <a:t>, consultant — vous êtes payé sans commission bancaire de 3-5%.</a:t>
+            </a:r>
+            <a:endParaRPr lang="en-US" sz="900" dirty="0"/>
+          </a:p>
+        </p:txBody>
+      </p:sp>
+      <p:sp>
+        <p:nvSpPr>
+          <p:cNvPr id="19" name="Shape 13"/>
+          <p:cNvSpPr/>
+          <p:nvPr/>
+        </p:nvSpPr>
+        <p:spPr>
+          <a:xfrm>
+            <a:off x="3246120" y="2514600"/>
+            <a:ext cx="2468880" cy="1371600"/>
+          </a:xfrm>
+          <a:prstGeom prst="roundRect">
+            <a:avLst>
+              <a:gd name="adj" fmla="val 6667"/>
+            </a:avLst>
+          </a:prstGeom>
+          <a:solidFill>
+            <a:srgbClr val="1A2332"/>
+          </a:solidFill>
+          <a:ln/>
+        </p:spPr>
+      </p:sp>
+      <p:pic>
+        <p:nvPicPr>
+          <p:cNvPr id="20" name="Image 4" descr="preencoded.png">    </p:cNvPr>
+          <p:cNvPicPr>
+            <a:picLocks noChangeAspect="1"/>
+          </p:cNvPicPr>
+          <p:nvPr/>
+        </p:nvPicPr>
+        <p:blipFill>
+          <a:blip r:embed="rId5"/>
+          <a:stretch>
+            <a:fillRect/>
+          </a:stretch>
+        </p:blipFill>
+        <p:spPr>
+          <a:xfrm>
+            <a:off x="3383280" y="2651760"/>
+            <a:ext cx="502920" cy="502920"/>
+          </a:xfrm>
+          <a:prstGeom prst="rect">
+            <a:avLst/>
+          </a:prstGeom>
+        </p:spPr>
+      </p:pic>
+      <p:sp>
+        <p:nvSpPr>
+          <p:cNvPr id="21" name="Text 14"/>
+          <p:cNvSpPr txBox="1"/>
+          <p:nvPr/>
+        </p:nvSpPr>
+        <p:spPr>
+          <a:xfrm>
+            <a:off x="3383280" y="3227832"/>
+            <a:ext cx="2194560" cy="320040"/>
+          </a:xfrm>
+          <a:prstGeom prst="rect">
+            <a:avLst/>
+          </a:prstGeom>
+          <a:noFill/>
+          <a:ln/>
+        </p:spPr>
+        <p:txBody>
+          <a:bodyPr wrap="square" lIns="0" tIns="0" rIns="0" bIns="0" rtlCol="0" anchor="t"/>
+          <a:lstStyle/>
+          <a:p>
+            <a:pPr indent="0" marL="0">
+              <a:buNone/>
+            </a:pPr>
+            <a:r>
+              <a:rPr lang="en-US" sz="1100" b="1" dirty="0">
                 <a:solidFill>
                   <a:srgbClr val="FFFFFF"/>
                 </a:solidFill>
@@ -3819,22 +4517,22 @@
                 <a:ea typeface="Calibri" pitchFamily="34" charset="-122"/>
                 <a:cs typeface="Calibri" pitchFamily="34" charset="-120"/>
               </a:rPr>
-              <a:t>Faire du trading : USDT est la paire de référence face à toutes les autres cryptos sur les plateformes.</a:t>
-            </a:r>
-            <a:endParaRPr lang="en-US" sz="1400" dirty="0"/>
-          </a:p>
-        </p:txBody>
-      </p:sp>
-      <p:sp>
-        <p:nvSpPr>
-          <p:cNvPr id="4" name="Text 2"/>
-          <p:cNvSpPr txBox="1"/>
-          <p:nvPr/>
-        </p:nvSpPr>
-        <p:spPr>
-          <a:xfrm>
-            <a:off x="731520" y="4709160"/>
-            <a:ext cx="7680960" cy="274320"/>
+              <a:t>Faire du trading : USDT est la paire de référence face à ...</a:t>
+            </a:r>
+            <a:endParaRPr lang="en-US" sz="1100" dirty="0"/>
+          </a:p>
+        </p:txBody>
+      </p:sp>
+      <p:sp>
+        <p:nvSpPr>
+          <p:cNvPr id="22" name="Text 15"/>
+          <p:cNvSpPr txBox="1"/>
+          <p:nvPr/>
+        </p:nvSpPr>
+        <p:spPr>
+          <a:xfrm>
+            <a:off x="3383280" y="3520440"/>
+            <a:ext cx="2194560" cy="274320"/>
           </a:xfrm>
           <a:prstGeom prst="rect">
             <a:avLst/>
@@ -3843,22 +4541,22 @@
           <a:ln/>
         </p:spPr>
         <p:txBody>
-          <a:bodyPr wrap="square" lIns="0" tIns="0" rIns="0" bIns="0" rtlCol="0" anchor="ctr"/>
-          <a:lstStyle/>
-          <a:p>
-            <a:pPr algn="r" indent="0" marL="0">
+          <a:bodyPr wrap="square" lIns="0" tIns="0" rIns="0" bIns="0" rtlCol="0" anchor="t"/>
+          <a:lstStyle/>
+          <a:p>
+            <a:pPr indent="0" marL="0">
               <a:buNone/>
             </a:pPr>
             <a:r>
               <a:rPr lang="en-US" sz="900" dirty="0">
                 <a:solidFill>
-                  <a:srgbClr val="64748B"/>
-                </a:solidFill>
-                <a:latin typeface="Calibri" pitchFamily="34" charset="0"/>
-                <a:ea typeface="Calibri" pitchFamily="34" charset="-122"/>
-                <a:cs typeface="Calibri" pitchFamily="34" charset="-120"/>
-              </a:rPr>
-              <a:t>Module 6 — Lecon 2</a:t>
+                  <a:srgbClr val="94A3B8"/>
+                </a:solidFill>
+                <a:latin typeface="Calibri" pitchFamily="34" charset="0"/>
+                <a:ea typeface="Calibri" pitchFamily="34" charset="-122"/>
+                <a:cs typeface="Calibri" pitchFamily="34" charset="-120"/>
+              </a:rPr>
+              <a:t>tres cryptos sur les plateformes.</a:t>
             </a:r>
             <a:endParaRPr lang="en-US" sz="900" dirty="0"/>
           </a:p>
@@ -3898,14 +4596,60 @@
       </p:grpSpPr>
       <p:sp>
         <p:nvSpPr>
-          <p:cNvPr id="2" name="Text 0"/>
-          <p:cNvSpPr txBox="1"/>
-          <p:nvPr/>
-        </p:nvSpPr>
-        <p:spPr>
-          <a:xfrm>
-            <a:off x="731520" y="365760"/>
-            <a:ext cx="7680960" cy="548640"/>
+          <p:cNvPr id="2" name="Shape 0"/>
+          <p:cNvSpPr/>
+          <p:nvPr/>
+        </p:nvSpPr>
+        <p:spPr>
+          <a:xfrm>
+            <a:off x="7955280" y="182880"/>
+            <a:ext cx="640080" cy="640080"/>
+          </a:xfrm>
+          <a:prstGeom prst="ellipse">
+            <a:avLst/>
+          </a:prstGeom>
+          <a:solidFill>
+            <a:srgbClr val="06B6D4">
+              <a:alpha val="12000"/>
+            </a:srgbClr>
+          </a:solidFill>
+          <a:ln/>
+        </p:spPr>
+      </p:sp>
+      <p:pic>
+        <p:nvPicPr>
+          <p:cNvPr id="3" name="Image 0" descr="preencoded.png">    </p:cNvPr>
+          <p:cNvPicPr>
+            <a:picLocks noChangeAspect="1"/>
+          </p:cNvPicPr>
+          <p:nvPr/>
+        </p:nvPicPr>
+        <p:blipFill>
+          <a:blip r:embed="rId1"/>
+          <a:stretch>
+            <a:fillRect/>
+          </a:stretch>
+        </p:blipFill>
+        <p:spPr>
+          <a:xfrm>
+            <a:off x="8028432" y="256032"/>
+            <a:ext cx="493776" cy="493776"/>
+          </a:xfrm>
+          <a:prstGeom prst="rect">
+            <a:avLst/>
+          </a:prstGeom>
+        </p:spPr>
+      </p:pic>
+      <p:sp>
+        <p:nvSpPr>
+          <p:cNvPr id="4" name="Text 1"/>
+          <p:cNvSpPr txBox="1"/>
+          <p:nvPr/>
+        </p:nvSpPr>
+        <p:spPr>
+          <a:xfrm>
+            <a:off x="731520" y="274320"/>
+            <a:ext cx="7132320" cy="502920"/>
           </a:xfrm>
           <a:prstGeom prst="rect">
             <a:avLst/>
@@ -3921,9 +4665,9 @@
               <a:buNone/>
             </a:pPr>
             <a:r>
-              <a:rPr lang="en-US" sz="2200" b="1" dirty="0">
-                <a:solidFill>
-                  <a:srgbClr val="00BFA6"/>
+              <a:rPr lang="en-US" sz="2000" b="1" dirty="0">
+                <a:solidFill>
+                  <a:srgbClr val="06B6D4"/>
                 </a:solidFill>
                 <a:latin typeface="Calibri" pitchFamily="34" charset="0"/>
                 <a:ea typeface="Calibri" pitchFamily="34" charset="-122"/>
@@ -3931,19 +4675,19 @@
               </a:rPr>
               <a:t>Est-ce que USDT est risqué ?</a:t>
             </a:r>
-            <a:endParaRPr lang="en-US" sz="2200" dirty="0"/>
-          </a:p>
-        </p:txBody>
-      </p:sp>
-      <p:sp>
-        <p:nvSpPr>
-          <p:cNvPr id="3" name="Text 1"/>
-          <p:cNvSpPr txBox="1"/>
-          <p:nvPr/>
-        </p:nvSpPr>
-        <p:spPr>
-          <a:xfrm>
-            <a:off x="731520" y="1051560"/>
+            <a:endParaRPr lang="en-US" sz="2000" dirty="0"/>
+          </a:p>
+        </p:txBody>
+      </p:sp>
+      <p:sp>
+        <p:nvSpPr>
+          <p:cNvPr id="5" name="Text 2"/>
+          <p:cNvSpPr txBox="1"/>
+          <p:nvPr/>
+        </p:nvSpPr>
+        <p:spPr>
+          <a:xfrm>
+            <a:off x="731520" y="960120"/>
             <a:ext cx="7680960" cy="3657600"/>
           </a:xfrm>
           <a:prstGeom prst="rect">
@@ -3972,15 +4716,57 @@
                 <a:ea typeface="Calibri" pitchFamily="34" charset="-122"/>
                 <a:cs typeface="Calibri" pitchFamily="34" charset="-120"/>
               </a:rPr>
-              <a:t>Le risque principal est un défaut de Tether (la société qui l'émet). C'est théoriquement possible, mais c'est aujourd'hui le stablecoin le plus liquide et l'un des plus scrutés ...</a:t>
+              <a:t>Le risque principal est un défaut de Tether (la société qui l'émet).</a:t>
             </a:r>
             <a:endParaRPr lang="en-US" sz="1400" dirty="0"/>
           </a:p>
-        </p:txBody>
-      </p:sp>
-      <p:sp>
-        <p:nvSpPr>
-          <p:cNvPr id="4" name="Text 2"/>
+          <a:p>
+            <a:pPr marL="342900" indent="-342900">
+              <a:spcAft>
+                <a:spcPts val="800"/>
+              </a:spcAft>
+              <a:buSzPct val="100000"/>
+              <a:buChar char="•"/>
+            </a:pPr>
+            <a:r>
+              <a:rPr lang="en-US" sz="1400" dirty="0">
+                <a:solidFill>
+                  <a:srgbClr val="FFFFFF"/>
+                </a:solidFill>
+                <a:latin typeface="Calibri" pitchFamily="34" charset="0"/>
+                <a:ea typeface="Calibri" pitchFamily="34" charset="-122"/>
+                <a:cs typeface="Calibri" pitchFamily="34" charset="-120"/>
+              </a:rPr>
+              <a:t>C'est théoriquement possible, mais c'est aujourd'hui le stablecoin le plus liquide et l'un des plus scrutés du secteur.</a:t>
+            </a:r>
+            <a:endParaRPr lang="en-US" sz="1400" dirty="0"/>
+          </a:p>
+          <a:p>
+            <a:pPr marL="342900" indent="-342900">
+              <a:spcAft>
+                <a:spcPts val="800"/>
+              </a:spcAft>
+              <a:buSzPct val="100000"/>
+              <a:buChar char="•"/>
+            </a:pPr>
+            <a:r>
+              <a:rPr lang="en-US" sz="1400" dirty="0">
+                <a:solidFill>
+                  <a:srgbClr val="FFFFFF"/>
+                </a:solidFill>
+                <a:latin typeface="Calibri" pitchFamily="34" charset="0"/>
+                <a:ea typeface="Calibri" pitchFamily="34" charset="-122"/>
+                <a:cs typeface="Calibri" pitchFamily="34" charset="-120"/>
+              </a:rPr>
+              <a:t>Pour limiter le risque, ne stockez pas des centaines de milliers de dollars sur un seul stablecoin — diversifiez avec USDC si les montants sont importants.</a:t>
+            </a:r>
+            <a:endParaRPr lang="en-US" sz="1400" dirty="0"/>
+          </a:p>
+        </p:txBody>
+      </p:sp>
+      <p:sp>
+        <p:nvSpPr>
+          <p:cNvPr id="6" name="Text 3"/>
           <p:cNvSpPr txBox="1"/>
           <p:nvPr/>
         </p:nvSpPr>
@@ -4011,7 +4797,7 @@
                 <a:ea typeface="Calibri" pitchFamily="34" charset="-122"/>
                 <a:cs typeface="Calibri" pitchFamily="34" charset="-120"/>
               </a:rPr>
-              <a:t>Module 6 — Lecon 2</a:t>
+              <a:t>Module 6 — Leçon 2</a:t>
             </a:r>
             <a:endParaRPr lang="en-US" sz="900" dirty="0"/>
           </a:p>
@@ -4049,16 +4835,40 @@
           <a:chExt cx="0" cy="0"/>
         </a:xfrm>
       </p:grpSpPr>
-      <p:sp>
-        <p:nvSpPr>
-          <p:cNvPr id="2" name="Text 0"/>
-          <p:cNvSpPr txBox="1"/>
-          <p:nvPr/>
-        </p:nvSpPr>
-        <p:spPr>
-          <a:xfrm>
-            <a:off x="731520" y="457200"/>
-            <a:ext cx="2743200" cy="365760"/>
+      <p:pic>
+        <p:nvPicPr>
+          <p:cNvPr id="2" name="Image 0" descr="preencoded.png">    </p:cNvPr>
+          <p:cNvPicPr>
+            <a:picLocks noChangeAspect="1"/>
+          </p:cNvPicPr>
+          <p:nvPr/>
+        </p:nvPicPr>
+        <p:blipFill>
+          <a:blip r:embed="rId1"/>
+          <a:stretch>
+            <a:fillRect/>
+          </a:stretch>
+        </p:blipFill>
+        <p:spPr>
+          <a:xfrm>
+            <a:off x="731520" y="320040"/>
+            <a:ext cx="457200" cy="457200"/>
+          </a:xfrm>
+          <a:prstGeom prst="rect">
+            <a:avLst/>
+          </a:prstGeom>
+        </p:spPr>
+      </p:pic>
+      <p:sp>
+        <p:nvSpPr>
+          <p:cNvPr id="3" name="Text 0"/>
+          <p:cNvSpPr txBox="1"/>
+          <p:nvPr/>
+        </p:nvSpPr>
+        <p:spPr>
+          <a:xfrm>
+            <a:off x="1280160" y="365760"/>
+            <a:ext cx="2743200" cy="320040"/>
           </a:xfrm>
           <a:prstGeom prst="rect">
             <a:avLst/>
@@ -4090,14 +4900,14 @@
       </p:sp>
       <p:sp>
         <p:nvSpPr>
-          <p:cNvPr id="3" name="Text 1"/>
-          <p:cNvSpPr txBox="1"/>
-          <p:nvPr/>
-        </p:nvSpPr>
-        <p:spPr>
-          <a:xfrm>
-            <a:off x="731520" y="868680"/>
-            <a:ext cx="7680960" cy="502920"/>
+          <p:cNvPr id="4" name="Text 1"/>
+          <p:cNvSpPr txBox="1"/>
+          <p:nvPr/>
+        </p:nvSpPr>
+        <p:spPr>
+          <a:xfrm>
+            <a:off x="731520" y="822960"/>
+            <a:ext cx="7680960" cy="457200"/>
           </a:xfrm>
           <a:prstGeom prst="rect">
             <a:avLst/>
@@ -4113,7 +4923,7 @@
               <a:buNone/>
             </a:pPr>
             <a:r>
-              <a:rPr lang="en-US" sz="2200" b="1" dirty="0">
+              <a:rPr lang="en-US" sz="2000" b="1" dirty="0">
                 <a:solidFill>
                   <a:srgbClr val="FFFFFF"/>
                 </a:solidFill>
@@ -4123,28 +4933,50 @@
               </a:rPr>
               <a:t>USDT — le pilier de l'échange</a:t>
             </a:r>
-            <a:endParaRPr lang="en-US" sz="2200" dirty="0"/>
-          </a:p>
-        </p:txBody>
-      </p:sp>
-      <p:sp>
-        <p:nvSpPr>
-          <p:cNvPr id="4" name="Text 2"/>
-          <p:cNvSpPr txBox="1"/>
-          <p:nvPr/>
-        </p:nvSpPr>
-        <p:spPr>
-          <a:xfrm>
-            <a:off x="731520" y="1554480"/>
-            <a:ext cx="457200" cy="548640"/>
+            <a:endParaRPr lang="en-US" sz="2000" dirty="0"/>
+          </a:p>
+        </p:txBody>
+      </p:sp>
+      <p:sp>
+        <p:nvSpPr>
+          <p:cNvPr id="5" name="Shape 2"/>
+          <p:cNvSpPr/>
+          <p:nvPr/>
+        </p:nvSpPr>
+        <p:spPr>
+          <a:xfrm>
+            <a:off x="731520" y="1463040"/>
+            <a:ext cx="7680960" cy="548640"/>
           </a:xfrm>
           <a:prstGeom prst="roundRect">
             <a:avLst>
-              <a:gd name="adj" fmla="val 50000"/>
+              <a:gd name="adj" fmla="val 13333"/>
             </a:avLst>
           </a:prstGeom>
           <a:solidFill>
-            <a:srgbClr val="00BFA6"/>
+            <a:srgbClr val="0F1419"/>
+          </a:solidFill>
+          <a:ln/>
+        </p:spPr>
+      </p:sp>
+      <p:sp>
+        <p:nvSpPr>
+          <p:cNvPr id="6" name="Text 3"/>
+          <p:cNvSpPr txBox="1"/>
+          <p:nvPr/>
+        </p:nvSpPr>
+        <p:spPr>
+          <a:xfrm>
+            <a:off x="914400" y="1463040"/>
+            <a:ext cx="411480" cy="548640"/>
+          </a:xfrm>
+          <a:prstGeom prst="roundRect">
+            <a:avLst>
+              <a:gd name="adj" fmla="val 48889"/>
+            </a:avLst>
+          </a:prstGeom>
+          <a:solidFill>
+            <a:srgbClr val="06B6D4"/>
           </a:solidFill>
           <a:ln/>
         </p:spPr>
@@ -4156,7 +4988,7 @@
               <a:buNone/>
             </a:pPr>
             <a:r>
-              <a:rPr lang="en-US" sz="1600" b="1" dirty="0">
+              <a:rPr lang="en-US" sz="1500" b="1" dirty="0">
                 <a:solidFill>
                   <a:srgbClr val="0F1419"/>
                 </a:solidFill>
@@ -4166,20 +4998,20 @@
               </a:rPr>
               <a:t>1</a:t>
             </a:r>
-            <a:endParaRPr lang="en-US" sz="1600" dirty="0"/>
-          </a:p>
-        </p:txBody>
-      </p:sp>
-      <p:sp>
-        <p:nvSpPr>
-          <p:cNvPr id="5" name="Text 3"/>
-          <p:cNvSpPr txBox="1"/>
-          <p:nvPr/>
-        </p:nvSpPr>
-        <p:spPr>
-          <a:xfrm>
-            <a:off x="1371600" y="1554480"/>
-            <a:ext cx="7040880" cy="548640"/>
+            <a:endParaRPr lang="en-US" sz="1500" dirty="0"/>
+          </a:p>
+        </p:txBody>
+      </p:sp>
+      <p:sp>
+        <p:nvSpPr>
+          <p:cNvPr id="7" name="Text 4"/>
+          <p:cNvSpPr txBox="1"/>
+          <p:nvPr/>
+        </p:nvSpPr>
+        <p:spPr>
+          <a:xfrm>
+            <a:off x="1508760" y="1463040"/>
+            <a:ext cx="6766560" cy="548640"/>
           </a:xfrm>
           <a:prstGeom prst="rect">
             <a:avLst/>
@@ -4195,7 +5027,7 @@
               <a:buNone/>
             </a:pPr>
             <a:r>
-              <a:rPr lang="en-US" sz="1400" dirty="0">
+              <a:rPr lang="en-US" sz="1300" dirty="0">
                 <a:solidFill>
                   <a:srgbClr val="FFFFFF"/>
                 </a:solidFill>
@@ -4205,28 +5037,50 @@
               </a:rPr>
               <a:t>Il est partout : accepté sur toutes les plateformes d'échange, tous les portefeuilles, tous les marchands crypto africains.</a:t>
             </a:r>
-            <a:endParaRPr lang="en-US" sz="1400" dirty="0"/>
-          </a:p>
-        </p:txBody>
-      </p:sp>
-      <p:sp>
-        <p:nvSpPr>
-          <p:cNvPr id="6" name="Text 4"/>
-          <p:cNvSpPr txBox="1"/>
-          <p:nvPr/>
-        </p:nvSpPr>
-        <p:spPr>
-          <a:xfrm>
-            <a:off x="731520" y="2212848"/>
-            <a:ext cx="457200" cy="548640"/>
+            <a:endParaRPr lang="en-US" sz="1300" dirty="0"/>
+          </a:p>
+        </p:txBody>
+      </p:sp>
+      <p:sp>
+        <p:nvSpPr>
+          <p:cNvPr id="8" name="Shape 5"/>
+          <p:cNvSpPr/>
+          <p:nvPr/>
+        </p:nvSpPr>
+        <p:spPr>
+          <a:xfrm>
+            <a:off x="731520" y="2103120"/>
+            <a:ext cx="7680960" cy="548640"/>
           </a:xfrm>
           <a:prstGeom prst="roundRect">
             <a:avLst>
-              <a:gd name="adj" fmla="val 50000"/>
+              <a:gd name="adj" fmla="val 13333"/>
             </a:avLst>
           </a:prstGeom>
           <a:solidFill>
-            <a:srgbClr val="00BFA6"/>
+            <a:srgbClr val="0F1419"/>
+          </a:solidFill>
+          <a:ln/>
+        </p:spPr>
+      </p:sp>
+      <p:sp>
+        <p:nvSpPr>
+          <p:cNvPr id="9" name="Text 6"/>
+          <p:cNvSpPr txBox="1"/>
+          <p:nvPr/>
+        </p:nvSpPr>
+        <p:spPr>
+          <a:xfrm>
+            <a:off x="914400" y="2103120"/>
+            <a:ext cx="411480" cy="548640"/>
+          </a:xfrm>
+          <a:prstGeom prst="roundRect">
+            <a:avLst>
+              <a:gd name="adj" fmla="val 48889"/>
+            </a:avLst>
+          </a:prstGeom>
+          <a:solidFill>
+            <a:srgbClr val="06B6D4"/>
           </a:solidFill>
           <a:ln/>
         </p:spPr>
@@ -4238,7 +5092,7 @@
               <a:buNone/>
             </a:pPr>
             <a:r>
-              <a:rPr lang="en-US" sz="1600" b="1" dirty="0">
+              <a:rPr lang="en-US" sz="1500" b="1" dirty="0">
                 <a:solidFill>
                   <a:srgbClr val="0F1419"/>
                 </a:solidFill>
@@ -4248,20 +5102,20 @@
               </a:rPr>
               <a:t>2</a:t>
             </a:r>
-            <a:endParaRPr lang="en-US" sz="1600" dirty="0"/>
-          </a:p>
-        </p:txBody>
-      </p:sp>
-      <p:sp>
-        <p:nvSpPr>
-          <p:cNvPr id="7" name="Text 5"/>
-          <p:cNvSpPr txBox="1"/>
-          <p:nvPr/>
-        </p:nvSpPr>
-        <p:spPr>
-          <a:xfrm>
-            <a:off x="1371600" y="2212848"/>
-            <a:ext cx="7040880" cy="548640"/>
+            <a:endParaRPr lang="en-US" sz="1500" dirty="0"/>
+          </a:p>
+        </p:txBody>
+      </p:sp>
+      <p:sp>
+        <p:nvSpPr>
+          <p:cNvPr id="10" name="Text 7"/>
+          <p:cNvSpPr txBox="1"/>
+          <p:nvPr/>
+        </p:nvSpPr>
+        <p:spPr>
+          <a:xfrm>
+            <a:off x="1508760" y="2103120"/>
+            <a:ext cx="6766560" cy="548640"/>
           </a:xfrm>
           <a:prstGeom prst="rect">
             <a:avLst/>
@@ -4277,7 +5131,7 @@
               <a:buNone/>
             </a:pPr>
             <a:r>
-              <a:rPr lang="en-US" sz="1400" dirty="0">
+              <a:rPr lang="en-US" sz="1300" dirty="0">
                 <a:solidFill>
                   <a:srgbClr val="FFFFFF"/>
                 </a:solidFill>
@@ -4287,28 +5141,50 @@
               </a:rPr>
               <a:t>Il est stable : 1 USDT ≈ 1 USD, à quelques dixièmes de cent près.</a:t>
             </a:r>
-            <a:endParaRPr lang="en-US" sz="1400" dirty="0"/>
-          </a:p>
-        </p:txBody>
-      </p:sp>
-      <p:sp>
-        <p:nvSpPr>
-          <p:cNvPr id="8" name="Text 6"/>
-          <p:cNvSpPr txBox="1"/>
-          <p:nvPr/>
-        </p:nvSpPr>
-        <p:spPr>
-          <a:xfrm>
-            <a:off x="731520" y="2871216"/>
-            <a:ext cx="457200" cy="548640"/>
+            <a:endParaRPr lang="en-US" sz="1300" dirty="0"/>
+          </a:p>
+        </p:txBody>
+      </p:sp>
+      <p:sp>
+        <p:nvSpPr>
+          <p:cNvPr id="11" name="Shape 8"/>
+          <p:cNvSpPr/>
+          <p:nvPr/>
+        </p:nvSpPr>
+        <p:spPr>
+          <a:xfrm>
+            <a:off x="731520" y="2743200"/>
+            <a:ext cx="7680960" cy="548640"/>
           </a:xfrm>
           <a:prstGeom prst="roundRect">
             <a:avLst>
-              <a:gd name="adj" fmla="val 50000"/>
+              <a:gd name="adj" fmla="val 13333"/>
             </a:avLst>
           </a:prstGeom>
           <a:solidFill>
-            <a:srgbClr val="00BFA6"/>
+            <a:srgbClr val="0F1419"/>
+          </a:solidFill>
+          <a:ln/>
+        </p:spPr>
+      </p:sp>
+      <p:sp>
+        <p:nvSpPr>
+          <p:cNvPr id="12" name="Text 9"/>
+          <p:cNvSpPr txBox="1"/>
+          <p:nvPr/>
+        </p:nvSpPr>
+        <p:spPr>
+          <a:xfrm>
+            <a:off x="914400" y="2743200"/>
+            <a:ext cx="411480" cy="548640"/>
+          </a:xfrm>
+          <a:prstGeom prst="roundRect">
+            <a:avLst>
+              <a:gd name="adj" fmla="val 48889"/>
+            </a:avLst>
+          </a:prstGeom>
+          <a:solidFill>
+            <a:srgbClr val="06B6D4"/>
           </a:solidFill>
           <a:ln/>
         </p:spPr>
@@ -4320,7 +5196,7 @@
               <a:buNone/>
             </a:pPr>
             <a:r>
-              <a:rPr lang="en-US" sz="1600" b="1" dirty="0">
+              <a:rPr lang="en-US" sz="1500" b="1" dirty="0">
                 <a:solidFill>
                   <a:srgbClr val="0F1419"/>
                 </a:solidFill>
@@ -4330,20 +5206,20 @@
               </a:rPr>
               <a:t>3</a:t>
             </a:r>
-            <a:endParaRPr lang="en-US" sz="1600" dirty="0"/>
-          </a:p>
-        </p:txBody>
-      </p:sp>
-      <p:sp>
-        <p:nvSpPr>
-          <p:cNvPr id="9" name="Text 7"/>
-          <p:cNvSpPr txBox="1"/>
-          <p:nvPr/>
-        </p:nvSpPr>
-        <p:spPr>
-          <a:xfrm>
-            <a:off x="1371600" y="2871216"/>
-            <a:ext cx="7040880" cy="548640"/>
+            <a:endParaRPr lang="en-US" sz="1500" dirty="0"/>
+          </a:p>
+        </p:txBody>
+      </p:sp>
+      <p:sp>
+        <p:nvSpPr>
+          <p:cNvPr id="13" name="Text 10"/>
+          <p:cNvSpPr txBox="1"/>
+          <p:nvPr/>
+        </p:nvSpPr>
+        <p:spPr>
+          <a:xfrm>
+            <a:off x="1508760" y="2743200"/>
+            <a:ext cx="6766560" cy="548640"/>
           </a:xfrm>
           <a:prstGeom prst="rect">
             <a:avLst/>
@@ -4359,7 +5235,7 @@
               <a:buNone/>
             </a:pPr>
             <a:r>
-              <a:rPr lang="en-US" sz="1400" dirty="0">
+              <a:rPr lang="en-US" sz="1300" dirty="0">
                 <a:solidFill>
                   <a:srgbClr val="FFFFFF"/>
                 </a:solidFill>
@@ -4369,28 +5245,50 @@
               </a:rPr>
               <a:t>Il traverse les frontières : envoyer 500 USDT du Sénégal au Cameroun prend 10 minutes et coûte moins de 1$. Impossible avec un virement bancaire cl...</a:t>
             </a:r>
-            <a:endParaRPr lang="en-US" sz="1400" dirty="0"/>
-          </a:p>
-        </p:txBody>
-      </p:sp>
-      <p:sp>
-        <p:nvSpPr>
-          <p:cNvPr id="10" name="Text 8"/>
-          <p:cNvSpPr txBox="1"/>
-          <p:nvPr/>
-        </p:nvSpPr>
-        <p:spPr>
-          <a:xfrm>
-            <a:off x="731520" y="3529584"/>
-            <a:ext cx="457200" cy="548640"/>
+            <a:endParaRPr lang="en-US" sz="1300" dirty="0"/>
+          </a:p>
+        </p:txBody>
+      </p:sp>
+      <p:sp>
+        <p:nvSpPr>
+          <p:cNvPr id="14" name="Shape 11"/>
+          <p:cNvSpPr/>
+          <p:nvPr/>
+        </p:nvSpPr>
+        <p:spPr>
+          <a:xfrm>
+            <a:off x="731520" y="3383280"/>
+            <a:ext cx="7680960" cy="548640"/>
           </a:xfrm>
           <a:prstGeom prst="roundRect">
             <a:avLst>
-              <a:gd name="adj" fmla="val 50000"/>
+              <a:gd name="adj" fmla="val 13333"/>
             </a:avLst>
           </a:prstGeom>
           <a:solidFill>
-            <a:srgbClr val="00BFA6"/>
+            <a:srgbClr val="0F1419"/>
+          </a:solidFill>
+          <a:ln/>
+        </p:spPr>
+      </p:sp>
+      <p:sp>
+        <p:nvSpPr>
+          <p:cNvPr id="15" name="Text 12"/>
+          <p:cNvSpPr txBox="1"/>
+          <p:nvPr/>
+        </p:nvSpPr>
+        <p:spPr>
+          <a:xfrm>
+            <a:off x="914400" y="3383280"/>
+            <a:ext cx="411480" cy="548640"/>
+          </a:xfrm>
+          <a:prstGeom prst="roundRect">
+            <a:avLst>
+              <a:gd name="adj" fmla="val 48889"/>
+            </a:avLst>
+          </a:prstGeom>
+          <a:solidFill>
+            <a:srgbClr val="06B6D4"/>
           </a:solidFill>
           <a:ln/>
         </p:spPr>
@@ -4402,7 +5300,7 @@
               <a:buNone/>
             </a:pPr>
             <a:r>
-              <a:rPr lang="en-US" sz="1600" b="1" dirty="0">
+              <a:rPr lang="en-US" sz="1500" b="1" dirty="0">
                 <a:solidFill>
                   <a:srgbClr val="0F1419"/>
                 </a:solidFill>
@@ -4412,20 +5310,20 @@
               </a:rPr>
               <a:t>4</a:t>
             </a:r>
-            <a:endParaRPr lang="en-US" sz="1600" dirty="0"/>
-          </a:p>
-        </p:txBody>
-      </p:sp>
-      <p:sp>
-        <p:nvSpPr>
-          <p:cNvPr id="11" name="Text 9"/>
-          <p:cNvSpPr txBox="1"/>
-          <p:nvPr/>
-        </p:nvSpPr>
-        <p:spPr>
-          <a:xfrm>
-            <a:off x="1371600" y="3529584"/>
-            <a:ext cx="7040880" cy="548640"/>
+            <a:endParaRPr lang="en-US" sz="1500" dirty="0"/>
+          </a:p>
+        </p:txBody>
+      </p:sp>
+      <p:sp>
+        <p:nvSpPr>
+          <p:cNvPr id="16" name="Text 13"/>
+          <p:cNvSpPr txBox="1"/>
+          <p:nvPr/>
+        </p:nvSpPr>
+        <p:spPr>
+          <a:xfrm>
+            <a:off x="1508760" y="3383280"/>
+            <a:ext cx="6766560" cy="548640"/>
           </a:xfrm>
           <a:prstGeom prst="rect">
             <a:avLst/>
@@ -4441,7 +5339,7 @@
               <a:buNone/>
             </a:pPr>
             <a:r>
-              <a:rPr lang="en-US" sz="1400" dirty="0">
+              <a:rPr lang="en-US" sz="1300" dirty="0">
                 <a:solidFill>
                   <a:srgbClr val="FFFFFF"/>
                 </a:solidFill>
@@ -4451,28 +5349,50 @@
               </a:rPr>
               <a:t>Il est disponible sur plusieurs réseaux : Tron, Ethereum, BNB Chain, Solana, Polygon. Vous choisissez selon votre besoin.</a:t>
             </a:r>
-            <a:endParaRPr lang="en-US" sz="1400" dirty="0"/>
-          </a:p>
-        </p:txBody>
-      </p:sp>
-      <p:sp>
-        <p:nvSpPr>
-          <p:cNvPr id="12" name="Text 10"/>
-          <p:cNvSpPr txBox="1"/>
-          <p:nvPr/>
-        </p:nvSpPr>
-        <p:spPr>
-          <a:xfrm>
-            <a:off x="731520" y="4187952"/>
-            <a:ext cx="457200" cy="548640"/>
+            <a:endParaRPr lang="en-US" sz="1300" dirty="0"/>
+          </a:p>
+        </p:txBody>
+      </p:sp>
+      <p:sp>
+        <p:nvSpPr>
+          <p:cNvPr id="17" name="Shape 14"/>
+          <p:cNvSpPr/>
+          <p:nvPr/>
+        </p:nvSpPr>
+        <p:spPr>
+          <a:xfrm>
+            <a:off x="731520" y="4023360"/>
+            <a:ext cx="7680960" cy="548640"/>
           </a:xfrm>
           <a:prstGeom prst="roundRect">
             <a:avLst>
-              <a:gd name="adj" fmla="val 50000"/>
+              <a:gd name="adj" fmla="val 13333"/>
             </a:avLst>
           </a:prstGeom>
           <a:solidFill>
-            <a:srgbClr val="00BFA6"/>
+            <a:srgbClr val="0F1419"/>
+          </a:solidFill>
+          <a:ln/>
+        </p:spPr>
+      </p:sp>
+      <p:sp>
+        <p:nvSpPr>
+          <p:cNvPr id="18" name="Text 15"/>
+          <p:cNvSpPr txBox="1"/>
+          <p:nvPr/>
+        </p:nvSpPr>
+        <p:spPr>
+          <a:xfrm>
+            <a:off x="914400" y="4023360"/>
+            <a:ext cx="411480" cy="548640"/>
+          </a:xfrm>
+          <a:prstGeom prst="roundRect">
+            <a:avLst>
+              <a:gd name="adj" fmla="val 48889"/>
+            </a:avLst>
+          </a:prstGeom>
+          <a:solidFill>
+            <a:srgbClr val="06B6D4"/>
           </a:solidFill>
           <a:ln/>
         </p:spPr>
@@ -4484,7 +5404,7 @@
               <a:buNone/>
             </a:pPr>
             <a:r>
-              <a:rPr lang="en-US" sz="1600" b="1" dirty="0">
+              <a:rPr lang="en-US" sz="1500" b="1" dirty="0">
                 <a:solidFill>
                   <a:srgbClr val="0F1419"/>
                 </a:solidFill>
@@ -4494,20 +5414,20 @@
               </a:rPr>
               <a:t>5</a:t>
             </a:r>
-            <a:endParaRPr lang="en-US" sz="1600" dirty="0"/>
-          </a:p>
-        </p:txBody>
-      </p:sp>
-      <p:sp>
-        <p:nvSpPr>
-          <p:cNvPr id="13" name="Text 11"/>
-          <p:cNvSpPr txBox="1"/>
-          <p:nvPr/>
-        </p:nvSpPr>
-        <p:spPr>
-          <a:xfrm>
-            <a:off x="1371600" y="4187952"/>
-            <a:ext cx="7040880" cy="548640"/>
+            <a:endParaRPr lang="en-US" sz="1500" dirty="0"/>
+          </a:p>
+        </p:txBody>
+      </p:sp>
+      <p:sp>
+        <p:nvSpPr>
+          <p:cNvPr id="19" name="Text 16"/>
+          <p:cNvSpPr txBox="1"/>
+          <p:nvPr/>
+        </p:nvSpPr>
+        <p:spPr>
+          <a:xfrm>
+            <a:off x="1508760" y="4023360"/>
+            <a:ext cx="6766560" cy="548640"/>
           </a:xfrm>
           <a:prstGeom prst="rect">
             <a:avLst/>
@@ -4523,7 +5443,7 @@
               <a:buNone/>
             </a:pPr>
             <a:r>
-              <a:rPr lang="en-US" sz="1400" dirty="0">
+              <a:rPr lang="en-US" sz="1300" dirty="0">
                 <a:solidFill>
                   <a:srgbClr val="FFFFFF"/>
                 </a:solidFill>
@@ -4533,7 +5453,7 @@
               </a:rPr>
               <a:t>Épargner en dollars sans banque : impossible d'ouvrir un compte USD au Sénégal ? Achetez des USDT sur Terex.</a:t>
             </a:r>
-            <a:endParaRPr lang="en-US" sz="1400" dirty="0"/>
+            <a:endParaRPr lang="en-US" sz="1300" dirty="0"/>
           </a:p>
         </p:txBody>
       </p:sp>
@@ -4577,12 +5497,12 @@
         </p:nvSpPr>
         <p:spPr>
           <a:xfrm>
-            <a:off x="548640" y="731520"/>
-            <a:ext cx="8046720" cy="3657600"/>
+            <a:off x="548640" y="548640"/>
+            <a:ext cx="8046720" cy="3840480"/>
           </a:xfrm>
           <a:prstGeom prst="roundRect">
             <a:avLst>
-              <a:gd name="adj" fmla="val 3750"/>
+              <a:gd name="adj" fmla="val 3571"/>
             </a:avLst>
           </a:prstGeom>
           <a:solidFill>
@@ -4593,14 +5513,58 @@
       </p:sp>
       <p:sp>
         <p:nvSpPr>
-          <p:cNvPr id="3" name="Text 1"/>
-          <p:cNvSpPr txBox="1"/>
-          <p:nvPr/>
-        </p:nvSpPr>
-        <p:spPr>
-          <a:xfrm>
-            <a:off x="822960" y="914400"/>
-            <a:ext cx="2743200" cy="411480"/>
+          <p:cNvPr id="3" name="Shape 1"/>
+          <p:cNvSpPr/>
+          <p:nvPr/>
+        </p:nvSpPr>
+        <p:spPr>
+          <a:xfrm>
+            <a:off x="548640" y="548640"/>
+            <a:ext cx="54864" cy="3840480"/>
+          </a:xfrm>
+          <a:prstGeom prst="rect">
+            <a:avLst/>
+          </a:prstGeom>
+          <a:solidFill>
+            <a:srgbClr val="EF4444"/>
+          </a:solidFill>
+          <a:ln/>
+        </p:spPr>
+      </p:sp>
+      <p:pic>
+        <p:nvPicPr>
+          <p:cNvPr id="4" name="Image 0" descr="preencoded.png">    </p:cNvPr>
+          <p:cNvPicPr>
+            <a:picLocks noChangeAspect="1"/>
+          </p:cNvPicPr>
+          <p:nvPr/>
+        </p:nvPicPr>
+        <p:blipFill>
+          <a:blip r:embed="rId1"/>
+          <a:stretch>
+            <a:fillRect/>
+          </a:stretch>
+        </p:blipFill>
+        <p:spPr>
+          <a:xfrm>
+            <a:off x="914400" y="777240"/>
+            <a:ext cx="548640" cy="548640"/>
+          </a:xfrm>
+          <a:prstGeom prst="rect">
+            <a:avLst/>
+          </a:prstGeom>
+        </p:spPr>
+      </p:pic>
+      <p:sp>
+        <p:nvSpPr>
+          <p:cNvPr id="5" name="Text 2"/>
+          <p:cNvSpPr txBox="1"/>
+          <p:nvPr/>
+        </p:nvSpPr>
+        <p:spPr>
+          <a:xfrm>
+            <a:off x="1600200" y="777240"/>
+            <a:ext cx="2743200" cy="320040"/>
           </a:xfrm>
           <a:prstGeom prst="rect">
             <a:avLst/>
@@ -4616,7 +5580,7 @@
               <a:buNone/>
             </a:pPr>
             <a:r>
-              <a:rPr lang="en-US" sz="1400" b="1" spc="300" kern="0" dirty="0">
+              <a:rPr lang="en-US" sz="1200" b="1" spc="300" kern="0" dirty="0">
                 <a:solidFill>
                   <a:srgbClr val="EF4444"/>
                 </a:solidFill>
@@ -4626,20 +5590,20 @@
               </a:rPr>
               <a:t>ATTENTION</a:t>
             </a:r>
-            <a:endParaRPr lang="en-US" sz="1400" dirty="0"/>
-          </a:p>
-        </p:txBody>
-      </p:sp>
-      <p:sp>
-        <p:nvSpPr>
-          <p:cNvPr id="4" name="Text 2"/>
-          <p:cNvSpPr txBox="1"/>
-          <p:nvPr/>
-        </p:nvSpPr>
-        <p:spPr>
-          <a:xfrm>
-            <a:off x="822960" y="1371600"/>
-            <a:ext cx="7498080" cy="2194560"/>
+            <a:endParaRPr lang="en-US" sz="1200" dirty="0"/>
+          </a:p>
+        </p:txBody>
+      </p:sp>
+      <p:sp>
+        <p:nvSpPr>
+          <p:cNvPr id="6" name="Text 3"/>
+          <p:cNvSpPr txBox="1"/>
+          <p:nvPr/>
+        </p:nvSpPr>
+        <p:spPr>
+          <a:xfrm>
+            <a:off x="914400" y="1371600"/>
+            <a:ext cx="7406640" cy="2286000"/>
           </a:xfrm>
           <a:prstGeom prst="rect">
             <a:avLst/>
@@ -4701,35 +5665,105 @@
           <a:chExt cx="0" cy="0"/>
         </a:xfrm>
       </p:grpSpPr>
-      <p:sp>
-        <p:nvSpPr>
-          <p:cNvPr id="2" name="Shape 0"/>
+      <p:pic>
+        <p:nvPicPr>
+          <p:cNvPr id="2" name="Image 0" descr="preencoded.png">    </p:cNvPr>
+          <p:cNvPicPr>
+            <a:picLocks noChangeAspect="1"/>
+          </p:cNvPicPr>
+          <p:nvPr/>
+        </p:nvPicPr>
+        <p:blipFill>
+          <a:blip r:embed="rId1"/>
+          <a:stretch>
+            <a:fillRect/>
+          </a:stretch>
+        </p:blipFill>
+        <p:spPr>
+          <a:xfrm>
+            <a:off x="7315200" y="548640"/>
+            <a:ext cx="1280160" cy="1280160"/>
+          </a:xfrm>
+          <a:prstGeom prst="rect">
+            <a:avLst/>
+          </a:prstGeom>
+        </p:spPr>
+      </p:pic>
+      <p:pic>
+        <p:nvPicPr>
+          <p:cNvPr id="3" name="Image 1" descr="preencoded.png">    </p:cNvPr>
+          <p:cNvPicPr>
+            <a:picLocks noChangeAspect="1"/>
+          </p:cNvPicPr>
+          <p:nvPr/>
+        </p:nvPicPr>
+        <p:blipFill>
+          <a:blip r:embed="rId2"/>
+          <a:stretch>
+            <a:fillRect/>
+          </a:stretch>
+        </p:blipFill>
+        <p:spPr>
+          <a:xfrm>
+            <a:off x="7772400" y="2011680"/>
+            <a:ext cx="822960" cy="822960"/>
+          </a:xfrm>
+          <a:prstGeom prst="rect">
+            <a:avLst/>
+          </a:prstGeom>
+        </p:spPr>
+      </p:pic>
+      <p:sp>
+        <p:nvSpPr>
+          <p:cNvPr id="4" name="Shape 0"/>
           <p:cNvSpPr/>
           <p:nvPr/>
         </p:nvSpPr>
         <p:spPr>
           <a:xfrm>
-            <a:off x="548640" y="914400"/>
-            <a:ext cx="45720" cy="2560320"/>
-          </a:xfrm>
-          <a:prstGeom prst="rect">
+            <a:off x="6583680" y="-274320"/>
+            <a:ext cx="3200400" cy="3200400"/>
+          </a:xfrm>
+          <a:prstGeom prst="ellipse">
             <a:avLst/>
           </a:prstGeom>
           <a:solidFill>
-            <a:srgbClr val="00BFA6"/>
+            <a:srgbClr val="06B6D4">
+              <a:alpha val="6000"/>
+            </a:srgbClr>
           </a:solidFill>
           <a:ln/>
         </p:spPr>
       </p:sp>
       <p:sp>
         <p:nvSpPr>
-          <p:cNvPr id="3" name="Text 1"/>
-          <p:cNvSpPr txBox="1"/>
-          <p:nvPr/>
-        </p:nvSpPr>
-        <p:spPr>
-          <a:xfrm>
-            <a:off x="822960" y="1097280"/>
+          <p:cNvPr id="5" name="Shape 1"/>
+          <p:cNvSpPr/>
+          <p:nvPr/>
+        </p:nvSpPr>
+        <p:spPr>
+          <a:xfrm>
+            <a:off x="731520" y="914400"/>
+            <a:ext cx="45720" cy="2194560"/>
+          </a:xfrm>
+          <a:prstGeom prst="rect">
+            <a:avLst/>
+          </a:prstGeom>
+          <a:solidFill>
+            <a:srgbClr val="06B6D4"/>
+          </a:solidFill>
+          <a:ln/>
+        </p:spPr>
+      </p:sp>
+      <p:sp>
+        <p:nvSpPr>
+          <p:cNvPr id="6" name="Text 2"/>
+          <p:cNvSpPr txBox="1"/>
+          <p:nvPr/>
+        </p:nvSpPr>
+        <p:spPr>
+          <a:xfrm>
+            <a:off x="960120" y="914400"/>
             <a:ext cx="2743200" cy="365760"/>
           </a:xfrm>
           <a:prstGeom prst="rect">
@@ -4748,13 +5782,13 @@
             <a:r>
               <a:rPr lang="en-US" sz="1200" b="1" spc="200" kern="0" dirty="0">
                 <a:solidFill>
-                  <a:srgbClr val="00BFA6"/>
-                </a:solidFill>
-                <a:latin typeface="Calibri" pitchFamily="34" charset="0"/>
-                <a:ea typeface="Calibri" pitchFamily="34" charset="-122"/>
-                <a:cs typeface="Calibri" pitchFamily="34" charset="-120"/>
-              </a:rPr>
-              <a:t>Lecon 3 / 3</a:t>
+                  <a:srgbClr val="06B6D4"/>
+                </a:solidFill>
+                <a:latin typeface="Calibri" pitchFamily="34" charset="0"/>
+                <a:ea typeface="Calibri" pitchFamily="34" charset="-122"/>
+                <a:cs typeface="Calibri" pitchFamily="34" charset="-120"/>
+              </a:rPr>
+              <a:t>Leçon 3 / 3</a:t>
             </a:r>
             <a:endParaRPr lang="en-US" sz="1200" dirty="0"/>
           </a:p>
@@ -4762,14 +5796,14 @@
       </p:sp>
       <p:sp>
         <p:nvSpPr>
-          <p:cNvPr id="4" name="Text 2"/>
-          <p:cNvSpPr txBox="1"/>
-          <p:nvPr/>
-        </p:nvSpPr>
-        <p:spPr>
-          <a:xfrm>
-            <a:off x="822960" y="1645920"/>
-            <a:ext cx="7498080" cy="1280160"/>
+          <p:cNvPr id="7" name="Text 3"/>
+          <p:cNvSpPr txBox="1"/>
+          <p:nvPr/>
+        </p:nvSpPr>
+        <p:spPr>
+          <a:xfrm>
+            <a:off x="960120" y="1371600"/>
+            <a:ext cx="6217920" cy="1463040"/>
           </a:xfrm>
           <a:prstGeom prst="rect">
             <a:avLst/>
@@ -4785,7 +5819,7 @@
               <a:buNone/>
             </a:pPr>
             <a:r>
-              <a:rPr lang="en-US" sz="3000" b="1" dirty="0">
+              <a:rPr lang="en-US" sz="2800" b="1" dirty="0">
                 <a:solidFill>
                   <a:srgbClr val="FFFFFF"/>
                 </a:solidFill>
@@ -4795,19 +5829,19 @@
               </a:rPr>
               <a:t>TRC20, ERC20, BEP20 — comment choisir ?</a:t>
             </a:r>
-            <a:endParaRPr lang="en-US" sz="3000" dirty="0"/>
-          </a:p>
-        </p:txBody>
-      </p:sp>
-      <p:sp>
-        <p:nvSpPr>
-          <p:cNvPr id="5" name="Text 3"/>
-          <p:cNvSpPr txBox="1"/>
-          <p:nvPr/>
-        </p:nvSpPr>
-        <p:spPr>
-          <a:xfrm>
-            <a:off x="822960" y="4206240"/>
+            <a:endParaRPr lang="en-US" sz="2800" dirty="0"/>
+          </a:p>
+        </p:txBody>
+      </p:sp>
+      <p:sp>
+        <p:nvSpPr>
+          <p:cNvPr id="8" name="Text 4"/>
+          <p:cNvSpPr txBox="1"/>
+          <p:nvPr/>
+        </p:nvSpPr>
+        <p:spPr>
+          <a:xfrm>
+            <a:off x="960120" y="4114800"/>
             <a:ext cx="5486400" cy="320040"/>
           </a:xfrm>
           <a:prstGeom prst="rect">
@@ -4872,7 +5906,53 @@
       </p:grpSpPr>
       <p:sp>
         <p:nvSpPr>
-          <p:cNvPr id="2" name="Text 0"/>
+          <p:cNvPr id="2" name="Shape 0"/>
+          <p:cNvSpPr/>
+          <p:nvPr/>
+        </p:nvSpPr>
+        <p:spPr>
+          <a:xfrm>
+            <a:off x="7955280" y="182880"/>
+            <a:ext cx="640080" cy="640080"/>
+          </a:xfrm>
+          <a:prstGeom prst="ellipse">
+            <a:avLst/>
+          </a:prstGeom>
+          <a:solidFill>
+            <a:srgbClr val="06B6D4">
+              <a:alpha val="12000"/>
+            </a:srgbClr>
+          </a:solidFill>
+          <a:ln/>
+        </p:spPr>
+      </p:sp>
+      <p:pic>
+        <p:nvPicPr>
+          <p:cNvPr id="3" name="Image 0" descr="preencoded.png">    </p:cNvPr>
+          <p:cNvPicPr>
+            <a:picLocks noChangeAspect="1"/>
+          </p:cNvPicPr>
+          <p:nvPr/>
+        </p:nvPicPr>
+        <p:blipFill>
+          <a:blip r:embed="rId1"/>
+          <a:stretch>
+            <a:fillRect/>
+          </a:stretch>
+        </p:blipFill>
+        <p:spPr>
+          <a:xfrm>
+            <a:off x="8028432" y="256032"/>
+            <a:ext cx="493776" cy="493776"/>
+          </a:xfrm>
+          <a:prstGeom prst="rect">
+            <a:avLst/>
+          </a:prstGeom>
+        </p:spPr>
+      </p:pic>
+      <p:sp>
+        <p:nvSpPr>
+          <p:cNvPr id="4" name="Text 1"/>
           <p:cNvSpPr txBox="1"/>
           <p:nvPr/>
         </p:nvSpPr>
@@ -4928,7 +6008,7 @@
                 <a:ea typeface="Calibri" pitchFamily="34" charset="-122"/>
                 <a:cs typeface="Calibri" pitchFamily="34" charset="-120"/>
               </a:rPr>
-              <a:t>Un USDT est un token — un jeton numérique. Ce jeton peut « voyager » sur plusieurs blockchains différentes. On appelle ça un token multi-chaîne.</a:t>
+              <a:t>Un USDT est un token — un jeton numérique.</a:t>
             </a:r>
             <a:endParaRPr lang="en-US" sz="1400" dirty="0"/>
           </a:p>
@@ -4949,15 +6029,78 @@
                 <a:ea typeface="Calibri" pitchFamily="34" charset="-122"/>
                 <a:cs typeface="Calibri" pitchFamily="34" charset="-120"/>
               </a:rPr>
-              <a:t>Quand vous achetez de l'USDT sur Terex, vous devez choisir sur quel réseau vous voulez le recevoir. Le token sera alors émis sur ce réseau spécifique, et vous devrez donner une ...</a:t>
+              <a:t>Ce jeton peut « voyager » sur plusieurs blockchains différentes.</a:t>
             </a:r>
             <a:endParaRPr lang="en-US" sz="1400" dirty="0"/>
           </a:p>
-        </p:txBody>
-      </p:sp>
-      <p:sp>
-        <p:nvSpPr>
-          <p:cNvPr id="3" name="Text 1"/>
+          <a:p>
+            <a:pPr marL="342900" indent="-342900">
+              <a:spcAft>
+                <a:spcPts val="800"/>
+              </a:spcAft>
+              <a:buSzPct val="100000"/>
+              <a:buChar char="•"/>
+            </a:pPr>
+            <a:r>
+              <a:rPr lang="en-US" sz="1400" dirty="0">
+                <a:solidFill>
+                  <a:srgbClr val="FFFFFF"/>
+                </a:solidFill>
+                <a:latin typeface="Calibri" pitchFamily="34" charset="0"/>
+                <a:ea typeface="Calibri" pitchFamily="34" charset="-122"/>
+                <a:cs typeface="Calibri" pitchFamily="34" charset="-120"/>
+              </a:rPr>
+              <a:t>On appelle ça un token multi-chaîne.</a:t>
+            </a:r>
+            <a:endParaRPr lang="en-US" sz="1400" dirty="0"/>
+          </a:p>
+          <a:p>
+            <a:pPr marL="342900" indent="-342900">
+              <a:spcAft>
+                <a:spcPts val="800"/>
+              </a:spcAft>
+              <a:buSzPct val="100000"/>
+              <a:buChar char="•"/>
+            </a:pPr>
+            <a:r>
+              <a:rPr lang="en-US" sz="1400" dirty="0">
+                <a:solidFill>
+                  <a:srgbClr val="FFFFFF"/>
+                </a:solidFill>
+                <a:latin typeface="Calibri" pitchFamily="34" charset="0"/>
+                <a:ea typeface="Calibri" pitchFamily="34" charset="-122"/>
+                <a:cs typeface="Calibri" pitchFamily="34" charset="-120"/>
+              </a:rPr>
+              <a:t>Quand vous achetez de l'USDT sur Terex, vous devez choisir sur quel réseau vous voulez le recevoir.</a:t>
+            </a:r>
+            <a:endParaRPr lang="en-US" sz="1400" dirty="0"/>
+          </a:p>
+          <a:p>
+            <a:pPr marL="342900" indent="-342900">
+              <a:spcAft>
+                <a:spcPts val="800"/>
+              </a:spcAft>
+              <a:buSzPct val="100000"/>
+              <a:buChar char="•"/>
+            </a:pPr>
+            <a:r>
+              <a:rPr lang="en-US" sz="1400" dirty="0">
+                <a:solidFill>
+                  <a:srgbClr val="FFFFFF"/>
+                </a:solidFill>
+                <a:latin typeface="Calibri" pitchFamily="34" charset="0"/>
+                <a:ea typeface="Calibri" pitchFamily="34" charset="-122"/>
+                <a:cs typeface="Calibri" pitchFamily="34" charset="-120"/>
+              </a:rPr>
+              <a:t>Le token sera alors émis sur ce réseau spécifique, et vous devrez donner une adresse compatible avec ce réseau.</a:t>
+            </a:r>
+            <a:endParaRPr lang="en-US" sz="1400" dirty="0"/>
+          </a:p>
+        </p:txBody>
+      </p:sp>
+      <p:sp>
+        <p:nvSpPr>
+          <p:cNvPr id="5" name="Text 2"/>
           <p:cNvSpPr txBox="1"/>
           <p:nvPr/>
         </p:nvSpPr>
@@ -4988,7 +6131,7 @@
                 <a:ea typeface="Calibri" pitchFamily="34" charset="-122"/>
                 <a:cs typeface="Calibri" pitchFamily="34" charset="-120"/>
               </a:rPr>
-              <a:t>Module 6 — Lecon 3</a:t>
+              <a:t>Module 6 — Leçon 3</a:t>
             </a:r>
             <a:endParaRPr lang="en-US" sz="900" dirty="0"/>
           </a:p>
@@ -5034,8 +6177,8 @@
         </p:nvSpPr>
         <p:spPr>
           <a:xfrm>
-            <a:off x="731520" y="365760"/>
-            <a:ext cx="7680960" cy="548640"/>
+            <a:off x="731520" y="274320"/>
+            <a:ext cx="7680960" cy="502920"/>
           </a:xfrm>
           <a:prstGeom prst="rect">
             <a:avLst/>
@@ -5051,9 +6194,9 @@
               <a:buNone/>
             </a:pPr>
             <a:r>
-              <a:rPr lang="en-US" sz="2200" b="1" dirty="0">
-                <a:solidFill>
-                  <a:srgbClr val="00BFA6"/>
+              <a:rPr lang="en-US" sz="2000" b="1" dirty="0">
+                <a:solidFill>
+                  <a:srgbClr val="06B6D4"/>
                 </a:solidFill>
                 <a:latin typeface="Calibri" pitchFamily="34" charset="0"/>
                 <a:ea typeface="Calibri" pitchFamily="34" charset="-122"/>
@@ -5061,7 +6204,7 @@
               </a:rPr>
               <a:t>TRC20 (réseau Tron)</a:t>
             </a:r>
-            <a:endParaRPr lang="en-US" sz="2200" dirty="0"/>
+            <a:endParaRPr lang="en-US" sz="2000" dirty="0"/>
           </a:p>
         </p:txBody>
       </p:sp>
@@ -5073,8 +6216,8 @@
         </p:nvSpPr>
         <p:spPr>
           <a:xfrm>
-            <a:off x="731520" y="1051560"/>
-            <a:ext cx="7680960" cy="3657600"/>
+            <a:off x="731520" y="1005840"/>
+            <a:ext cx="4206240" cy="3474720"/>
           </a:xfrm>
           <a:prstGeom prst="rect">
             <a:avLst/>
@@ -5088,13 +6231,13 @@
           <a:p>
             <a:pPr marL="342900" indent="-342900">
               <a:spcAft>
-                <a:spcPts val="800"/>
+                <a:spcPts val="600"/>
               </a:spcAft>
               <a:buSzPct val="100000"/>
               <a:buChar char="•"/>
             </a:pPr>
             <a:r>
-              <a:rPr lang="en-US" sz="1400" dirty="0">
+              <a:rPr lang="en-US" sz="1300" dirty="0">
                 <a:solidFill>
                   <a:srgbClr val="FFFFFF"/>
                 </a:solidFill>
@@ -5104,18 +6247,18 @@
               </a:rPr>
               <a:t>Frais : ~1 USDT par transfert</a:t>
             </a:r>
-            <a:endParaRPr lang="en-US" sz="1400" dirty="0"/>
+            <a:endParaRPr lang="en-US" sz="1300" dirty="0"/>
           </a:p>
           <a:p>
             <a:pPr marL="342900" indent="-342900">
               <a:spcAft>
-                <a:spcPts val="800"/>
+                <a:spcPts val="600"/>
               </a:spcAft>
               <a:buSzPct val="100000"/>
               <a:buChar char="•"/>
             </a:pPr>
             <a:r>
-              <a:rPr lang="en-US" sz="1400" dirty="0">
+              <a:rPr lang="en-US" sz="1300" dirty="0">
                 <a:solidFill>
                   <a:srgbClr val="FFFFFF"/>
                 </a:solidFill>
@@ -5125,18 +6268,18 @@
               </a:rPr>
               <a:t>Vitesse : 3 secondes</a:t>
             </a:r>
-            <a:endParaRPr lang="en-US" sz="1400" dirty="0"/>
+            <a:endParaRPr lang="en-US" sz="1300" dirty="0"/>
           </a:p>
           <a:p>
             <a:pPr marL="342900" indent="-342900">
               <a:spcAft>
-                <a:spcPts val="800"/>
+                <a:spcPts val="600"/>
               </a:spcAft>
               <a:buSzPct val="100000"/>
               <a:buChar char="•"/>
             </a:pPr>
             <a:r>
-              <a:rPr lang="en-US" sz="1400" dirty="0">
+              <a:rPr lang="en-US" sz="1300" dirty="0">
                 <a:solidFill>
                   <a:srgbClr val="FFFFFF"/>
                 </a:solidFill>
@@ -5146,18 +6289,82 @@
               </a:rPr>
               <a:t>Le + utilisé en Afrique</a:t>
             </a:r>
-            <a:endParaRPr lang="en-US" sz="1400" dirty="0"/>
-          </a:p>
-          <a:p>
-            <a:pPr marL="342900" indent="-342900">
-              <a:spcAft>
-                <a:spcPts val="800"/>
-              </a:spcAft>
-              <a:buSzPct val="100000"/>
-              <a:buChar char="•"/>
-            </a:pPr>
-            <a:r>
-              <a:rPr lang="en-US" sz="1400" dirty="0">
+            <a:endParaRPr lang="en-US" sz="1300" dirty="0"/>
+          </a:p>
+        </p:txBody>
+      </p:sp>
+      <p:sp>
+        <p:nvSpPr>
+          <p:cNvPr id="4" name="Shape 2"/>
+          <p:cNvSpPr/>
+          <p:nvPr/>
+        </p:nvSpPr>
+        <p:spPr>
+          <a:xfrm>
+            <a:off x="5120640" y="1005840"/>
+            <a:ext cx="3474720" cy="640080"/>
+          </a:xfrm>
+          <a:prstGeom prst="roundRect">
+            <a:avLst>
+              <a:gd name="adj" fmla="val 14286"/>
+            </a:avLst>
+          </a:prstGeom>
+          <a:solidFill>
+            <a:srgbClr val="1A2332"/>
+          </a:solidFill>
+          <a:ln/>
+        </p:spPr>
+      </p:sp>
+      <p:pic>
+        <p:nvPicPr>
+          <p:cNvPr id="5" name="Image 0" descr="preencoded.png">    </p:cNvPr>
+          <p:cNvPicPr>
+            <a:picLocks noChangeAspect="1"/>
+          </p:cNvPicPr>
+          <p:nvPr/>
+        </p:nvPicPr>
+        <p:blipFill>
+          <a:blip r:embed="rId1"/>
+          <a:stretch>
+            <a:fillRect/>
+          </a:stretch>
+        </p:blipFill>
+        <p:spPr>
+          <a:xfrm>
+            <a:off x="5257800" y="1106424"/>
+            <a:ext cx="438912" cy="438912"/>
+          </a:xfrm>
+          <a:prstGeom prst="rect">
+            <a:avLst/>
+          </a:prstGeom>
+        </p:spPr>
+      </p:pic>
+      <p:sp>
+        <p:nvSpPr>
+          <p:cNvPr id="6" name="Text 3"/>
+          <p:cNvSpPr txBox="1"/>
+          <p:nvPr/>
+        </p:nvSpPr>
+        <p:spPr>
+          <a:xfrm>
+            <a:off x="5806440" y="1005840"/>
+            <a:ext cx="2651760" cy="640080"/>
+          </a:xfrm>
+          <a:prstGeom prst="rect">
+            <a:avLst/>
+          </a:prstGeom>
+          <a:noFill/>
+          <a:ln/>
+        </p:spPr>
+        <p:txBody>
+          <a:bodyPr wrap="square" lIns="0" tIns="0" rIns="0" bIns="0" rtlCol="0" anchor="ctr"/>
+          <a:lstStyle/>
+          <a:p>
+            <a:pPr indent="0" marL="0">
+              <a:buNone/>
+            </a:pPr>
+            <a:r>
+              <a:rPr lang="en-US" sz="1200" dirty="0">
                 <a:solidFill>
                   <a:srgbClr val="FFFFFF"/>
                 </a:solidFill>
@@ -5167,18 +6374,82 @@
               </a:rPr>
               <a:t>Le + recommandé par Terex pour la plupart des cas</a:t>
             </a:r>
-            <a:endParaRPr lang="en-US" sz="1400" dirty="0"/>
-          </a:p>
-          <a:p>
-            <a:pPr marL="342900" indent="-342900">
-              <a:spcAft>
-                <a:spcPts val="800"/>
-              </a:spcAft>
-              <a:buSzPct val="100000"/>
-              <a:buChar char="•"/>
-            </a:pPr>
-            <a:r>
-              <a:rPr lang="en-US" sz="1400" dirty="0">
+            <a:endParaRPr lang="en-US" sz="1200" dirty="0"/>
+          </a:p>
+        </p:txBody>
+      </p:sp>
+      <p:sp>
+        <p:nvSpPr>
+          <p:cNvPr id="7" name="Shape 4"/>
+          <p:cNvSpPr/>
+          <p:nvPr/>
+        </p:nvSpPr>
+        <p:spPr>
+          <a:xfrm>
+            <a:off x="5120640" y="1737360"/>
+            <a:ext cx="3474720" cy="640080"/>
+          </a:xfrm>
+          <a:prstGeom prst="roundRect">
+            <a:avLst>
+              <a:gd name="adj" fmla="val 14286"/>
+            </a:avLst>
+          </a:prstGeom>
+          <a:solidFill>
+            <a:srgbClr val="1A2332"/>
+          </a:solidFill>
+          <a:ln/>
+        </p:spPr>
+      </p:sp>
+      <p:pic>
+        <p:nvPicPr>
+          <p:cNvPr id="8" name="Image 1" descr="preencoded.png">    </p:cNvPr>
+          <p:cNvPicPr>
+            <a:picLocks noChangeAspect="1"/>
+          </p:cNvPicPr>
+          <p:nvPr/>
+        </p:nvPicPr>
+        <p:blipFill>
+          <a:blip r:embed="rId2"/>
+          <a:stretch>
+            <a:fillRect/>
+          </a:stretch>
+        </p:blipFill>
+        <p:spPr>
+          <a:xfrm>
+            <a:off x="5257800" y="1837944"/>
+            <a:ext cx="438912" cy="438912"/>
+          </a:xfrm>
+          <a:prstGeom prst="rect">
+            <a:avLst/>
+          </a:prstGeom>
+        </p:spPr>
+      </p:pic>
+      <p:sp>
+        <p:nvSpPr>
+          <p:cNvPr id="9" name="Text 5"/>
+          <p:cNvSpPr txBox="1"/>
+          <p:nvPr/>
+        </p:nvSpPr>
+        <p:spPr>
+          <a:xfrm>
+            <a:off x="5806440" y="1737360"/>
+            <a:ext cx="2651760" cy="640080"/>
+          </a:xfrm>
+          <a:prstGeom prst="rect">
+            <a:avLst/>
+          </a:prstGeom>
+          <a:noFill/>
+          <a:ln/>
+        </p:spPr>
+        <p:txBody>
+          <a:bodyPr wrap="square" lIns="0" tIns="0" rIns="0" bIns="0" rtlCol="0" anchor="ctr"/>
+          <a:lstStyle/>
+          <a:p>
+            <a:pPr indent="0" marL="0">
+              <a:buNone/>
+            </a:pPr>
+            <a:r>
+              <a:rPr lang="en-US" sz="1200" dirty="0">
                 <a:solidFill>
                   <a:srgbClr val="FFFFFF"/>
                 </a:solidFill>
@@ -5188,46 +6459,7 @@
               </a:rPr>
               <a:t>Adresse : commence par « T »</a:t>
             </a:r>
-            <a:endParaRPr lang="en-US" sz="1400" dirty="0"/>
-          </a:p>
-        </p:txBody>
-      </p:sp>
-      <p:sp>
-        <p:nvSpPr>
-          <p:cNvPr id="4" name="Text 2"/>
-          <p:cNvSpPr txBox="1"/>
-          <p:nvPr/>
-        </p:nvSpPr>
-        <p:spPr>
-          <a:xfrm>
-            <a:off x="731520" y="4709160"/>
-            <a:ext cx="7680960" cy="274320"/>
-          </a:xfrm>
-          <a:prstGeom prst="rect">
-            <a:avLst/>
-          </a:prstGeom>
-          <a:noFill/>
-          <a:ln/>
-        </p:spPr>
-        <p:txBody>
-          <a:bodyPr wrap="square" lIns="0" tIns="0" rIns="0" bIns="0" rtlCol="0" anchor="ctr"/>
-          <a:lstStyle/>
-          <a:p>
-            <a:pPr algn="r" indent="0" marL="0">
-              <a:buNone/>
-            </a:pPr>
-            <a:r>
-              <a:rPr lang="en-US" sz="900" dirty="0">
-                <a:solidFill>
-                  <a:srgbClr val="64748B"/>
-                </a:solidFill>
-                <a:latin typeface="Calibri" pitchFamily="34" charset="0"/>
-                <a:ea typeface="Calibri" pitchFamily="34" charset="-122"/>
-                <a:cs typeface="Calibri" pitchFamily="34" charset="-120"/>
-              </a:rPr>
-              <a:t>Module 6 — Lecon 3</a:t>
-            </a:r>
-            <a:endParaRPr lang="en-US" sz="900" dirty="0"/>
+            <a:endParaRPr lang="en-US" sz="1200" dirty="0"/>
           </a:p>
         </p:txBody>
       </p:sp>
@@ -5271,8 +6503,8 @@
         </p:nvSpPr>
         <p:spPr>
           <a:xfrm>
-            <a:off x="731520" y="365760"/>
-            <a:ext cx="7680960" cy="548640"/>
+            <a:off x="731520" y="274320"/>
+            <a:ext cx="7680960" cy="502920"/>
           </a:xfrm>
           <a:prstGeom prst="rect">
             <a:avLst/>
@@ -5288,9 +6520,9 @@
               <a:buNone/>
             </a:pPr>
             <a:r>
-              <a:rPr lang="en-US" sz="2200" b="1" dirty="0">
-                <a:solidFill>
-                  <a:srgbClr val="00BFA6"/>
+              <a:rPr lang="en-US" sz="2000" b="1" dirty="0">
+                <a:solidFill>
+                  <a:srgbClr val="06B6D4"/>
                 </a:solidFill>
                 <a:latin typeface="Calibri" pitchFamily="34" charset="0"/>
                 <a:ea typeface="Calibri" pitchFamily="34" charset="-122"/>
@@ -5298,20 +6530,66 @@
               </a:rPr>
               <a:t>BEP20 (réseau BNB Chain)</a:t>
             </a:r>
-            <a:endParaRPr lang="en-US" sz="2200" dirty="0"/>
-          </a:p>
-        </p:txBody>
-      </p:sp>
-      <p:sp>
-        <p:nvSpPr>
-          <p:cNvPr id="3" name="Text 1"/>
-          <p:cNvSpPr txBox="1"/>
-          <p:nvPr/>
-        </p:nvSpPr>
-        <p:spPr>
-          <a:xfrm>
-            <a:off x="731520" y="1051560"/>
-            <a:ext cx="7680960" cy="3657600"/>
+            <a:endParaRPr lang="en-US" sz="2000" dirty="0"/>
+          </a:p>
+        </p:txBody>
+      </p:sp>
+      <p:sp>
+        <p:nvSpPr>
+          <p:cNvPr id="3" name="Shape 1"/>
+          <p:cNvSpPr/>
+          <p:nvPr/>
+        </p:nvSpPr>
+        <p:spPr>
+          <a:xfrm>
+            <a:off x="594360" y="1005840"/>
+            <a:ext cx="2468880" cy="1371600"/>
+          </a:xfrm>
+          <a:prstGeom prst="roundRect">
+            <a:avLst>
+              <a:gd name="adj" fmla="val 6667"/>
+            </a:avLst>
+          </a:prstGeom>
+          <a:solidFill>
+            <a:srgbClr val="1A2332"/>
+          </a:solidFill>
+          <a:ln/>
+        </p:spPr>
+      </p:sp>
+      <p:pic>
+        <p:nvPicPr>
+          <p:cNvPr id="4" name="Image 0" descr="preencoded.png">    </p:cNvPr>
+          <p:cNvPicPr>
+            <a:picLocks noChangeAspect="1"/>
+          </p:cNvPicPr>
+          <p:nvPr/>
+        </p:nvPicPr>
+        <p:blipFill>
+          <a:blip r:embed="rId1"/>
+          <a:stretch>
+            <a:fillRect/>
+          </a:stretch>
+        </p:blipFill>
+        <p:spPr>
+          <a:xfrm>
+            <a:off x="731520" y="1143000"/>
+            <a:ext cx="502920" cy="502920"/>
+          </a:xfrm>
+          <a:prstGeom prst="rect">
+            <a:avLst/>
+          </a:prstGeom>
+        </p:spPr>
+      </p:pic>
+      <p:sp>
+        <p:nvSpPr>
+          <p:cNvPr id="5" name="Text 2"/>
+          <p:cNvSpPr txBox="1"/>
+          <p:nvPr/>
+        </p:nvSpPr>
+        <p:spPr>
+          <a:xfrm>
+            <a:off x="731520" y="1719072"/>
+            <a:ext cx="2194560" cy="320040"/>
           </a:xfrm>
           <a:prstGeom prst="rect">
             <a:avLst/>
@@ -5323,15 +6601,11 @@
           <a:bodyPr wrap="square" lIns="0" tIns="0" rIns="0" bIns="0" rtlCol="0" anchor="t"/>
           <a:lstStyle/>
           <a:p>
-            <a:pPr marL="342900" indent="-342900">
-              <a:spcAft>
-                <a:spcPts val="800"/>
-              </a:spcAft>
-              <a:buSzPct val="100000"/>
-              <a:buChar char="•"/>
-            </a:pPr>
-            <a:r>
-              <a:rPr lang="en-US" sz="1400" dirty="0">
+            <a:pPr indent="0" marL="0">
+              <a:buNone/>
+            </a:pPr>
+            <a:r>
+              <a:rPr lang="en-US" sz="1100" b="1" dirty="0">
                 <a:solidFill>
                   <a:srgbClr val="FFFFFF"/>
                 </a:solidFill>
@@ -5341,18 +6615,82 @@
               </a:rPr>
               <a:t>Frais : ~0,20 USDT par transfert</a:t>
             </a:r>
-            <a:endParaRPr lang="en-US" sz="1400" dirty="0"/>
-          </a:p>
-          <a:p>
-            <a:pPr marL="342900" indent="-342900">
-              <a:spcAft>
-                <a:spcPts val="800"/>
-              </a:spcAft>
-              <a:buSzPct val="100000"/>
-              <a:buChar char="•"/>
-            </a:pPr>
-            <a:r>
-              <a:rPr lang="en-US" sz="1400" dirty="0">
+            <a:endParaRPr lang="en-US" sz="1100" dirty="0"/>
+          </a:p>
+        </p:txBody>
+      </p:sp>
+      <p:sp>
+        <p:nvSpPr>
+          <p:cNvPr id="6" name="Shape 3"/>
+          <p:cNvSpPr/>
+          <p:nvPr/>
+        </p:nvSpPr>
+        <p:spPr>
+          <a:xfrm>
+            <a:off x="3246120" y="1005840"/>
+            <a:ext cx="2468880" cy="1371600"/>
+          </a:xfrm>
+          <a:prstGeom prst="roundRect">
+            <a:avLst>
+              <a:gd name="adj" fmla="val 6667"/>
+            </a:avLst>
+          </a:prstGeom>
+          <a:solidFill>
+            <a:srgbClr val="1A2332"/>
+          </a:solidFill>
+          <a:ln/>
+        </p:spPr>
+      </p:sp>
+      <p:pic>
+        <p:nvPicPr>
+          <p:cNvPr id="7" name="Image 1" descr="preencoded.png">    </p:cNvPr>
+          <p:cNvPicPr>
+            <a:picLocks noChangeAspect="1"/>
+          </p:cNvPicPr>
+          <p:nvPr/>
+        </p:nvPicPr>
+        <p:blipFill>
+          <a:blip r:embed="rId2"/>
+          <a:stretch>
+            <a:fillRect/>
+          </a:stretch>
+        </p:blipFill>
+        <p:spPr>
+          <a:xfrm>
+            <a:off x="3383280" y="1143000"/>
+            <a:ext cx="502920" cy="502920"/>
+          </a:xfrm>
+          <a:prstGeom prst="rect">
+            <a:avLst/>
+          </a:prstGeom>
+        </p:spPr>
+      </p:pic>
+      <p:sp>
+        <p:nvSpPr>
+          <p:cNvPr id="8" name="Text 4"/>
+          <p:cNvSpPr txBox="1"/>
+          <p:nvPr/>
+        </p:nvSpPr>
+        <p:spPr>
+          <a:xfrm>
+            <a:off x="3383280" y="1719072"/>
+            <a:ext cx="2194560" cy="320040"/>
+          </a:xfrm>
+          <a:prstGeom prst="rect">
+            <a:avLst/>
+          </a:prstGeom>
+          <a:noFill/>
+          <a:ln/>
+        </p:spPr>
+        <p:txBody>
+          <a:bodyPr wrap="square" lIns="0" tIns="0" rIns="0" bIns="0" rtlCol="0" anchor="t"/>
+          <a:lstStyle/>
+          <a:p>
+            <a:pPr indent="0" marL="0">
+              <a:buNone/>
+            </a:pPr>
+            <a:r>
+              <a:rPr lang="en-US" sz="1100" b="1" dirty="0">
                 <a:solidFill>
                   <a:srgbClr val="FFFFFF"/>
                 </a:solidFill>
@@ -5362,18 +6700,82 @@
               </a:rPr>
               <a:t>Vitesse : 3 secondes</a:t>
             </a:r>
-            <a:endParaRPr lang="en-US" sz="1400" dirty="0"/>
-          </a:p>
-          <a:p>
-            <a:pPr marL="342900" indent="-342900">
-              <a:spcAft>
-                <a:spcPts val="800"/>
-              </a:spcAft>
-              <a:buSzPct val="100000"/>
-              <a:buChar char="•"/>
-            </a:pPr>
-            <a:r>
-              <a:rPr lang="en-US" sz="1400" dirty="0">
+            <a:endParaRPr lang="en-US" sz="1100" dirty="0"/>
+          </a:p>
+        </p:txBody>
+      </p:sp>
+      <p:sp>
+        <p:nvSpPr>
+          <p:cNvPr id="9" name="Shape 5"/>
+          <p:cNvSpPr/>
+          <p:nvPr/>
+        </p:nvSpPr>
+        <p:spPr>
+          <a:xfrm>
+            <a:off x="5897880" y="1005840"/>
+            <a:ext cx="2468880" cy="1371600"/>
+          </a:xfrm>
+          <a:prstGeom prst="roundRect">
+            <a:avLst>
+              <a:gd name="adj" fmla="val 6667"/>
+            </a:avLst>
+          </a:prstGeom>
+          <a:solidFill>
+            <a:srgbClr val="1A2332"/>
+          </a:solidFill>
+          <a:ln/>
+        </p:spPr>
+      </p:sp>
+      <p:pic>
+        <p:nvPicPr>
+          <p:cNvPr id="10" name="Image 2" descr="preencoded.png">    </p:cNvPr>
+          <p:cNvPicPr>
+            <a:picLocks noChangeAspect="1"/>
+          </p:cNvPicPr>
+          <p:nvPr/>
+        </p:nvPicPr>
+        <p:blipFill>
+          <a:blip r:embed="rId3"/>
+          <a:stretch>
+            <a:fillRect/>
+          </a:stretch>
+        </p:blipFill>
+        <p:spPr>
+          <a:xfrm>
+            <a:off x="6035040" y="1143000"/>
+            <a:ext cx="502920" cy="502920"/>
+          </a:xfrm>
+          <a:prstGeom prst="rect">
+            <a:avLst/>
+          </a:prstGeom>
+        </p:spPr>
+      </p:pic>
+      <p:sp>
+        <p:nvSpPr>
+          <p:cNvPr id="11" name="Text 6"/>
+          <p:cNvSpPr txBox="1"/>
+          <p:nvPr/>
+        </p:nvSpPr>
+        <p:spPr>
+          <a:xfrm>
+            <a:off x="6035040" y="1719072"/>
+            <a:ext cx="2194560" cy="320040"/>
+          </a:xfrm>
+          <a:prstGeom prst="rect">
+            <a:avLst/>
+          </a:prstGeom>
+          <a:noFill/>
+          <a:ln/>
+        </p:spPr>
+        <p:txBody>
+          <a:bodyPr wrap="square" lIns="0" tIns="0" rIns="0" bIns="0" rtlCol="0" anchor="t"/>
+          <a:lstStyle/>
+          <a:p>
+            <a:pPr indent="0" marL="0">
+              <a:buNone/>
+            </a:pPr>
+            <a:r>
+              <a:rPr lang="en-US" sz="1100" b="1" dirty="0">
                 <a:solidFill>
                   <a:srgbClr val="FFFFFF"/>
                 </a:solidFill>
@@ -5383,18 +6785,82 @@
               </a:rPr>
               <a:t>Très utilisé si vous avez un compte Binance</a:t>
             </a:r>
-            <a:endParaRPr lang="en-US" sz="1400" dirty="0"/>
-          </a:p>
-          <a:p>
-            <a:pPr marL="342900" indent="-342900">
-              <a:spcAft>
-                <a:spcPts val="800"/>
-              </a:spcAft>
-              <a:buSzPct val="100000"/>
-              <a:buChar char="•"/>
-            </a:pPr>
-            <a:r>
-              <a:rPr lang="en-US" sz="1400" dirty="0">
+            <a:endParaRPr lang="en-US" sz="1100" dirty="0"/>
+          </a:p>
+        </p:txBody>
+      </p:sp>
+      <p:sp>
+        <p:nvSpPr>
+          <p:cNvPr id="12" name="Shape 7"/>
+          <p:cNvSpPr/>
+          <p:nvPr/>
+        </p:nvSpPr>
+        <p:spPr>
+          <a:xfrm>
+            <a:off x="594360" y="2514600"/>
+            <a:ext cx="2468880" cy="1371600"/>
+          </a:xfrm>
+          <a:prstGeom prst="roundRect">
+            <a:avLst>
+              <a:gd name="adj" fmla="val 6667"/>
+            </a:avLst>
+          </a:prstGeom>
+          <a:solidFill>
+            <a:srgbClr val="1A2332"/>
+          </a:solidFill>
+          <a:ln/>
+        </p:spPr>
+      </p:sp>
+      <p:pic>
+        <p:nvPicPr>
+          <p:cNvPr id="13" name="Image 3" descr="preencoded.png">    </p:cNvPr>
+          <p:cNvPicPr>
+            <a:picLocks noChangeAspect="1"/>
+          </p:cNvPicPr>
+          <p:nvPr/>
+        </p:nvPicPr>
+        <p:blipFill>
+          <a:blip r:embed="rId4"/>
+          <a:stretch>
+            <a:fillRect/>
+          </a:stretch>
+        </p:blipFill>
+        <p:spPr>
+          <a:xfrm>
+            <a:off x="731520" y="2651760"/>
+            <a:ext cx="502920" cy="502920"/>
+          </a:xfrm>
+          <a:prstGeom prst="rect">
+            <a:avLst/>
+          </a:prstGeom>
+        </p:spPr>
+      </p:pic>
+      <p:sp>
+        <p:nvSpPr>
+          <p:cNvPr id="14" name="Text 8"/>
+          <p:cNvSpPr txBox="1"/>
+          <p:nvPr/>
+        </p:nvSpPr>
+        <p:spPr>
+          <a:xfrm>
+            <a:off x="731520" y="3227832"/>
+            <a:ext cx="2194560" cy="320040"/>
+          </a:xfrm>
+          <a:prstGeom prst="rect">
+            <a:avLst/>
+          </a:prstGeom>
+          <a:noFill/>
+          <a:ln/>
+        </p:spPr>
+        <p:txBody>
+          <a:bodyPr wrap="square" lIns="0" tIns="0" rIns="0" bIns="0" rtlCol="0" anchor="t"/>
+          <a:lstStyle/>
+          <a:p>
+            <a:pPr indent="0" marL="0">
+              <a:buNone/>
+            </a:pPr>
+            <a:r>
+              <a:rPr lang="en-US" sz="1100" b="1" dirty="0">
                 <a:solidFill>
                   <a:srgbClr val="FFFFFF"/>
                 </a:solidFill>
@@ -5404,18 +6870,82 @@
               </a:rPr>
               <a:t>Écosystème DeFi très riche</a:t>
             </a:r>
-            <a:endParaRPr lang="en-US" sz="1400" dirty="0"/>
-          </a:p>
-          <a:p>
-            <a:pPr marL="342900" indent="-342900">
-              <a:spcAft>
-                <a:spcPts val="800"/>
-              </a:spcAft>
-              <a:buSzPct val="100000"/>
-              <a:buChar char="•"/>
-            </a:pPr>
-            <a:r>
-              <a:rPr lang="en-US" sz="1400" dirty="0">
+            <a:endParaRPr lang="en-US" sz="1100" dirty="0"/>
+          </a:p>
+        </p:txBody>
+      </p:sp>
+      <p:sp>
+        <p:nvSpPr>
+          <p:cNvPr id="15" name="Shape 9"/>
+          <p:cNvSpPr/>
+          <p:nvPr/>
+        </p:nvSpPr>
+        <p:spPr>
+          <a:xfrm>
+            <a:off x="3246120" y="2514600"/>
+            <a:ext cx="2468880" cy="1371600"/>
+          </a:xfrm>
+          <a:prstGeom prst="roundRect">
+            <a:avLst>
+              <a:gd name="adj" fmla="val 6667"/>
+            </a:avLst>
+          </a:prstGeom>
+          <a:solidFill>
+            <a:srgbClr val="1A2332"/>
+          </a:solidFill>
+          <a:ln/>
+        </p:spPr>
+      </p:sp>
+      <p:pic>
+        <p:nvPicPr>
+          <p:cNvPr id="16" name="Image 4" descr="preencoded.png">    </p:cNvPr>
+          <p:cNvPicPr>
+            <a:picLocks noChangeAspect="1"/>
+          </p:cNvPicPr>
+          <p:nvPr/>
+        </p:nvPicPr>
+        <p:blipFill>
+          <a:blip r:embed="rId5"/>
+          <a:stretch>
+            <a:fillRect/>
+          </a:stretch>
+        </p:blipFill>
+        <p:spPr>
+          <a:xfrm>
+            <a:off x="3383280" y="2651760"/>
+            <a:ext cx="502920" cy="502920"/>
+          </a:xfrm>
+          <a:prstGeom prst="rect">
+            <a:avLst/>
+          </a:prstGeom>
+        </p:spPr>
+      </p:pic>
+      <p:sp>
+        <p:nvSpPr>
+          <p:cNvPr id="17" name="Text 10"/>
+          <p:cNvSpPr txBox="1"/>
+          <p:nvPr/>
+        </p:nvSpPr>
+        <p:spPr>
+          <a:xfrm>
+            <a:off x="3383280" y="3227832"/>
+            <a:ext cx="2194560" cy="320040"/>
+          </a:xfrm>
+          <a:prstGeom prst="rect">
+            <a:avLst/>
+          </a:prstGeom>
+          <a:noFill/>
+          <a:ln/>
+        </p:spPr>
+        <p:txBody>
+          <a:bodyPr wrap="square" lIns="0" tIns="0" rIns="0" bIns="0" rtlCol="0" anchor="t"/>
+          <a:lstStyle/>
+          <a:p>
+            <a:pPr indent="0" marL="0">
+              <a:buNone/>
+            </a:pPr>
+            <a:r>
+              <a:rPr lang="en-US" sz="1100" b="1" dirty="0">
                 <a:solidFill>
                   <a:srgbClr val="FFFFFF"/>
                 </a:solidFill>
@@ -5425,46 +6955,7 @@
               </a:rPr>
               <a:t>Adresse : commence par « 0x »</a:t>
             </a:r>
-            <a:endParaRPr lang="en-US" sz="1400" dirty="0"/>
-          </a:p>
-        </p:txBody>
-      </p:sp>
-      <p:sp>
-        <p:nvSpPr>
-          <p:cNvPr id="4" name="Text 2"/>
-          <p:cNvSpPr txBox="1"/>
-          <p:nvPr/>
-        </p:nvSpPr>
-        <p:spPr>
-          <a:xfrm>
-            <a:off x="731520" y="4709160"/>
-            <a:ext cx="7680960" cy="274320"/>
-          </a:xfrm>
-          <a:prstGeom prst="rect">
-            <a:avLst/>
-          </a:prstGeom>
-          <a:noFill/>
-          <a:ln/>
-        </p:spPr>
-        <p:txBody>
-          <a:bodyPr wrap="square" lIns="0" tIns="0" rIns="0" bIns="0" rtlCol="0" anchor="ctr"/>
-          <a:lstStyle/>
-          <a:p>
-            <a:pPr algn="r" indent="0" marL="0">
-              <a:buNone/>
-            </a:pPr>
-            <a:r>
-              <a:rPr lang="en-US" sz="900" dirty="0">
-                <a:solidFill>
-                  <a:srgbClr val="64748B"/>
-                </a:solidFill>
-                <a:latin typeface="Calibri" pitchFamily="34" charset="0"/>
-                <a:ea typeface="Calibri" pitchFamily="34" charset="-122"/>
-                <a:cs typeface="Calibri" pitchFamily="34" charset="-120"/>
-              </a:rPr>
-              <a:t>Module 6 — Lecon 3</a:t>
-            </a:r>
-            <a:endParaRPr lang="en-US" sz="900" dirty="0"/>
+            <a:endParaRPr lang="en-US" sz="1100" dirty="0"/>
           </a:p>
         </p:txBody>
       </p:sp>
@@ -5508,8 +6999,8 @@
         </p:nvSpPr>
         <p:spPr>
           <a:xfrm>
-            <a:off x="731520" y="457200"/>
-            <a:ext cx="2743200" cy="365760"/>
+            <a:off x="731520" y="365760"/>
+            <a:ext cx="2743200" cy="320040"/>
           </a:xfrm>
           <a:prstGeom prst="rect">
             <a:avLst/>
@@ -5527,7 +7018,7 @@
             <a:r>
               <a:rPr lang="en-US" sz="1200" b="1" spc="300" kern="0" dirty="0">
                 <a:solidFill>
-                  <a:srgbClr val="00BFA6"/>
+                  <a:srgbClr val="06B6D4"/>
                 </a:solidFill>
                 <a:latin typeface="Calibri" pitchFamily="34" charset="0"/>
                 <a:ea typeface="Calibri" pitchFamily="34" charset="-122"/>
@@ -5547,7 +7038,7 @@
         </p:nvSpPr>
         <p:spPr>
           <a:xfrm>
-            <a:off x="731520" y="868680"/>
+            <a:off x="731520" y="731520"/>
             <a:ext cx="4572000" cy="457200"/>
           </a:xfrm>
           <a:prstGeom prst="rect">
@@ -5580,14 +7071,36 @@
       </p:sp>
       <p:sp>
         <p:nvSpPr>
-          <p:cNvPr id="4" name="Text 2"/>
-          <p:cNvSpPr txBox="1"/>
-          <p:nvPr/>
-        </p:nvSpPr>
-        <p:spPr>
-          <a:xfrm>
-            <a:off x="731520" y="1554480"/>
-            <a:ext cx="7680960" cy="3200400"/>
+          <p:cNvPr id="4" name="Shape 2"/>
+          <p:cNvSpPr/>
+          <p:nvPr/>
+        </p:nvSpPr>
+        <p:spPr>
+          <a:xfrm>
+            <a:off x="731520" y="1371600"/>
+            <a:ext cx="7680960" cy="475488"/>
+          </a:xfrm>
+          <a:prstGeom prst="roundRect">
+            <a:avLst>
+              <a:gd name="adj" fmla="val 15385"/>
+            </a:avLst>
+          </a:prstGeom>
+          <a:solidFill>
+            <a:srgbClr val="1A2332"/>
+          </a:solidFill>
+          <a:ln/>
+        </p:spPr>
+      </p:sp>
+      <p:sp>
+        <p:nvSpPr>
+          <p:cNvPr id="5" name="Text 3"/>
+          <p:cNvSpPr txBox="1"/>
+          <p:nvPr/>
+        </p:nvSpPr>
+        <p:spPr>
+          <a:xfrm>
+            <a:off x="868680" y="1371600"/>
+            <a:ext cx="320040" cy="475488"/>
           </a:xfrm>
           <a:prstGeom prst="rect">
             <a:avLst/>
@@ -5596,17 +7109,77 @@
           <a:ln/>
         </p:spPr>
         <p:txBody>
-          <a:bodyPr wrap="square" lIns="0" tIns="0" rIns="0" bIns="0" rtlCol="0" anchor="t"/>
+          <a:bodyPr wrap="square" lIns="0" tIns="0" rIns="0" bIns="0" rtlCol="0" anchor="ctr"/>
+          <a:lstStyle/>
+          <a:p>
+            <a:pPr algn="ctr" indent="0" marL="0">
+              <a:buNone/>
+            </a:pPr>
+            <a:r>
+              <a:rPr lang="en-US" sz="1300" b="1" dirty="0">
+                <a:solidFill>
+                  <a:srgbClr val="06B6D4"/>
+                </a:solidFill>
+                <a:latin typeface="Calibri" pitchFamily="34" charset="0"/>
+                <a:ea typeface="Calibri" pitchFamily="34" charset="-122"/>
+                <a:cs typeface="Calibri" pitchFamily="34" charset="-120"/>
+              </a:rPr>
+              <a:t>1</a:t>
+            </a:r>
+            <a:endParaRPr lang="en-US" sz="1300" dirty="0"/>
+          </a:p>
+        </p:txBody>
+      </p:sp>
+      <p:pic>
+        <p:nvPicPr>
+          <p:cNvPr id="6" name="Image 0" descr="preencoded.png">    </p:cNvPr>
+          <p:cNvPicPr>
+            <a:picLocks noChangeAspect="1"/>
+          </p:cNvPicPr>
+          <p:nvPr/>
+        </p:nvPicPr>
+        <p:blipFill>
+          <a:blip r:embed="rId1"/>
+          <a:stretch>
+            <a:fillRect/>
+          </a:stretch>
+        </p:blipFill>
+        <p:spPr>
+          <a:xfrm>
+            <a:off x="1280160" y="1444752"/>
+            <a:ext cx="329184" cy="329184"/>
+          </a:xfrm>
+          <a:prstGeom prst="rect">
+            <a:avLst/>
+          </a:prstGeom>
+        </p:spPr>
+      </p:pic>
+      <p:sp>
+        <p:nvSpPr>
+          <p:cNvPr id="7" name="Text 4"/>
+          <p:cNvSpPr txBox="1"/>
+          <p:nvPr/>
+        </p:nvSpPr>
+        <p:spPr>
+          <a:xfrm>
+            <a:off x="1737360" y="1371600"/>
+            <a:ext cx="6492240" cy="475488"/>
+          </a:xfrm>
+          <a:prstGeom prst="rect">
+            <a:avLst/>
+          </a:prstGeom>
+          <a:noFill/>
+          <a:ln/>
+        </p:spPr>
+        <p:txBody>
+          <a:bodyPr wrap="square" lIns="0" tIns="0" rIns="0" bIns="0" rtlCol="0" anchor="ctr"/>
           <a:lstStyle/>
           <a:p>
             <a:pPr indent="0" marL="0">
-              <a:spcAft>
-                <a:spcPts val="1000"/>
-              </a:spcAft>
               <a:buNone/>
             </a:pPr>
             <a:r>
-              <a:rPr lang="en-US" sz="1500" dirty="0">
+              <a:rPr lang="en-US" sz="1300" dirty="0">
                 <a:solidFill>
                   <a:srgbClr val="FFFFFF"/>
                 </a:solidFill>
@@ -5614,19 +7187,123 @@
                 <a:ea typeface="Calibri" pitchFamily="34" charset="-122"/>
                 <a:cs typeface="Calibri" pitchFamily="34" charset="-120"/>
               </a:rPr>
-              <a:t>1.  Qu'est-ce qu'un stablecoin ?</a:t>
-            </a:r>
-            <a:endParaRPr lang="en-US" sz="1500" dirty="0"/>
-          </a:p>
+              <a:t>Qu'est-ce qu'un stablecoin ?</a:t>
+            </a:r>
+            <a:endParaRPr lang="en-US" sz="1300" dirty="0"/>
+          </a:p>
+        </p:txBody>
+      </p:sp>
+      <p:sp>
+        <p:nvSpPr>
+          <p:cNvPr id="8" name="Shape 5"/>
+          <p:cNvSpPr/>
+          <p:nvPr/>
+        </p:nvSpPr>
+        <p:spPr>
+          <a:xfrm>
+            <a:off x="731520" y="1920240"/>
+            <a:ext cx="7680960" cy="475488"/>
+          </a:xfrm>
+          <a:prstGeom prst="roundRect">
+            <a:avLst>
+              <a:gd name="adj" fmla="val 15385"/>
+            </a:avLst>
+          </a:prstGeom>
+          <a:solidFill>
+            <a:srgbClr val="1A2332"/>
+          </a:solidFill>
+          <a:ln/>
+        </p:spPr>
+      </p:sp>
+      <p:sp>
+        <p:nvSpPr>
+          <p:cNvPr id="9" name="Text 6"/>
+          <p:cNvSpPr txBox="1"/>
+          <p:nvPr/>
+        </p:nvSpPr>
+        <p:spPr>
+          <a:xfrm>
+            <a:off x="868680" y="1920240"/>
+            <a:ext cx="320040" cy="475488"/>
+          </a:xfrm>
+          <a:prstGeom prst="rect">
+            <a:avLst/>
+          </a:prstGeom>
+          <a:noFill/>
+          <a:ln/>
+        </p:spPr>
+        <p:txBody>
+          <a:bodyPr wrap="square" lIns="0" tIns="0" rIns="0" bIns="0" rtlCol="0" anchor="ctr"/>
+          <a:lstStyle/>
+          <a:p>
+            <a:pPr algn="ctr" indent="0" marL="0">
+              <a:buNone/>
+            </a:pPr>
+            <a:r>
+              <a:rPr lang="en-US" sz="1300" b="1" dirty="0">
+                <a:solidFill>
+                  <a:srgbClr val="06B6D4"/>
+                </a:solidFill>
+                <a:latin typeface="Calibri" pitchFamily="34" charset="0"/>
+                <a:ea typeface="Calibri" pitchFamily="34" charset="-122"/>
+                <a:cs typeface="Calibri" pitchFamily="34" charset="-120"/>
+              </a:rPr>
+              <a:t>2</a:t>
+            </a:r>
+            <a:endParaRPr lang="en-US" sz="1300" dirty="0"/>
+          </a:p>
+        </p:txBody>
+      </p:sp>
+      <p:pic>
+        <p:nvPicPr>
+          <p:cNvPr id="10" name="Image 1" descr="preencoded.png">    </p:cNvPr>
+          <p:cNvPicPr>
+            <a:picLocks noChangeAspect="1"/>
+          </p:cNvPicPr>
+          <p:nvPr/>
+        </p:nvPicPr>
+        <p:blipFill>
+          <a:blip r:embed="rId2"/>
+          <a:stretch>
+            <a:fillRect/>
+          </a:stretch>
+        </p:blipFill>
+        <p:spPr>
+          <a:xfrm>
+            <a:off x="1280160" y="1993392"/>
+            <a:ext cx="329184" cy="329184"/>
+          </a:xfrm>
+          <a:prstGeom prst="rect">
+            <a:avLst/>
+          </a:prstGeom>
+        </p:spPr>
+      </p:pic>
+      <p:sp>
+        <p:nvSpPr>
+          <p:cNvPr id="11" name="Text 7"/>
+          <p:cNvSpPr txBox="1"/>
+          <p:nvPr/>
+        </p:nvSpPr>
+        <p:spPr>
+          <a:xfrm>
+            <a:off x="1737360" y="1920240"/>
+            <a:ext cx="6492240" cy="475488"/>
+          </a:xfrm>
+          <a:prstGeom prst="rect">
+            <a:avLst/>
+          </a:prstGeom>
+          <a:noFill/>
+          <a:ln/>
+        </p:spPr>
+        <p:txBody>
+          <a:bodyPr wrap="square" lIns="0" tIns="0" rIns="0" bIns="0" rtlCol="0" anchor="ctr"/>
+          <a:lstStyle/>
           <a:p>
             <a:pPr indent="0" marL="0">
-              <a:spcAft>
-                <a:spcPts val="1000"/>
-              </a:spcAft>
               <a:buNone/>
             </a:pPr>
             <a:r>
-              <a:rPr lang="en-US" sz="1500" dirty="0">
+              <a:rPr lang="en-US" sz="1300" dirty="0">
                 <a:solidFill>
                   <a:srgbClr val="FFFFFF"/>
                 </a:solidFill>
@@ -5634,19 +7311,123 @@
                 <a:ea typeface="Calibri" pitchFamily="34" charset="-122"/>
                 <a:cs typeface="Calibri" pitchFamily="34" charset="-120"/>
               </a:rPr>
-              <a:t>2.  USDT — le pilier de l'échange</a:t>
-            </a:r>
-            <a:endParaRPr lang="en-US" sz="1500" dirty="0"/>
-          </a:p>
+              <a:t>USDT — le pilier de l'échange</a:t>
+            </a:r>
+            <a:endParaRPr lang="en-US" sz="1300" dirty="0"/>
+          </a:p>
+        </p:txBody>
+      </p:sp>
+      <p:sp>
+        <p:nvSpPr>
+          <p:cNvPr id="12" name="Shape 8"/>
+          <p:cNvSpPr/>
+          <p:nvPr/>
+        </p:nvSpPr>
+        <p:spPr>
+          <a:xfrm>
+            <a:off x="731520" y="2468880"/>
+            <a:ext cx="7680960" cy="475488"/>
+          </a:xfrm>
+          <a:prstGeom prst="roundRect">
+            <a:avLst>
+              <a:gd name="adj" fmla="val 15385"/>
+            </a:avLst>
+          </a:prstGeom>
+          <a:solidFill>
+            <a:srgbClr val="1A2332"/>
+          </a:solidFill>
+          <a:ln/>
+        </p:spPr>
+      </p:sp>
+      <p:sp>
+        <p:nvSpPr>
+          <p:cNvPr id="13" name="Text 9"/>
+          <p:cNvSpPr txBox="1"/>
+          <p:nvPr/>
+        </p:nvSpPr>
+        <p:spPr>
+          <a:xfrm>
+            <a:off x="868680" y="2468880"/>
+            <a:ext cx="320040" cy="475488"/>
+          </a:xfrm>
+          <a:prstGeom prst="rect">
+            <a:avLst/>
+          </a:prstGeom>
+          <a:noFill/>
+          <a:ln/>
+        </p:spPr>
+        <p:txBody>
+          <a:bodyPr wrap="square" lIns="0" tIns="0" rIns="0" bIns="0" rtlCol="0" anchor="ctr"/>
+          <a:lstStyle/>
+          <a:p>
+            <a:pPr algn="ctr" indent="0" marL="0">
+              <a:buNone/>
+            </a:pPr>
+            <a:r>
+              <a:rPr lang="en-US" sz="1300" b="1" dirty="0">
+                <a:solidFill>
+                  <a:srgbClr val="06B6D4"/>
+                </a:solidFill>
+                <a:latin typeface="Calibri" pitchFamily="34" charset="0"/>
+                <a:ea typeface="Calibri" pitchFamily="34" charset="-122"/>
+                <a:cs typeface="Calibri" pitchFamily="34" charset="-120"/>
+              </a:rPr>
+              <a:t>3</a:t>
+            </a:r>
+            <a:endParaRPr lang="en-US" sz="1300" dirty="0"/>
+          </a:p>
+        </p:txBody>
+      </p:sp>
+      <p:pic>
+        <p:nvPicPr>
+          <p:cNvPr id="14" name="Image 2" descr="preencoded.png">    </p:cNvPr>
+          <p:cNvPicPr>
+            <a:picLocks noChangeAspect="1"/>
+          </p:cNvPicPr>
+          <p:nvPr/>
+        </p:nvPicPr>
+        <p:blipFill>
+          <a:blip r:embed="rId3"/>
+          <a:stretch>
+            <a:fillRect/>
+          </a:stretch>
+        </p:blipFill>
+        <p:spPr>
+          <a:xfrm>
+            <a:off x="1280160" y="2542032"/>
+            <a:ext cx="329184" cy="329184"/>
+          </a:xfrm>
+          <a:prstGeom prst="rect">
+            <a:avLst/>
+          </a:prstGeom>
+        </p:spPr>
+      </p:pic>
+      <p:sp>
+        <p:nvSpPr>
+          <p:cNvPr id="15" name="Text 10"/>
+          <p:cNvSpPr txBox="1"/>
+          <p:nvPr/>
+        </p:nvSpPr>
+        <p:spPr>
+          <a:xfrm>
+            <a:off x="1737360" y="2468880"/>
+            <a:ext cx="6492240" cy="475488"/>
+          </a:xfrm>
+          <a:prstGeom prst="rect">
+            <a:avLst/>
+          </a:prstGeom>
+          <a:noFill/>
+          <a:ln/>
+        </p:spPr>
+        <p:txBody>
+          <a:bodyPr wrap="square" lIns="0" tIns="0" rIns="0" bIns="0" rtlCol="0" anchor="ctr"/>
+          <a:lstStyle/>
           <a:p>
             <a:pPr indent="0" marL="0">
-              <a:spcAft>
-                <a:spcPts val="1000"/>
-              </a:spcAft>
               <a:buNone/>
             </a:pPr>
             <a:r>
-              <a:rPr lang="en-US" sz="1500" dirty="0">
+              <a:rPr lang="en-US" sz="1300" dirty="0">
                 <a:solidFill>
                   <a:srgbClr val="FFFFFF"/>
                 </a:solidFill>
@@ -5654,9 +7435,9 @@
                 <a:ea typeface="Calibri" pitchFamily="34" charset="-122"/>
                 <a:cs typeface="Calibri" pitchFamily="34" charset="-120"/>
               </a:rPr>
-              <a:t>3.  TRC20, ERC20, BEP20 — comment choisir ?</a:t>
-            </a:r>
-            <a:endParaRPr lang="en-US" sz="1500" dirty="0"/>
+              <a:t>TRC20, ERC20, BEP20 — comment choisir ?</a:t>
+            </a:r>
+            <a:endParaRPr lang="en-US" sz="1300" dirty="0"/>
           </a:p>
         </p:txBody>
       </p:sp>
@@ -5694,14 +7475,60 @@
       </p:grpSpPr>
       <p:sp>
         <p:nvSpPr>
-          <p:cNvPr id="2" name="Text 0"/>
-          <p:cNvSpPr txBox="1"/>
-          <p:nvPr/>
-        </p:nvSpPr>
-        <p:spPr>
-          <a:xfrm>
-            <a:off x="731520" y="365760"/>
-            <a:ext cx="7680960" cy="548640"/>
+          <p:cNvPr id="2" name="Shape 0"/>
+          <p:cNvSpPr/>
+          <p:nvPr/>
+        </p:nvSpPr>
+        <p:spPr>
+          <a:xfrm>
+            <a:off x="7955280" y="182880"/>
+            <a:ext cx="640080" cy="640080"/>
+          </a:xfrm>
+          <a:prstGeom prst="ellipse">
+            <a:avLst/>
+          </a:prstGeom>
+          <a:solidFill>
+            <a:srgbClr val="06B6D4">
+              <a:alpha val="12000"/>
+            </a:srgbClr>
+          </a:solidFill>
+          <a:ln/>
+        </p:spPr>
+      </p:sp>
+      <p:pic>
+        <p:nvPicPr>
+          <p:cNvPr id="3" name="Image 0" descr="preencoded.png">    </p:cNvPr>
+          <p:cNvPicPr>
+            <a:picLocks noChangeAspect="1"/>
+          </p:cNvPicPr>
+          <p:nvPr/>
+        </p:nvPicPr>
+        <p:blipFill>
+          <a:blip r:embed="rId1"/>
+          <a:stretch>
+            <a:fillRect/>
+          </a:stretch>
+        </p:blipFill>
+        <p:spPr>
+          <a:xfrm>
+            <a:off x="8028432" y="256032"/>
+            <a:ext cx="493776" cy="493776"/>
+          </a:xfrm>
+          <a:prstGeom prst="rect">
+            <a:avLst/>
+          </a:prstGeom>
+        </p:spPr>
+      </p:pic>
+      <p:sp>
+        <p:nvSpPr>
+          <p:cNvPr id="4" name="Text 1"/>
+          <p:cNvSpPr txBox="1"/>
+          <p:nvPr/>
+        </p:nvSpPr>
+        <p:spPr>
+          <a:xfrm>
+            <a:off x="731520" y="274320"/>
+            <a:ext cx="7132320" cy="502920"/>
           </a:xfrm>
           <a:prstGeom prst="rect">
             <a:avLst/>
@@ -5717,9 +7544,9 @@
               <a:buNone/>
             </a:pPr>
             <a:r>
-              <a:rPr lang="en-US" sz="2200" b="1" dirty="0">
-                <a:solidFill>
-                  <a:srgbClr val="00BFA6"/>
+              <a:rPr lang="en-US" sz="2000" b="1" dirty="0">
+                <a:solidFill>
+                  <a:srgbClr val="06B6D4"/>
                 </a:solidFill>
                 <a:latin typeface="Calibri" pitchFamily="34" charset="0"/>
                 <a:ea typeface="Calibri" pitchFamily="34" charset="-122"/>
@@ -5727,19 +7554,19 @@
               </a:rPr>
               <a:t>ERC20 (réseau Ethereum)</a:t>
             </a:r>
-            <a:endParaRPr lang="en-US" sz="2200" dirty="0"/>
-          </a:p>
-        </p:txBody>
-      </p:sp>
-      <p:sp>
-        <p:nvSpPr>
-          <p:cNvPr id="3" name="Text 1"/>
-          <p:cNvSpPr txBox="1"/>
-          <p:nvPr/>
-        </p:nvSpPr>
-        <p:spPr>
-          <a:xfrm>
-            <a:off x="731520" y="1051560"/>
+            <a:endParaRPr lang="en-US" sz="2000" dirty="0"/>
+          </a:p>
+        </p:txBody>
+      </p:sp>
+      <p:sp>
+        <p:nvSpPr>
+          <p:cNvPr id="5" name="Text 2"/>
+          <p:cNvSpPr txBox="1"/>
+          <p:nvPr/>
+        </p:nvSpPr>
+        <p:spPr>
+          <a:xfrm>
+            <a:off x="731520" y="960120"/>
             <a:ext cx="7680960" cy="3657600"/>
           </a:xfrm>
           <a:prstGeom prst="rect">
@@ -5860,7 +7687,7 @@
       </p:sp>
       <p:sp>
         <p:nvSpPr>
-          <p:cNvPr id="4" name="Text 2"/>
+          <p:cNvPr id="6" name="Text 3"/>
           <p:cNvSpPr txBox="1"/>
           <p:nvPr/>
         </p:nvSpPr>
@@ -5891,7 +7718,7 @@
                 <a:ea typeface="Calibri" pitchFamily="34" charset="-122"/>
                 <a:cs typeface="Calibri" pitchFamily="34" charset="-120"/>
               </a:rPr>
-              <a:t>Module 6 — Lecon 3</a:t>
+              <a:t>Module 6 — Leçon 3</a:t>
             </a:r>
             <a:endParaRPr lang="en-US" sz="900" dirty="0"/>
           </a:p>
@@ -5931,14 +7758,60 @@
       </p:grpSpPr>
       <p:sp>
         <p:nvSpPr>
-          <p:cNvPr id="2" name="Text 0"/>
-          <p:cNvSpPr txBox="1"/>
-          <p:nvPr/>
-        </p:nvSpPr>
-        <p:spPr>
-          <a:xfrm>
-            <a:off x="731520" y="365760"/>
-            <a:ext cx="7680960" cy="548640"/>
+          <p:cNvPr id="2" name="Shape 0"/>
+          <p:cNvSpPr/>
+          <p:nvPr/>
+        </p:nvSpPr>
+        <p:spPr>
+          <a:xfrm>
+            <a:off x="7955280" y="182880"/>
+            <a:ext cx="640080" cy="640080"/>
+          </a:xfrm>
+          <a:prstGeom prst="ellipse">
+            <a:avLst/>
+          </a:prstGeom>
+          <a:solidFill>
+            <a:srgbClr val="06B6D4">
+              <a:alpha val="12000"/>
+            </a:srgbClr>
+          </a:solidFill>
+          <a:ln/>
+        </p:spPr>
+      </p:sp>
+      <p:pic>
+        <p:nvPicPr>
+          <p:cNvPr id="3" name="Image 0" descr="preencoded.png">    </p:cNvPr>
+          <p:cNvPicPr>
+            <a:picLocks noChangeAspect="1"/>
+          </p:cNvPicPr>
+          <p:nvPr/>
+        </p:nvPicPr>
+        <p:blipFill>
+          <a:blip r:embed="rId1"/>
+          <a:stretch>
+            <a:fillRect/>
+          </a:stretch>
+        </p:blipFill>
+        <p:spPr>
+          <a:xfrm>
+            <a:off x="8028432" y="256032"/>
+            <a:ext cx="493776" cy="493776"/>
+          </a:xfrm>
+          <a:prstGeom prst="rect">
+            <a:avLst/>
+          </a:prstGeom>
+        </p:spPr>
+      </p:pic>
+      <p:sp>
+        <p:nvSpPr>
+          <p:cNvPr id="4" name="Text 1"/>
+          <p:cNvSpPr txBox="1"/>
+          <p:nvPr/>
+        </p:nvSpPr>
+        <p:spPr>
+          <a:xfrm>
+            <a:off x="731520" y="274320"/>
+            <a:ext cx="7132320" cy="502920"/>
           </a:xfrm>
           <a:prstGeom prst="rect">
             <a:avLst/>
@@ -5954,9 +7827,9 @@
               <a:buNone/>
             </a:pPr>
             <a:r>
-              <a:rPr lang="en-US" sz="2200" b="1" dirty="0">
-                <a:solidFill>
-                  <a:srgbClr val="00BFA6"/>
+              <a:rPr lang="en-US" sz="2000" b="1" dirty="0">
+                <a:solidFill>
+                  <a:srgbClr val="06B6D4"/>
                 </a:solidFill>
                 <a:latin typeface="Calibri" pitchFamily="34" charset="0"/>
                 <a:ea typeface="Calibri" pitchFamily="34" charset="-122"/>
@@ -5964,19 +7837,19 @@
               </a:rPr>
               <a:t>Polygon, Solana, Aptos</a:t>
             </a:r>
-            <a:endParaRPr lang="en-US" sz="2200" dirty="0"/>
-          </a:p>
-        </p:txBody>
-      </p:sp>
-      <p:sp>
-        <p:nvSpPr>
-          <p:cNvPr id="3" name="Text 1"/>
-          <p:cNvSpPr txBox="1"/>
-          <p:nvPr/>
-        </p:nvSpPr>
-        <p:spPr>
-          <a:xfrm>
-            <a:off x="731520" y="1051560"/>
+            <a:endParaRPr lang="en-US" sz="2000" dirty="0"/>
+          </a:p>
+        </p:txBody>
+      </p:sp>
+      <p:sp>
+        <p:nvSpPr>
+          <p:cNvPr id="5" name="Text 2"/>
+          <p:cNvSpPr txBox="1"/>
+          <p:nvPr/>
+        </p:nvSpPr>
+        <p:spPr>
+          <a:xfrm>
+            <a:off x="731520" y="960120"/>
             <a:ext cx="7680960" cy="3657600"/>
           </a:xfrm>
           <a:prstGeom prst="rect">
@@ -6034,7 +7907,7 @@
       </p:sp>
       <p:sp>
         <p:nvSpPr>
-          <p:cNvPr id="4" name="Text 2"/>
+          <p:cNvPr id="6" name="Text 3"/>
           <p:cNvSpPr txBox="1"/>
           <p:nvPr/>
         </p:nvSpPr>
@@ -6065,7 +7938,7 @@
                 <a:ea typeface="Calibri" pitchFamily="34" charset="-122"/>
                 <a:cs typeface="Calibri" pitchFamily="34" charset="-120"/>
               </a:rPr>
-              <a:t>Module 6 — Lecon 3</a:t>
+              <a:t>Module 6 — Leçon 3</a:t>
             </a:r>
             <a:endParaRPr lang="en-US" sz="900" dirty="0"/>
           </a:p>
@@ -6111,8 +7984,8 @@
         </p:nvSpPr>
         <p:spPr>
           <a:xfrm>
-            <a:off x="731520" y="365760"/>
-            <a:ext cx="7680960" cy="548640"/>
+            <a:off x="731520" y="274320"/>
+            <a:ext cx="7680960" cy="502920"/>
           </a:xfrm>
           <a:prstGeom prst="rect">
             <a:avLst/>
@@ -6128,9 +8001,9 @@
               <a:buNone/>
             </a:pPr>
             <a:r>
-              <a:rPr lang="en-US" sz="2200" b="1" dirty="0">
-                <a:solidFill>
-                  <a:srgbClr val="00BFA6"/>
+              <a:rPr lang="en-US" sz="2000" b="1" dirty="0">
+                <a:solidFill>
+                  <a:srgbClr val="06B6D4"/>
                 </a:solidFill>
                 <a:latin typeface="Calibri" pitchFamily="34" charset="0"/>
                 <a:ea typeface="Calibri" pitchFamily="34" charset="-122"/>
@@ -6138,20 +8011,66 @@
               </a:rPr>
               <a:t>Comment choisir ?</a:t>
             </a:r>
-            <a:endParaRPr lang="en-US" sz="2200" dirty="0"/>
-          </a:p>
-        </p:txBody>
-      </p:sp>
-      <p:sp>
-        <p:nvSpPr>
-          <p:cNvPr id="3" name="Text 1"/>
-          <p:cNvSpPr txBox="1"/>
-          <p:nvPr/>
-        </p:nvSpPr>
-        <p:spPr>
-          <a:xfrm>
-            <a:off x="731520" y="1051560"/>
-            <a:ext cx="7680960" cy="3657600"/>
+            <a:endParaRPr lang="en-US" sz="2000" dirty="0"/>
+          </a:p>
+        </p:txBody>
+      </p:sp>
+      <p:sp>
+        <p:nvSpPr>
+          <p:cNvPr id="3" name="Shape 1"/>
+          <p:cNvSpPr/>
+          <p:nvPr/>
+        </p:nvSpPr>
+        <p:spPr>
+          <a:xfrm>
+            <a:off x="731520" y="1005840"/>
+            <a:ext cx="3657600" cy="1371600"/>
+          </a:xfrm>
+          <a:prstGeom prst="roundRect">
+            <a:avLst>
+              <a:gd name="adj" fmla="val 6667"/>
+            </a:avLst>
+          </a:prstGeom>
+          <a:solidFill>
+            <a:srgbClr val="1A2332"/>
+          </a:solidFill>
+          <a:ln/>
+        </p:spPr>
+      </p:sp>
+      <p:pic>
+        <p:nvPicPr>
+          <p:cNvPr id="4" name="Image 0" descr="preencoded.png">    </p:cNvPr>
+          <p:cNvPicPr>
+            <a:picLocks noChangeAspect="1"/>
+          </p:cNvPicPr>
+          <p:nvPr/>
+        </p:nvPicPr>
+        <p:blipFill>
+          <a:blip r:embed="rId1"/>
+          <a:stretch>
+            <a:fillRect/>
+          </a:stretch>
+        </p:blipFill>
+        <p:spPr>
+          <a:xfrm>
+            <a:off x="868680" y="1143000"/>
+            <a:ext cx="502920" cy="502920"/>
+          </a:xfrm>
+          <a:prstGeom prst="rect">
+            <a:avLst/>
+          </a:prstGeom>
+        </p:spPr>
+      </p:pic>
+      <p:sp>
+        <p:nvSpPr>
+          <p:cNvPr id="5" name="Text 2"/>
+          <p:cNvSpPr txBox="1"/>
+          <p:nvPr/>
+        </p:nvSpPr>
+        <p:spPr>
+          <a:xfrm>
+            <a:off x="868680" y="1719072"/>
+            <a:ext cx="3383280" cy="320040"/>
           </a:xfrm>
           <a:prstGeom prst="rect">
             <a:avLst/>
@@ -6163,15 +8082,11 @@
           <a:bodyPr wrap="square" lIns="0" tIns="0" rIns="0" bIns="0" rtlCol="0" anchor="t"/>
           <a:lstStyle/>
           <a:p>
-            <a:pPr marL="342900" indent="-342900">
-              <a:spcAft>
-                <a:spcPts val="800"/>
-              </a:spcAft>
-              <a:buSzPct val="100000"/>
-              <a:buChar char="•"/>
-            </a:pPr>
-            <a:r>
-              <a:rPr lang="en-US" sz="1400" dirty="0">
+            <a:pPr indent="0" marL="0">
+              <a:buNone/>
+            </a:pPr>
+            <a:r>
+              <a:rPr lang="en-US" sz="1100" b="1" dirty="0">
                 <a:solidFill>
                   <a:srgbClr val="FFFFFF"/>
                 </a:solidFill>
@@ -6179,20 +8094,123 @@
                 <a:ea typeface="Calibri" pitchFamily="34" charset="-122"/>
                 <a:cs typeface="Calibri" pitchFamily="34" charset="-120"/>
               </a:rPr>
-              <a:t>Demandez à votre destinataire quel réseau il préfère. Il faut absolument que vous envoyiez sur le même réseau que celui de son adresse.</a:t>
-            </a:r>
-            <a:endParaRPr lang="en-US" sz="1400" dirty="0"/>
-          </a:p>
-          <a:p>
-            <a:pPr marL="342900" indent="-342900">
-              <a:spcAft>
-                <a:spcPts val="800"/>
-              </a:spcAft>
-              <a:buSzPct val="100000"/>
-              <a:buChar char="•"/>
-            </a:pPr>
-            <a:r>
-              <a:rPr lang="en-US" sz="1400" dirty="0">
+              <a:t>Demandez à votre destinataire quel réseau il préfère. Il ...</a:t>
+            </a:r>
+            <a:endParaRPr lang="en-US" sz="1100" dirty="0"/>
+          </a:p>
+        </p:txBody>
+      </p:sp>
+      <p:sp>
+        <p:nvSpPr>
+          <p:cNvPr id="6" name="Text 3"/>
+          <p:cNvSpPr txBox="1"/>
+          <p:nvPr/>
+        </p:nvSpPr>
+        <p:spPr>
+          <a:xfrm>
+            <a:off x="868680" y="2011680"/>
+            <a:ext cx="3383280" cy="274320"/>
+          </a:xfrm>
+          <a:prstGeom prst="rect">
+            <a:avLst/>
+          </a:prstGeom>
+          <a:noFill/>
+          <a:ln/>
+        </p:spPr>
+        <p:txBody>
+          <a:bodyPr wrap="square" lIns="0" tIns="0" rIns="0" bIns="0" rtlCol="0" anchor="t"/>
+          <a:lstStyle/>
+          <a:p>
+            <a:pPr indent="0" marL="0">
+              <a:buNone/>
+            </a:pPr>
+            <a:r>
+              <a:rPr lang="en-US" sz="900" dirty="0">
+                <a:solidFill>
+                  <a:srgbClr val="94A3B8"/>
+                </a:solidFill>
+                <a:latin typeface="Calibri" pitchFamily="34" charset="0"/>
+                <a:ea typeface="Calibri" pitchFamily="34" charset="-122"/>
+                <a:cs typeface="Calibri" pitchFamily="34" charset="-120"/>
+              </a:rPr>
+              <a:t>nt que vous envoyiez sur le même réseau que celui de son adresse.</a:t>
+            </a:r>
+            <a:endParaRPr lang="en-US" sz="900" dirty="0"/>
+          </a:p>
+        </p:txBody>
+      </p:sp>
+      <p:sp>
+        <p:nvSpPr>
+          <p:cNvPr id="7" name="Shape 4"/>
+          <p:cNvSpPr/>
+          <p:nvPr/>
+        </p:nvSpPr>
+        <p:spPr>
+          <a:xfrm>
+            <a:off x="4754880" y="1005840"/>
+            <a:ext cx="3657600" cy="1371600"/>
+          </a:xfrm>
+          <a:prstGeom prst="roundRect">
+            <a:avLst>
+              <a:gd name="adj" fmla="val 6667"/>
+            </a:avLst>
+          </a:prstGeom>
+          <a:solidFill>
+            <a:srgbClr val="1A2332"/>
+          </a:solidFill>
+          <a:ln/>
+        </p:spPr>
+      </p:sp>
+      <p:pic>
+        <p:nvPicPr>
+          <p:cNvPr id="8" name="Image 1" descr="preencoded.png">    </p:cNvPr>
+          <p:cNvPicPr>
+            <a:picLocks noChangeAspect="1"/>
+          </p:cNvPicPr>
+          <p:nvPr/>
+        </p:nvPicPr>
+        <p:blipFill>
+          <a:blip r:embed="rId2"/>
+          <a:stretch>
+            <a:fillRect/>
+          </a:stretch>
+        </p:blipFill>
+        <p:spPr>
+          <a:xfrm>
+            <a:off x="4892040" y="1143000"/>
+            <a:ext cx="502920" cy="502920"/>
+          </a:xfrm>
+          <a:prstGeom prst="rect">
+            <a:avLst/>
+          </a:prstGeom>
+        </p:spPr>
+      </p:pic>
+      <p:sp>
+        <p:nvSpPr>
+          <p:cNvPr id="9" name="Text 5"/>
+          <p:cNvSpPr txBox="1"/>
+          <p:nvPr/>
+        </p:nvSpPr>
+        <p:spPr>
+          <a:xfrm>
+            <a:off x="4892040" y="1719072"/>
+            <a:ext cx="3383280" cy="320040"/>
+          </a:xfrm>
+          <a:prstGeom prst="rect">
+            <a:avLst/>
+          </a:prstGeom>
+          <a:noFill/>
+          <a:ln/>
+        </p:spPr>
+        <p:txBody>
+          <a:bodyPr wrap="square" lIns="0" tIns="0" rIns="0" bIns="0" rtlCol="0" anchor="t"/>
+          <a:lstStyle/>
+          <a:p>
+            <a:pPr indent="0" marL="0">
+              <a:buNone/>
+            </a:pPr>
+            <a:r>
+              <a:rPr lang="en-US" sz="1100" b="1" dirty="0">
                 <a:solidFill>
                   <a:srgbClr val="FFFFFF"/>
                 </a:solidFill>
@@ -6200,20 +8218,123 @@
                 <a:ea typeface="Calibri" pitchFamily="34" charset="-122"/>
                 <a:cs typeface="Calibri" pitchFamily="34" charset="-120"/>
               </a:rPr>
-              <a:t>Si vous choisissez pour vous-même, prenez TRC20 par défaut. C'est le standard en Afrique.</a:t>
-            </a:r>
-            <a:endParaRPr lang="en-US" sz="1400" dirty="0"/>
-          </a:p>
-          <a:p>
-            <a:pPr marL="342900" indent="-342900">
-              <a:spcAft>
-                <a:spcPts val="800"/>
-              </a:spcAft>
-              <a:buSzPct val="100000"/>
-              <a:buChar char="•"/>
-            </a:pPr>
-            <a:r>
-              <a:rPr lang="en-US" sz="1400" dirty="0">
+              <a:t>Si vous choisissez pour vous-même, prenez TRC20 par défau...</a:t>
+            </a:r>
+            <a:endParaRPr lang="en-US" sz="1100" dirty="0"/>
+          </a:p>
+        </p:txBody>
+      </p:sp>
+      <p:sp>
+        <p:nvSpPr>
+          <p:cNvPr id="10" name="Text 6"/>
+          <p:cNvSpPr txBox="1"/>
+          <p:nvPr/>
+        </p:nvSpPr>
+        <p:spPr>
+          <a:xfrm>
+            <a:off x="4892040" y="2011680"/>
+            <a:ext cx="3383280" cy="274320"/>
+          </a:xfrm>
+          <a:prstGeom prst="rect">
+            <a:avLst/>
+          </a:prstGeom>
+          <a:noFill/>
+          <a:ln/>
+        </p:spPr>
+        <p:txBody>
+          <a:bodyPr wrap="square" lIns="0" tIns="0" rIns="0" bIns="0" rtlCol="0" anchor="t"/>
+          <a:lstStyle/>
+          <a:p>
+            <a:pPr indent="0" marL="0">
+              <a:buNone/>
+            </a:pPr>
+            <a:r>
+              <a:rPr lang="en-US" sz="900" dirty="0">
+                <a:solidFill>
+                  <a:srgbClr val="94A3B8"/>
+                </a:solidFill>
+                <a:latin typeface="Calibri" pitchFamily="34" charset="0"/>
+                <a:ea typeface="Calibri" pitchFamily="34" charset="-122"/>
+                <a:cs typeface="Calibri" pitchFamily="34" charset="-120"/>
+              </a:rPr>
+              <a:t>tandard en Afrique.</a:t>
+            </a:r>
+            <a:endParaRPr lang="en-US" sz="900" dirty="0"/>
+          </a:p>
+        </p:txBody>
+      </p:sp>
+      <p:sp>
+        <p:nvSpPr>
+          <p:cNvPr id="11" name="Shape 7"/>
+          <p:cNvSpPr/>
+          <p:nvPr/>
+        </p:nvSpPr>
+        <p:spPr>
+          <a:xfrm>
+            <a:off x="731520" y="2514600"/>
+            <a:ext cx="3657600" cy="1371600"/>
+          </a:xfrm>
+          <a:prstGeom prst="roundRect">
+            <a:avLst>
+              <a:gd name="adj" fmla="val 6667"/>
+            </a:avLst>
+          </a:prstGeom>
+          <a:solidFill>
+            <a:srgbClr val="1A2332"/>
+          </a:solidFill>
+          <a:ln/>
+        </p:spPr>
+      </p:sp>
+      <p:pic>
+        <p:nvPicPr>
+          <p:cNvPr id="12" name="Image 2" descr="preencoded.png">    </p:cNvPr>
+          <p:cNvPicPr>
+            <a:picLocks noChangeAspect="1"/>
+          </p:cNvPicPr>
+          <p:nvPr/>
+        </p:nvPicPr>
+        <p:blipFill>
+          <a:blip r:embed="rId3"/>
+          <a:stretch>
+            <a:fillRect/>
+          </a:stretch>
+        </p:blipFill>
+        <p:spPr>
+          <a:xfrm>
+            <a:off x="868680" y="2651760"/>
+            <a:ext cx="502920" cy="502920"/>
+          </a:xfrm>
+          <a:prstGeom prst="rect">
+            <a:avLst/>
+          </a:prstGeom>
+        </p:spPr>
+      </p:pic>
+      <p:sp>
+        <p:nvSpPr>
+          <p:cNvPr id="13" name="Text 8"/>
+          <p:cNvSpPr txBox="1"/>
+          <p:nvPr/>
+        </p:nvSpPr>
+        <p:spPr>
+          <a:xfrm>
+            <a:off x="868680" y="3227832"/>
+            <a:ext cx="3383280" cy="320040"/>
+          </a:xfrm>
+          <a:prstGeom prst="rect">
+            <a:avLst/>
+          </a:prstGeom>
+          <a:noFill/>
+          <a:ln/>
+        </p:spPr>
+        <p:txBody>
+          <a:bodyPr wrap="square" lIns="0" tIns="0" rIns="0" bIns="0" rtlCol="0" anchor="t"/>
+          <a:lstStyle/>
+          <a:p>
+            <a:pPr indent="0" marL="0">
+              <a:buNone/>
+            </a:pPr>
+            <a:r>
+              <a:rPr lang="en-US" sz="1100" b="1" dirty="0">
                 <a:solidFill>
                   <a:srgbClr val="FFFFFF"/>
                 </a:solidFill>
@@ -6221,22 +8342,22 @@
                 <a:ea typeface="Calibri" pitchFamily="34" charset="-122"/>
                 <a:cs typeface="Calibri" pitchFamily="34" charset="-120"/>
               </a:rPr>
-              <a:t>Vérifiez toujours que votre wallet (Trust Wallet, MetaMask, Binance…) supporte le réseau choisi. Certains wallets ne gèrent que Ethereum et BNB Chain, pas Tron.</a:t>
-            </a:r>
-            <a:endParaRPr lang="en-US" sz="1400" dirty="0"/>
-          </a:p>
-        </p:txBody>
-      </p:sp>
-      <p:sp>
-        <p:nvSpPr>
-          <p:cNvPr id="4" name="Text 2"/>
-          <p:cNvSpPr txBox="1"/>
-          <p:nvPr/>
-        </p:nvSpPr>
-        <p:spPr>
-          <a:xfrm>
-            <a:off x="731520" y="4709160"/>
-            <a:ext cx="7680960" cy="274320"/>
+              <a:t>Vérifiez toujours que votre wallet (Trust Wallet, MetaMas...</a:t>
+            </a:r>
+            <a:endParaRPr lang="en-US" sz="1100" dirty="0"/>
+          </a:p>
+        </p:txBody>
+      </p:sp>
+      <p:sp>
+        <p:nvSpPr>
+          <p:cNvPr id="14" name="Text 9"/>
+          <p:cNvSpPr txBox="1"/>
+          <p:nvPr/>
+        </p:nvSpPr>
+        <p:spPr>
+          <a:xfrm>
+            <a:off x="868680" y="3520440"/>
+            <a:ext cx="3383280" cy="274320"/>
           </a:xfrm>
           <a:prstGeom prst="rect">
             <a:avLst/>
@@ -6245,22 +8366,22 @@
           <a:ln/>
         </p:spPr>
         <p:txBody>
-          <a:bodyPr wrap="square" lIns="0" tIns="0" rIns="0" bIns="0" rtlCol="0" anchor="ctr"/>
-          <a:lstStyle/>
-          <a:p>
-            <a:pPr algn="r" indent="0" marL="0">
+          <a:bodyPr wrap="square" lIns="0" tIns="0" rIns="0" bIns="0" rtlCol="0" anchor="t"/>
+          <a:lstStyle/>
+          <a:p>
+            <a:pPr indent="0" marL="0">
               <a:buNone/>
             </a:pPr>
             <a:r>
               <a:rPr lang="en-US" sz="900" dirty="0">
                 <a:solidFill>
-                  <a:srgbClr val="64748B"/>
-                </a:solidFill>
-                <a:latin typeface="Calibri" pitchFamily="34" charset="0"/>
-                <a:ea typeface="Calibri" pitchFamily="34" charset="-122"/>
-                <a:cs typeface="Calibri" pitchFamily="34" charset="-120"/>
-              </a:rPr>
-              <a:t>Module 6 — Lecon 3</a:t>
+                  <a:srgbClr val="94A3B8"/>
+                </a:solidFill>
+                <a:latin typeface="Calibri" pitchFamily="34" charset="0"/>
+                <a:ea typeface="Calibri" pitchFamily="34" charset="-122"/>
+                <a:cs typeface="Calibri" pitchFamily="34" charset="-120"/>
+              </a:rPr>
+              <a:t>supporte le réseau choisi. Certains wallets ne gèrent que Ethereum et BNB Chain,</a:t>
             </a:r>
             <a:endParaRPr lang="en-US" sz="900" dirty="0"/>
           </a:p>
@@ -6300,14 +8421,60 @@
       </p:grpSpPr>
       <p:sp>
         <p:nvSpPr>
-          <p:cNvPr id="2" name="Text 0"/>
-          <p:cNvSpPr txBox="1"/>
-          <p:nvPr/>
-        </p:nvSpPr>
-        <p:spPr>
-          <a:xfrm>
-            <a:off x="731520" y="365760"/>
-            <a:ext cx="7680960" cy="548640"/>
+          <p:cNvPr id="2" name="Shape 0"/>
+          <p:cNvSpPr/>
+          <p:nvPr/>
+        </p:nvSpPr>
+        <p:spPr>
+          <a:xfrm>
+            <a:off x="7955280" y="182880"/>
+            <a:ext cx="640080" cy="640080"/>
+          </a:xfrm>
+          <a:prstGeom prst="ellipse">
+            <a:avLst/>
+          </a:prstGeom>
+          <a:solidFill>
+            <a:srgbClr val="06B6D4">
+              <a:alpha val="12000"/>
+            </a:srgbClr>
+          </a:solidFill>
+          <a:ln/>
+        </p:spPr>
+      </p:sp>
+      <p:pic>
+        <p:nvPicPr>
+          <p:cNvPr id="3" name="Image 0" descr="preencoded.png">    </p:cNvPr>
+          <p:cNvPicPr>
+            <a:picLocks noChangeAspect="1"/>
+          </p:cNvPicPr>
+          <p:nvPr/>
+        </p:nvPicPr>
+        <p:blipFill>
+          <a:blip r:embed="rId1"/>
+          <a:stretch>
+            <a:fillRect/>
+          </a:stretch>
+        </p:blipFill>
+        <p:spPr>
+          <a:xfrm>
+            <a:off x="8028432" y="256032"/>
+            <a:ext cx="493776" cy="493776"/>
+          </a:xfrm>
+          <a:prstGeom prst="rect">
+            <a:avLst/>
+          </a:prstGeom>
+        </p:spPr>
+      </p:pic>
+      <p:sp>
+        <p:nvSpPr>
+          <p:cNvPr id="4" name="Text 1"/>
+          <p:cNvSpPr txBox="1"/>
+          <p:nvPr/>
+        </p:nvSpPr>
+        <p:spPr>
+          <a:xfrm>
+            <a:off x="731520" y="274320"/>
+            <a:ext cx="7132320" cy="502920"/>
           </a:xfrm>
           <a:prstGeom prst="rect">
             <a:avLst/>
@@ -6323,9 +8490,9 @@
               <a:buNone/>
             </a:pPr>
             <a:r>
-              <a:rPr lang="en-US" sz="2200" b="1" dirty="0">
-                <a:solidFill>
-                  <a:srgbClr val="00BFA6"/>
+              <a:rPr lang="en-US" sz="2000" b="1" dirty="0">
+                <a:solidFill>
+                  <a:srgbClr val="06B6D4"/>
                 </a:solidFill>
                 <a:latin typeface="Calibri" pitchFamily="34" charset="0"/>
                 <a:ea typeface="Calibri" pitchFamily="34" charset="-122"/>
@@ -6333,19 +8500,19 @@
               </a:rPr>
               <a:t>AVERTISSEMENT CRITIQUE</a:t>
             </a:r>
-            <a:endParaRPr lang="en-US" sz="2200" dirty="0"/>
-          </a:p>
-        </p:txBody>
-      </p:sp>
-      <p:sp>
-        <p:nvSpPr>
-          <p:cNvPr id="3" name="Text 1"/>
-          <p:cNvSpPr txBox="1"/>
-          <p:nvPr/>
-        </p:nvSpPr>
-        <p:spPr>
-          <a:xfrm>
-            <a:off x="731520" y="1051560"/>
+            <a:endParaRPr lang="en-US" sz="2000" dirty="0"/>
+          </a:p>
+        </p:txBody>
+      </p:sp>
+      <p:sp>
+        <p:nvSpPr>
+          <p:cNvPr id="5" name="Text 2"/>
+          <p:cNvSpPr txBox="1"/>
+          <p:nvPr/>
+        </p:nvSpPr>
+        <p:spPr>
+          <a:xfrm>
+            <a:off x="731520" y="960120"/>
             <a:ext cx="7680960" cy="3657600"/>
           </a:xfrm>
           <a:prstGeom prst="rect">
@@ -6374,7 +8541,7 @@
                 <a:ea typeface="Calibri" pitchFamily="34" charset="-122"/>
                 <a:cs typeface="Calibri" pitchFamily="34" charset="-120"/>
               </a:rPr>
-              <a:t>Si vous envoyez de l'USDT-TRC20 à une adresse ERC20 (ou l'inverse), votre argent est perdu à jamais. Ces réseaux sont incompatibles. C'est l'erreur numéro 1 des débutants. On y ...</a:t>
+              <a:t>Si vous envoyez de l'USDT-TRC20 à une adresse ERC20 (ou l'inverse), votre argent est perdu à jamais.</a:t>
             </a:r>
             <a:endParaRPr lang="en-US" sz="1400" dirty="0"/>
           </a:p>
@@ -6395,6 +8562,69 @@
                 <a:ea typeface="Calibri" pitchFamily="34" charset="-122"/>
                 <a:cs typeface="Calibri" pitchFamily="34" charset="-120"/>
               </a:rPr>
+              <a:t>Ces réseaux sont incompatibles.</a:t>
+            </a:r>
+            <a:endParaRPr lang="en-US" sz="1400" dirty="0"/>
+          </a:p>
+          <a:p>
+            <a:pPr marL="342900" indent="-342900">
+              <a:spcAft>
+                <a:spcPts val="800"/>
+              </a:spcAft>
+              <a:buSzPct val="100000"/>
+              <a:buChar char="•"/>
+            </a:pPr>
+            <a:r>
+              <a:rPr lang="en-US" sz="1400" dirty="0">
+                <a:solidFill>
+                  <a:srgbClr val="FFFFFF"/>
+                </a:solidFill>
+                <a:latin typeface="Calibri" pitchFamily="34" charset="0"/>
+                <a:ea typeface="Calibri" pitchFamily="34" charset="-122"/>
+                <a:cs typeface="Calibri" pitchFamily="34" charset="-120"/>
+              </a:rPr>
+              <a:t>C'est l'erreur numéro 1 des débutants.</a:t>
+            </a:r>
+            <a:endParaRPr lang="en-US" sz="1400" dirty="0"/>
+          </a:p>
+          <a:p>
+            <a:pPr marL="342900" indent="-342900">
+              <a:spcAft>
+                <a:spcPts val="800"/>
+              </a:spcAft>
+              <a:buSzPct val="100000"/>
+              <a:buChar char="•"/>
+            </a:pPr>
+            <a:r>
+              <a:rPr lang="en-US" sz="1400" dirty="0">
+                <a:solidFill>
+                  <a:srgbClr val="FFFFFF"/>
+                </a:solidFill>
+                <a:latin typeface="Calibri" pitchFamily="34" charset="0"/>
+                <a:ea typeface="Calibri" pitchFamily="34" charset="-122"/>
+                <a:cs typeface="Calibri" pitchFamily="34" charset="-120"/>
+              </a:rPr>
+              <a:t>On y reviendra en détail au Module 8.</a:t>
+            </a:r>
+            <a:endParaRPr lang="en-US" sz="1400" dirty="0"/>
+          </a:p>
+          <a:p>
+            <a:pPr marL="342900" indent="-342900">
+              <a:spcAft>
+                <a:spcPts val="800"/>
+              </a:spcAft>
+              <a:buSzPct val="100000"/>
+              <a:buChar char="•"/>
+            </a:pPr>
+            <a:r>
+              <a:rPr lang="en-US" sz="1400" dirty="0">
+                <a:solidFill>
+                  <a:srgbClr val="FFFFFF"/>
+                </a:solidFill>
+                <a:latin typeface="Calibri" pitchFamily="34" charset="0"/>
+                <a:ea typeface="Calibri" pitchFamily="34" charset="-122"/>
+                <a:cs typeface="Calibri" pitchFamily="34" charset="-120"/>
+              </a:rPr>
               <a:t>Sur Terex, l'interface vous demande de choisir le réseau AVANT de renseigner l'adresse — c'est fait exprès pour vous éviter cette erreur.</a:t>
             </a:r>
             <a:endParaRPr lang="en-US" sz="1400" dirty="0"/>
@@ -6403,7 +8633,7 @@
       </p:sp>
       <p:sp>
         <p:nvSpPr>
-          <p:cNvPr id="4" name="Text 2"/>
+          <p:cNvPr id="6" name="Text 3"/>
           <p:cNvSpPr txBox="1"/>
           <p:nvPr/>
         </p:nvSpPr>
@@ -6434,7 +8664,7 @@
                 <a:ea typeface="Calibri" pitchFamily="34" charset="-122"/>
                 <a:cs typeface="Calibri" pitchFamily="34" charset="-120"/>
               </a:rPr>
-              <a:t>Module 6 — Lecon 3</a:t>
+              <a:t>Module 6 — Leçon 3</a:t>
             </a:r>
             <a:endParaRPr lang="en-US" sz="900" dirty="0"/>
           </a:p>
@@ -6472,16 +8702,40 @@
           <a:chExt cx="0" cy="0"/>
         </a:xfrm>
       </p:grpSpPr>
-      <p:sp>
-        <p:nvSpPr>
-          <p:cNvPr id="2" name="Text 0"/>
-          <p:cNvSpPr txBox="1"/>
-          <p:nvPr/>
-        </p:nvSpPr>
-        <p:spPr>
-          <a:xfrm>
-            <a:off x="731520" y="457200"/>
-            <a:ext cx="2743200" cy="365760"/>
+      <p:pic>
+        <p:nvPicPr>
+          <p:cNvPr id="2" name="Image 0" descr="preencoded.png">    </p:cNvPr>
+          <p:cNvPicPr>
+            <a:picLocks noChangeAspect="1"/>
+          </p:cNvPicPr>
+          <p:nvPr/>
+        </p:nvPicPr>
+        <p:blipFill>
+          <a:blip r:embed="rId1"/>
+          <a:stretch>
+            <a:fillRect/>
+          </a:stretch>
+        </p:blipFill>
+        <p:spPr>
+          <a:xfrm>
+            <a:off x="731520" y="320040"/>
+            <a:ext cx="457200" cy="457200"/>
+          </a:xfrm>
+          <a:prstGeom prst="rect">
+            <a:avLst/>
+          </a:prstGeom>
+        </p:spPr>
+      </p:pic>
+      <p:sp>
+        <p:nvSpPr>
+          <p:cNvPr id="3" name="Text 0"/>
+          <p:cNvSpPr txBox="1"/>
+          <p:nvPr/>
+        </p:nvSpPr>
+        <p:spPr>
+          <a:xfrm>
+            <a:off x="1280160" y="365760"/>
+            <a:ext cx="2743200" cy="320040"/>
           </a:xfrm>
           <a:prstGeom prst="rect">
             <a:avLst/>
@@ -6513,14 +8767,14 @@
       </p:sp>
       <p:sp>
         <p:nvSpPr>
-          <p:cNvPr id="3" name="Text 1"/>
-          <p:cNvSpPr txBox="1"/>
-          <p:nvPr/>
-        </p:nvSpPr>
-        <p:spPr>
-          <a:xfrm>
-            <a:off x="731520" y="868680"/>
-            <a:ext cx="7680960" cy="502920"/>
+          <p:cNvPr id="4" name="Text 1"/>
+          <p:cNvSpPr txBox="1"/>
+          <p:nvPr/>
+        </p:nvSpPr>
+        <p:spPr>
+          <a:xfrm>
+            <a:off x="731520" y="822960"/>
+            <a:ext cx="7680960" cy="457200"/>
           </a:xfrm>
           <a:prstGeom prst="rect">
             <a:avLst/>
@@ -6536,7 +8790,7 @@
               <a:buNone/>
             </a:pPr>
             <a:r>
-              <a:rPr lang="en-US" sz="2200" b="1" dirty="0">
+              <a:rPr lang="en-US" sz="2000" b="1" dirty="0">
                 <a:solidFill>
                   <a:srgbClr val="FFFFFF"/>
                 </a:solidFill>
@@ -6546,28 +8800,50 @@
               </a:rPr>
               <a:t>TRC20, ERC20, BEP20 — comment choisir ?</a:t>
             </a:r>
-            <a:endParaRPr lang="en-US" sz="2200" dirty="0"/>
-          </a:p>
-        </p:txBody>
-      </p:sp>
-      <p:sp>
-        <p:nvSpPr>
-          <p:cNvPr id="4" name="Text 2"/>
-          <p:cNvSpPr txBox="1"/>
-          <p:nvPr/>
-        </p:nvSpPr>
-        <p:spPr>
-          <a:xfrm>
-            <a:off x="731520" y="1554480"/>
-            <a:ext cx="457200" cy="548640"/>
+            <a:endParaRPr lang="en-US" sz="2000" dirty="0"/>
+          </a:p>
+        </p:txBody>
+      </p:sp>
+      <p:sp>
+        <p:nvSpPr>
+          <p:cNvPr id="5" name="Shape 2"/>
+          <p:cNvSpPr/>
+          <p:nvPr/>
+        </p:nvSpPr>
+        <p:spPr>
+          <a:xfrm>
+            <a:off x="731520" y="1463040"/>
+            <a:ext cx="7680960" cy="548640"/>
           </a:xfrm>
           <a:prstGeom prst="roundRect">
             <a:avLst>
-              <a:gd name="adj" fmla="val 50000"/>
+              <a:gd name="adj" fmla="val 13333"/>
             </a:avLst>
           </a:prstGeom>
           <a:solidFill>
-            <a:srgbClr val="00BFA6"/>
+            <a:srgbClr val="0F1419"/>
+          </a:solidFill>
+          <a:ln/>
+        </p:spPr>
+      </p:sp>
+      <p:sp>
+        <p:nvSpPr>
+          <p:cNvPr id="6" name="Text 3"/>
+          <p:cNvSpPr txBox="1"/>
+          <p:nvPr/>
+        </p:nvSpPr>
+        <p:spPr>
+          <a:xfrm>
+            <a:off x="914400" y="1463040"/>
+            <a:ext cx="411480" cy="548640"/>
+          </a:xfrm>
+          <a:prstGeom prst="roundRect">
+            <a:avLst>
+              <a:gd name="adj" fmla="val 48889"/>
+            </a:avLst>
+          </a:prstGeom>
+          <a:solidFill>
+            <a:srgbClr val="06B6D4"/>
           </a:solidFill>
           <a:ln/>
         </p:spPr>
@@ -6579,7 +8855,7 @@
               <a:buNone/>
             </a:pPr>
             <a:r>
-              <a:rPr lang="en-US" sz="1600" b="1" dirty="0">
+              <a:rPr lang="en-US" sz="1500" b="1" dirty="0">
                 <a:solidFill>
                   <a:srgbClr val="0F1419"/>
                 </a:solidFill>
@@ -6589,20 +8865,20 @@
               </a:rPr>
               <a:t>1</a:t>
             </a:r>
-            <a:endParaRPr lang="en-US" sz="1600" dirty="0"/>
-          </a:p>
-        </p:txBody>
-      </p:sp>
-      <p:sp>
-        <p:nvSpPr>
-          <p:cNvPr id="5" name="Text 3"/>
-          <p:cNvSpPr txBox="1"/>
-          <p:nvPr/>
-        </p:nvSpPr>
-        <p:spPr>
-          <a:xfrm>
-            <a:off x="1371600" y="1554480"/>
-            <a:ext cx="7040880" cy="548640"/>
+            <a:endParaRPr lang="en-US" sz="1500" dirty="0"/>
+          </a:p>
+        </p:txBody>
+      </p:sp>
+      <p:sp>
+        <p:nvSpPr>
+          <p:cNvPr id="7" name="Text 4"/>
+          <p:cNvSpPr txBox="1"/>
+          <p:nvPr/>
+        </p:nvSpPr>
+        <p:spPr>
+          <a:xfrm>
+            <a:off x="1508760" y="1463040"/>
+            <a:ext cx="6766560" cy="548640"/>
           </a:xfrm>
           <a:prstGeom prst="rect">
             <a:avLst/>
@@ -6618,7 +8894,7 @@
               <a:buNone/>
             </a:pPr>
             <a:r>
-              <a:rPr lang="en-US" sz="1400" dirty="0">
+              <a:rPr lang="en-US" sz="1300" dirty="0">
                 <a:solidFill>
                   <a:srgbClr val="FFFFFF"/>
                 </a:solidFill>
@@ -6628,28 +8904,50 @@
               </a:rPr>
               <a:t>Frais : ~1 USDT par transfert</a:t>
             </a:r>
-            <a:endParaRPr lang="en-US" sz="1400" dirty="0"/>
-          </a:p>
-        </p:txBody>
-      </p:sp>
-      <p:sp>
-        <p:nvSpPr>
-          <p:cNvPr id="6" name="Text 4"/>
-          <p:cNvSpPr txBox="1"/>
-          <p:nvPr/>
-        </p:nvSpPr>
-        <p:spPr>
-          <a:xfrm>
-            <a:off x="731520" y="2212848"/>
-            <a:ext cx="457200" cy="548640"/>
+            <a:endParaRPr lang="en-US" sz="1300" dirty="0"/>
+          </a:p>
+        </p:txBody>
+      </p:sp>
+      <p:sp>
+        <p:nvSpPr>
+          <p:cNvPr id="8" name="Shape 5"/>
+          <p:cNvSpPr/>
+          <p:nvPr/>
+        </p:nvSpPr>
+        <p:spPr>
+          <a:xfrm>
+            <a:off x="731520" y="2103120"/>
+            <a:ext cx="7680960" cy="548640"/>
           </a:xfrm>
           <a:prstGeom prst="roundRect">
             <a:avLst>
-              <a:gd name="adj" fmla="val 50000"/>
+              <a:gd name="adj" fmla="val 13333"/>
             </a:avLst>
           </a:prstGeom>
           <a:solidFill>
-            <a:srgbClr val="00BFA6"/>
+            <a:srgbClr val="0F1419"/>
+          </a:solidFill>
+          <a:ln/>
+        </p:spPr>
+      </p:sp>
+      <p:sp>
+        <p:nvSpPr>
+          <p:cNvPr id="9" name="Text 6"/>
+          <p:cNvSpPr txBox="1"/>
+          <p:nvPr/>
+        </p:nvSpPr>
+        <p:spPr>
+          <a:xfrm>
+            <a:off x="914400" y="2103120"/>
+            <a:ext cx="411480" cy="548640"/>
+          </a:xfrm>
+          <a:prstGeom prst="roundRect">
+            <a:avLst>
+              <a:gd name="adj" fmla="val 48889"/>
+            </a:avLst>
+          </a:prstGeom>
+          <a:solidFill>
+            <a:srgbClr val="06B6D4"/>
           </a:solidFill>
           <a:ln/>
         </p:spPr>
@@ -6661,7 +8959,7 @@
               <a:buNone/>
             </a:pPr>
             <a:r>
-              <a:rPr lang="en-US" sz="1600" b="1" dirty="0">
+              <a:rPr lang="en-US" sz="1500" b="1" dirty="0">
                 <a:solidFill>
                   <a:srgbClr val="0F1419"/>
                 </a:solidFill>
@@ -6671,20 +8969,20 @@
               </a:rPr>
               <a:t>2</a:t>
             </a:r>
-            <a:endParaRPr lang="en-US" sz="1600" dirty="0"/>
-          </a:p>
-        </p:txBody>
-      </p:sp>
-      <p:sp>
-        <p:nvSpPr>
-          <p:cNvPr id="7" name="Text 5"/>
-          <p:cNvSpPr txBox="1"/>
-          <p:nvPr/>
-        </p:nvSpPr>
-        <p:spPr>
-          <a:xfrm>
-            <a:off x="1371600" y="2212848"/>
-            <a:ext cx="7040880" cy="548640"/>
+            <a:endParaRPr lang="en-US" sz="1500" dirty="0"/>
+          </a:p>
+        </p:txBody>
+      </p:sp>
+      <p:sp>
+        <p:nvSpPr>
+          <p:cNvPr id="10" name="Text 7"/>
+          <p:cNvSpPr txBox="1"/>
+          <p:nvPr/>
+        </p:nvSpPr>
+        <p:spPr>
+          <a:xfrm>
+            <a:off x="1508760" y="2103120"/>
+            <a:ext cx="6766560" cy="548640"/>
           </a:xfrm>
           <a:prstGeom prst="rect">
             <a:avLst/>
@@ -6700,7 +8998,7 @@
               <a:buNone/>
             </a:pPr>
             <a:r>
-              <a:rPr lang="en-US" sz="1400" dirty="0">
+              <a:rPr lang="en-US" sz="1300" dirty="0">
                 <a:solidFill>
                   <a:srgbClr val="FFFFFF"/>
                 </a:solidFill>
@@ -6710,28 +9008,50 @@
               </a:rPr>
               <a:t>Vitesse : 3 secondes</a:t>
             </a:r>
-            <a:endParaRPr lang="en-US" sz="1400" dirty="0"/>
-          </a:p>
-        </p:txBody>
-      </p:sp>
-      <p:sp>
-        <p:nvSpPr>
-          <p:cNvPr id="8" name="Text 6"/>
-          <p:cNvSpPr txBox="1"/>
-          <p:nvPr/>
-        </p:nvSpPr>
-        <p:spPr>
-          <a:xfrm>
-            <a:off x="731520" y="2871216"/>
-            <a:ext cx="457200" cy="548640"/>
+            <a:endParaRPr lang="en-US" sz="1300" dirty="0"/>
+          </a:p>
+        </p:txBody>
+      </p:sp>
+      <p:sp>
+        <p:nvSpPr>
+          <p:cNvPr id="11" name="Shape 8"/>
+          <p:cNvSpPr/>
+          <p:nvPr/>
+        </p:nvSpPr>
+        <p:spPr>
+          <a:xfrm>
+            <a:off x="731520" y="2743200"/>
+            <a:ext cx="7680960" cy="548640"/>
           </a:xfrm>
           <a:prstGeom prst="roundRect">
             <a:avLst>
-              <a:gd name="adj" fmla="val 50000"/>
+              <a:gd name="adj" fmla="val 13333"/>
             </a:avLst>
           </a:prstGeom>
           <a:solidFill>
-            <a:srgbClr val="00BFA6"/>
+            <a:srgbClr val="0F1419"/>
+          </a:solidFill>
+          <a:ln/>
+        </p:spPr>
+      </p:sp>
+      <p:sp>
+        <p:nvSpPr>
+          <p:cNvPr id="12" name="Text 9"/>
+          <p:cNvSpPr txBox="1"/>
+          <p:nvPr/>
+        </p:nvSpPr>
+        <p:spPr>
+          <a:xfrm>
+            <a:off x="914400" y="2743200"/>
+            <a:ext cx="411480" cy="548640"/>
+          </a:xfrm>
+          <a:prstGeom prst="roundRect">
+            <a:avLst>
+              <a:gd name="adj" fmla="val 48889"/>
+            </a:avLst>
+          </a:prstGeom>
+          <a:solidFill>
+            <a:srgbClr val="06B6D4"/>
           </a:solidFill>
           <a:ln/>
         </p:spPr>
@@ -6743,7 +9063,7 @@
               <a:buNone/>
             </a:pPr>
             <a:r>
-              <a:rPr lang="en-US" sz="1600" b="1" dirty="0">
+              <a:rPr lang="en-US" sz="1500" b="1" dirty="0">
                 <a:solidFill>
                   <a:srgbClr val="0F1419"/>
                 </a:solidFill>
@@ -6753,20 +9073,20 @@
               </a:rPr>
               <a:t>3</a:t>
             </a:r>
-            <a:endParaRPr lang="en-US" sz="1600" dirty="0"/>
-          </a:p>
-        </p:txBody>
-      </p:sp>
-      <p:sp>
-        <p:nvSpPr>
-          <p:cNvPr id="9" name="Text 7"/>
-          <p:cNvSpPr txBox="1"/>
-          <p:nvPr/>
-        </p:nvSpPr>
-        <p:spPr>
-          <a:xfrm>
-            <a:off x="1371600" y="2871216"/>
-            <a:ext cx="7040880" cy="548640"/>
+            <a:endParaRPr lang="en-US" sz="1500" dirty="0"/>
+          </a:p>
+        </p:txBody>
+      </p:sp>
+      <p:sp>
+        <p:nvSpPr>
+          <p:cNvPr id="13" name="Text 10"/>
+          <p:cNvSpPr txBox="1"/>
+          <p:nvPr/>
+        </p:nvSpPr>
+        <p:spPr>
+          <a:xfrm>
+            <a:off x="1508760" y="2743200"/>
+            <a:ext cx="6766560" cy="548640"/>
           </a:xfrm>
           <a:prstGeom prst="rect">
             <a:avLst/>
@@ -6782,7 +9102,7 @@
               <a:buNone/>
             </a:pPr>
             <a:r>
-              <a:rPr lang="en-US" sz="1400" dirty="0">
+              <a:rPr lang="en-US" sz="1300" dirty="0">
                 <a:solidFill>
                   <a:srgbClr val="FFFFFF"/>
                 </a:solidFill>
@@ -6792,28 +9112,50 @@
               </a:rPr>
               <a:t>Le + utilisé en Afrique</a:t>
             </a:r>
-            <a:endParaRPr lang="en-US" sz="1400" dirty="0"/>
-          </a:p>
-        </p:txBody>
-      </p:sp>
-      <p:sp>
-        <p:nvSpPr>
-          <p:cNvPr id="10" name="Text 8"/>
-          <p:cNvSpPr txBox="1"/>
-          <p:nvPr/>
-        </p:nvSpPr>
-        <p:spPr>
-          <a:xfrm>
-            <a:off x="731520" y="3529584"/>
-            <a:ext cx="457200" cy="548640"/>
+            <a:endParaRPr lang="en-US" sz="1300" dirty="0"/>
+          </a:p>
+        </p:txBody>
+      </p:sp>
+      <p:sp>
+        <p:nvSpPr>
+          <p:cNvPr id="14" name="Shape 11"/>
+          <p:cNvSpPr/>
+          <p:nvPr/>
+        </p:nvSpPr>
+        <p:spPr>
+          <a:xfrm>
+            <a:off x="731520" y="3383280"/>
+            <a:ext cx="7680960" cy="548640"/>
           </a:xfrm>
           <a:prstGeom prst="roundRect">
             <a:avLst>
-              <a:gd name="adj" fmla="val 50000"/>
+              <a:gd name="adj" fmla="val 13333"/>
             </a:avLst>
           </a:prstGeom>
           <a:solidFill>
-            <a:srgbClr val="00BFA6"/>
+            <a:srgbClr val="0F1419"/>
+          </a:solidFill>
+          <a:ln/>
+        </p:spPr>
+      </p:sp>
+      <p:sp>
+        <p:nvSpPr>
+          <p:cNvPr id="15" name="Text 12"/>
+          <p:cNvSpPr txBox="1"/>
+          <p:nvPr/>
+        </p:nvSpPr>
+        <p:spPr>
+          <a:xfrm>
+            <a:off x="914400" y="3383280"/>
+            <a:ext cx="411480" cy="548640"/>
+          </a:xfrm>
+          <a:prstGeom prst="roundRect">
+            <a:avLst>
+              <a:gd name="adj" fmla="val 48889"/>
+            </a:avLst>
+          </a:prstGeom>
+          <a:solidFill>
+            <a:srgbClr val="06B6D4"/>
           </a:solidFill>
           <a:ln/>
         </p:spPr>
@@ -6825,7 +9167,7 @@
               <a:buNone/>
             </a:pPr>
             <a:r>
-              <a:rPr lang="en-US" sz="1600" b="1" dirty="0">
+              <a:rPr lang="en-US" sz="1500" b="1" dirty="0">
                 <a:solidFill>
                   <a:srgbClr val="0F1419"/>
                 </a:solidFill>
@@ -6835,20 +9177,20 @@
               </a:rPr>
               <a:t>4</a:t>
             </a:r>
-            <a:endParaRPr lang="en-US" sz="1600" dirty="0"/>
-          </a:p>
-        </p:txBody>
-      </p:sp>
-      <p:sp>
-        <p:nvSpPr>
-          <p:cNvPr id="11" name="Text 9"/>
-          <p:cNvSpPr txBox="1"/>
-          <p:nvPr/>
-        </p:nvSpPr>
-        <p:spPr>
-          <a:xfrm>
-            <a:off x="1371600" y="3529584"/>
-            <a:ext cx="7040880" cy="548640"/>
+            <a:endParaRPr lang="en-US" sz="1500" dirty="0"/>
+          </a:p>
+        </p:txBody>
+      </p:sp>
+      <p:sp>
+        <p:nvSpPr>
+          <p:cNvPr id="16" name="Text 13"/>
+          <p:cNvSpPr txBox="1"/>
+          <p:nvPr/>
+        </p:nvSpPr>
+        <p:spPr>
+          <a:xfrm>
+            <a:off x="1508760" y="3383280"/>
+            <a:ext cx="6766560" cy="548640"/>
           </a:xfrm>
           <a:prstGeom prst="rect">
             <a:avLst/>
@@ -6864,7 +9206,7 @@
               <a:buNone/>
             </a:pPr>
             <a:r>
-              <a:rPr lang="en-US" sz="1400" dirty="0">
+              <a:rPr lang="en-US" sz="1300" dirty="0">
                 <a:solidFill>
                   <a:srgbClr val="FFFFFF"/>
                 </a:solidFill>
@@ -6874,28 +9216,50 @@
               </a:rPr>
               <a:t>Le + recommandé par Terex pour la plupart des cas</a:t>
             </a:r>
-            <a:endParaRPr lang="en-US" sz="1400" dirty="0"/>
-          </a:p>
-        </p:txBody>
-      </p:sp>
-      <p:sp>
-        <p:nvSpPr>
-          <p:cNvPr id="12" name="Text 10"/>
-          <p:cNvSpPr txBox="1"/>
-          <p:nvPr/>
-        </p:nvSpPr>
-        <p:spPr>
-          <a:xfrm>
-            <a:off x="731520" y="4187952"/>
-            <a:ext cx="457200" cy="548640"/>
+            <a:endParaRPr lang="en-US" sz="1300" dirty="0"/>
+          </a:p>
+        </p:txBody>
+      </p:sp>
+      <p:sp>
+        <p:nvSpPr>
+          <p:cNvPr id="17" name="Shape 14"/>
+          <p:cNvSpPr/>
+          <p:nvPr/>
+        </p:nvSpPr>
+        <p:spPr>
+          <a:xfrm>
+            <a:off x="731520" y="4023360"/>
+            <a:ext cx="7680960" cy="548640"/>
           </a:xfrm>
           <a:prstGeom prst="roundRect">
             <a:avLst>
-              <a:gd name="adj" fmla="val 50000"/>
+              <a:gd name="adj" fmla="val 13333"/>
             </a:avLst>
           </a:prstGeom>
           <a:solidFill>
-            <a:srgbClr val="00BFA6"/>
+            <a:srgbClr val="0F1419"/>
+          </a:solidFill>
+          <a:ln/>
+        </p:spPr>
+      </p:sp>
+      <p:sp>
+        <p:nvSpPr>
+          <p:cNvPr id="18" name="Text 15"/>
+          <p:cNvSpPr txBox="1"/>
+          <p:nvPr/>
+        </p:nvSpPr>
+        <p:spPr>
+          <a:xfrm>
+            <a:off x="914400" y="4023360"/>
+            <a:ext cx="411480" cy="548640"/>
+          </a:xfrm>
+          <a:prstGeom prst="roundRect">
+            <a:avLst>
+              <a:gd name="adj" fmla="val 48889"/>
+            </a:avLst>
+          </a:prstGeom>
+          <a:solidFill>
+            <a:srgbClr val="06B6D4"/>
           </a:solidFill>
           <a:ln/>
         </p:spPr>
@@ -6907,7 +9271,7 @@
               <a:buNone/>
             </a:pPr>
             <a:r>
-              <a:rPr lang="en-US" sz="1600" b="1" dirty="0">
+              <a:rPr lang="en-US" sz="1500" b="1" dirty="0">
                 <a:solidFill>
                   <a:srgbClr val="0F1419"/>
                 </a:solidFill>
@@ -6917,20 +9281,20 @@
               </a:rPr>
               <a:t>5</a:t>
             </a:r>
-            <a:endParaRPr lang="en-US" sz="1600" dirty="0"/>
-          </a:p>
-        </p:txBody>
-      </p:sp>
-      <p:sp>
-        <p:nvSpPr>
-          <p:cNvPr id="13" name="Text 11"/>
-          <p:cNvSpPr txBox="1"/>
-          <p:nvPr/>
-        </p:nvSpPr>
-        <p:spPr>
-          <a:xfrm>
-            <a:off x="1371600" y="4187952"/>
-            <a:ext cx="7040880" cy="548640"/>
+            <a:endParaRPr lang="en-US" sz="1500" dirty="0"/>
+          </a:p>
+        </p:txBody>
+      </p:sp>
+      <p:sp>
+        <p:nvSpPr>
+          <p:cNvPr id="19" name="Text 16"/>
+          <p:cNvSpPr txBox="1"/>
+          <p:nvPr/>
+        </p:nvSpPr>
+        <p:spPr>
+          <a:xfrm>
+            <a:off x="1508760" y="4023360"/>
+            <a:ext cx="6766560" cy="548640"/>
           </a:xfrm>
           <a:prstGeom prst="rect">
             <a:avLst/>
@@ -6946,7 +9310,7 @@
               <a:buNone/>
             </a:pPr>
             <a:r>
-              <a:rPr lang="en-US" sz="1400" dirty="0">
+              <a:rPr lang="en-US" sz="1300" dirty="0">
                 <a:solidFill>
                   <a:srgbClr val="FFFFFF"/>
                 </a:solidFill>
@@ -6956,7 +9320,7 @@
               </a:rPr>
               <a:t>Adresse : commence par « T »</a:t>
             </a:r>
-            <a:endParaRPr lang="en-US" sz="1400" dirty="0"/>
+            <a:endParaRPr lang="en-US" sz="1300" dirty="0"/>
           </a:p>
         </p:txBody>
       </p:sp>
@@ -7000,12 +9364,12 @@
         </p:nvSpPr>
         <p:spPr>
           <a:xfrm>
-            <a:off x="548640" y="731520"/>
-            <a:ext cx="8046720" cy="3657600"/>
+            <a:off x="548640" y="548640"/>
+            <a:ext cx="8046720" cy="3840480"/>
           </a:xfrm>
           <a:prstGeom prst="roundRect">
             <a:avLst>
-              <a:gd name="adj" fmla="val 3750"/>
+              <a:gd name="adj" fmla="val 3571"/>
             </a:avLst>
           </a:prstGeom>
           <a:solidFill>
@@ -7016,14 +9380,58 @@
       </p:sp>
       <p:sp>
         <p:nvSpPr>
-          <p:cNvPr id="3" name="Text 1"/>
-          <p:cNvSpPr txBox="1"/>
-          <p:nvPr/>
-        </p:nvSpPr>
-        <p:spPr>
-          <a:xfrm>
-            <a:off x="822960" y="914400"/>
-            <a:ext cx="2743200" cy="411480"/>
+          <p:cNvPr id="3" name="Shape 1"/>
+          <p:cNvSpPr/>
+          <p:nvPr/>
+        </p:nvSpPr>
+        <p:spPr>
+          <a:xfrm>
+            <a:off x="548640" y="548640"/>
+            <a:ext cx="54864" cy="3840480"/>
+          </a:xfrm>
+          <a:prstGeom prst="rect">
+            <a:avLst/>
+          </a:prstGeom>
+          <a:solidFill>
+            <a:srgbClr val="EF4444"/>
+          </a:solidFill>
+          <a:ln/>
+        </p:spPr>
+      </p:sp>
+      <p:pic>
+        <p:nvPicPr>
+          <p:cNvPr id="4" name="Image 0" descr="preencoded.png">    </p:cNvPr>
+          <p:cNvPicPr>
+            <a:picLocks noChangeAspect="1"/>
+          </p:cNvPicPr>
+          <p:nvPr/>
+        </p:nvPicPr>
+        <p:blipFill>
+          <a:blip r:embed="rId1"/>
+          <a:stretch>
+            <a:fillRect/>
+          </a:stretch>
+        </p:blipFill>
+        <p:spPr>
+          <a:xfrm>
+            <a:off x="914400" y="777240"/>
+            <a:ext cx="548640" cy="548640"/>
+          </a:xfrm>
+          <a:prstGeom prst="rect">
+            <a:avLst/>
+          </a:prstGeom>
+        </p:spPr>
+      </p:pic>
+      <p:sp>
+        <p:nvSpPr>
+          <p:cNvPr id="5" name="Text 2"/>
+          <p:cNvSpPr txBox="1"/>
+          <p:nvPr/>
+        </p:nvSpPr>
+        <p:spPr>
+          <a:xfrm>
+            <a:off x="1600200" y="777240"/>
+            <a:ext cx="2743200" cy="320040"/>
           </a:xfrm>
           <a:prstGeom prst="rect">
             <a:avLst/>
@@ -7039,7 +9447,7 @@
               <a:buNone/>
             </a:pPr>
             <a:r>
-              <a:rPr lang="en-US" sz="1400" b="1" spc="300" kern="0" dirty="0">
+              <a:rPr lang="en-US" sz="1200" b="1" spc="300" kern="0" dirty="0">
                 <a:solidFill>
                   <a:srgbClr val="EF4444"/>
                 </a:solidFill>
@@ -7049,20 +9457,20 @@
               </a:rPr>
               <a:t>ATTENTION</a:t>
             </a:r>
-            <a:endParaRPr lang="en-US" sz="1400" dirty="0"/>
-          </a:p>
-        </p:txBody>
-      </p:sp>
-      <p:sp>
-        <p:nvSpPr>
-          <p:cNvPr id="4" name="Text 2"/>
-          <p:cNvSpPr txBox="1"/>
-          <p:nvPr/>
-        </p:nvSpPr>
-        <p:spPr>
-          <a:xfrm>
-            <a:off x="822960" y="1371600"/>
-            <a:ext cx="7498080" cy="2194560"/>
+            <a:endParaRPr lang="en-US" sz="1200" dirty="0"/>
+          </a:p>
+        </p:txBody>
+      </p:sp>
+      <p:sp>
+        <p:nvSpPr>
+          <p:cNvPr id="6" name="Text 3"/>
+          <p:cNvSpPr txBox="1"/>
+          <p:nvPr/>
+        </p:nvSpPr>
+        <p:spPr>
+          <a:xfrm>
+            <a:off x="914400" y="1371600"/>
+            <a:ext cx="7406640" cy="2286000"/>
           </a:xfrm>
           <a:prstGeom prst="rect">
             <a:avLst/>
@@ -7194,14 +9602,60 @@
       </p:grpSpPr>
       <p:sp>
         <p:nvSpPr>
-          <p:cNvPr id="2" name="Text 0"/>
-          <p:cNvSpPr txBox="1"/>
-          <p:nvPr/>
-        </p:nvSpPr>
-        <p:spPr>
-          <a:xfrm>
-            <a:off x="731520" y="1371600"/>
-            <a:ext cx="7680960" cy="640080"/>
+          <p:cNvPr id="2" name="Shape 0"/>
+          <p:cNvSpPr/>
+          <p:nvPr/>
+        </p:nvSpPr>
+        <p:spPr>
+          <a:xfrm>
+            <a:off x="2743200" y="457200"/>
+            <a:ext cx="3657600" cy="3657600"/>
+          </a:xfrm>
+          <a:prstGeom prst="ellipse">
+            <a:avLst/>
+          </a:prstGeom>
+          <a:solidFill>
+            <a:srgbClr val="06B6D4">
+              <a:alpha val="6000"/>
+            </a:srgbClr>
+          </a:solidFill>
+          <a:ln/>
+        </p:spPr>
+      </p:sp>
+      <p:pic>
+        <p:nvPicPr>
+          <p:cNvPr id="3" name="Image 0" descr="preencoded.png">    </p:cNvPr>
+          <p:cNvPicPr>
+            <a:picLocks noChangeAspect="1"/>
+          </p:cNvPicPr>
+          <p:nvPr/>
+        </p:nvPicPr>
+        <p:blipFill>
+          <a:blip r:embed="rId1"/>
+          <a:stretch>
+            <a:fillRect/>
+          </a:stretch>
+        </p:blipFill>
+        <p:spPr>
+          <a:xfrm>
+            <a:off x="3931920" y="914400"/>
+            <a:ext cx="1280160" cy="1280160"/>
+          </a:xfrm>
+          <a:prstGeom prst="rect">
+            <a:avLst/>
+          </a:prstGeom>
+        </p:spPr>
+      </p:pic>
+      <p:sp>
+        <p:nvSpPr>
+          <p:cNvPr id="4" name="Text 1"/>
+          <p:cNvSpPr txBox="1"/>
+          <p:nvPr/>
+        </p:nvSpPr>
+        <p:spPr>
+          <a:xfrm>
+            <a:off x="731520" y="2377440"/>
+            <a:ext cx="7680960" cy="548640"/>
           </a:xfrm>
           <a:prstGeom prst="rect">
             <a:avLst/>
@@ -7217,7 +9671,7 @@
               <a:buNone/>
             </a:pPr>
             <a:r>
-              <a:rPr lang="en-US" sz="3000" b="1" dirty="0">
+              <a:rPr lang="en-US" sz="2800" b="1" dirty="0">
                 <a:solidFill>
                   <a:srgbClr val="FFFFFF"/>
                 </a:solidFill>
@@ -7227,20 +9681,20 @@
               </a:rPr>
               <a:t>Module 6 termine</a:t>
             </a:r>
-            <a:endParaRPr lang="en-US" sz="3000" dirty="0"/>
-          </a:p>
-        </p:txBody>
-      </p:sp>
-      <p:sp>
-        <p:nvSpPr>
-          <p:cNvPr id="3" name="Text 1"/>
-          <p:cNvSpPr txBox="1"/>
-          <p:nvPr/>
-        </p:nvSpPr>
-        <p:spPr>
-          <a:xfrm>
-            <a:off x="1371600" y="2194560"/>
-            <a:ext cx="6400800" cy="457200"/>
+            <a:endParaRPr lang="en-US" sz="2800" dirty="0"/>
+          </a:p>
+        </p:txBody>
+      </p:sp>
+      <p:sp>
+        <p:nvSpPr>
+          <p:cNvPr id="5" name="Text 2"/>
+          <p:cNvSpPr txBox="1"/>
+          <p:nvPr/>
+        </p:nvSpPr>
+        <p:spPr>
+          <a:xfrm>
+            <a:off x="1371600" y="3017520"/>
+            <a:ext cx="6400800" cy="365760"/>
           </a:xfrm>
           <a:prstGeom prst="rect">
             <a:avLst/>
@@ -7256,7 +9710,7 @@
               <a:buNone/>
             </a:pPr>
             <a:r>
-              <a:rPr lang="en-US" sz="1400" dirty="0">
+              <a:rPr lang="en-US" sz="1300" dirty="0">
                 <a:solidFill>
                   <a:srgbClr val="94A3B8"/>
                 </a:solidFill>
@@ -7266,40 +9720,40 @@
               </a:rPr>
               <a:t>Passez au module suivant pour continuer votre apprentissage.</a:t>
             </a:r>
-            <a:endParaRPr lang="en-US" sz="1400" dirty="0"/>
-          </a:p>
-        </p:txBody>
-      </p:sp>
-      <p:sp>
-        <p:nvSpPr>
-          <p:cNvPr id="4" name="Shape 2"/>
+            <a:endParaRPr lang="en-US" sz="1300" dirty="0"/>
+          </a:p>
+        </p:txBody>
+      </p:sp>
+      <p:sp>
+        <p:nvSpPr>
+          <p:cNvPr id="6" name="Shape 3"/>
           <p:cNvSpPr/>
           <p:nvPr/>
         </p:nvSpPr>
         <p:spPr>
           <a:xfrm>
-            <a:off x="3200400" y="2926080"/>
-            <a:ext cx="2743200" cy="54864"/>
+            <a:off x="3200400" y="3657600"/>
+            <a:ext cx="2743200" cy="36576"/>
           </a:xfrm>
           <a:prstGeom prst="rect">
             <a:avLst/>
           </a:prstGeom>
           <a:solidFill>
-            <a:srgbClr val="00BFA6"/>
+            <a:srgbClr val="06B6D4"/>
           </a:solidFill>
           <a:ln/>
         </p:spPr>
       </p:sp>
       <p:sp>
         <p:nvSpPr>
-          <p:cNvPr id="5" name="Text 3"/>
-          <p:cNvSpPr txBox="1"/>
-          <p:nvPr/>
-        </p:nvSpPr>
-        <p:spPr>
-          <a:xfrm>
-            <a:off x="2286000" y="3291840"/>
-            <a:ext cx="4572000" cy="365760"/>
+          <p:cNvPr id="7" name="Text 4"/>
+          <p:cNvSpPr txBox="1"/>
+          <p:nvPr/>
+        </p:nvSpPr>
+        <p:spPr>
+          <a:xfrm>
+            <a:off x="2286000" y="3931920"/>
+            <a:ext cx="4572000" cy="320040"/>
           </a:xfrm>
           <a:prstGeom prst="rect">
             <a:avLst/>
@@ -7315,7 +9769,7 @@
               <a:buNone/>
             </a:pPr>
             <a:r>
-              <a:rPr lang="en-US" sz="1200" spc="300" kern="0" dirty="0">
+              <a:rPr lang="en-US" sz="1100" spc="300" kern="0" dirty="0">
                 <a:solidFill>
                   <a:srgbClr val="64748B"/>
                 </a:solidFill>
@@ -7325,20 +9779,20 @@
               </a:rPr>
               <a:t>TEREX ACADEMY</a:t>
             </a:r>
-            <a:endParaRPr lang="en-US" sz="1200" dirty="0"/>
-          </a:p>
-        </p:txBody>
-      </p:sp>
-      <p:sp>
-        <p:nvSpPr>
-          <p:cNvPr id="6" name="Text 4"/>
-          <p:cNvSpPr txBox="1"/>
-          <p:nvPr/>
-        </p:nvSpPr>
-        <p:spPr>
-          <a:xfrm>
-            <a:off x="2286000" y="3657600"/>
-            <a:ext cx="4572000" cy="320040"/>
+            <a:endParaRPr lang="en-US" sz="1100" dirty="0"/>
+          </a:p>
+        </p:txBody>
+      </p:sp>
+      <p:sp>
+        <p:nvSpPr>
+          <p:cNvPr id="8" name="Text 5"/>
+          <p:cNvSpPr txBox="1"/>
+          <p:nvPr/>
+        </p:nvSpPr>
+        <p:spPr>
+          <a:xfrm>
+            <a:off x="2286000" y="4251960"/>
+            <a:ext cx="4572000" cy="274320"/>
           </a:xfrm>
           <a:prstGeom prst="rect">
             <a:avLst/>
@@ -7400,35 +9854,105 @@
           <a:chExt cx="0" cy="0"/>
         </a:xfrm>
       </p:grpSpPr>
-      <p:sp>
-        <p:nvSpPr>
-          <p:cNvPr id="2" name="Shape 0"/>
+      <p:pic>
+        <p:nvPicPr>
+          <p:cNvPr id="2" name="Image 0" descr="preencoded.png">    </p:cNvPr>
+          <p:cNvPicPr>
+            <a:picLocks noChangeAspect="1"/>
+          </p:cNvPicPr>
+          <p:nvPr/>
+        </p:nvPicPr>
+        <p:blipFill>
+          <a:blip r:embed="rId1"/>
+          <a:stretch>
+            <a:fillRect/>
+          </a:stretch>
+        </p:blipFill>
+        <p:spPr>
+          <a:xfrm>
+            <a:off x="7315200" y="548640"/>
+            <a:ext cx="1280160" cy="1280160"/>
+          </a:xfrm>
+          <a:prstGeom prst="rect">
+            <a:avLst/>
+          </a:prstGeom>
+        </p:spPr>
+      </p:pic>
+      <p:pic>
+        <p:nvPicPr>
+          <p:cNvPr id="3" name="Image 1" descr="preencoded.png">    </p:cNvPr>
+          <p:cNvPicPr>
+            <a:picLocks noChangeAspect="1"/>
+          </p:cNvPicPr>
+          <p:nvPr/>
+        </p:nvPicPr>
+        <p:blipFill>
+          <a:blip r:embed="rId2"/>
+          <a:stretch>
+            <a:fillRect/>
+          </a:stretch>
+        </p:blipFill>
+        <p:spPr>
+          <a:xfrm>
+            <a:off x="7772400" y="2011680"/>
+            <a:ext cx="822960" cy="822960"/>
+          </a:xfrm>
+          <a:prstGeom prst="rect">
+            <a:avLst/>
+          </a:prstGeom>
+        </p:spPr>
+      </p:pic>
+      <p:sp>
+        <p:nvSpPr>
+          <p:cNvPr id="4" name="Shape 0"/>
           <p:cNvSpPr/>
           <p:nvPr/>
         </p:nvSpPr>
         <p:spPr>
           <a:xfrm>
-            <a:off x="548640" y="914400"/>
-            <a:ext cx="45720" cy="2560320"/>
-          </a:xfrm>
-          <a:prstGeom prst="rect">
+            <a:off x="6583680" y="-274320"/>
+            <a:ext cx="3200400" cy="3200400"/>
+          </a:xfrm>
+          <a:prstGeom prst="ellipse">
             <a:avLst/>
           </a:prstGeom>
           <a:solidFill>
-            <a:srgbClr val="00BFA6"/>
+            <a:srgbClr val="06B6D4">
+              <a:alpha val="6000"/>
+            </a:srgbClr>
           </a:solidFill>
           <a:ln/>
         </p:spPr>
       </p:sp>
       <p:sp>
         <p:nvSpPr>
-          <p:cNvPr id="3" name="Text 1"/>
-          <p:cNvSpPr txBox="1"/>
-          <p:nvPr/>
-        </p:nvSpPr>
-        <p:spPr>
-          <a:xfrm>
-            <a:off x="822960" y="1097280"/>
+          <p:cNvPr id="5" name="Shape 1"/>
+          <p:cNvSpPr/>
+          <p:nvPr/>
+        </p:nvSpPr>
+        <p:spPr>
+          <a:xfrm>
+            <a:off x="731520" y="914400"/>
+            <a:ext cx="45720" cy="2194560"/>
+          </a:xfrm>
+          <a:prstGeom prst="rect">
+            <a:avLst/>
+          </a:prstGeom>
+          <a:solidFill>
+            <a:srgbClr val="06B6D4"/>
+          </a:solidFill>
+          <a:ln/>
+        </p:spPr>
+      </p:sp>
+      <p:sp>
+        <p:nvSpPr>
+          <p:cNvPr id="6" name="Text 2"/>
+          <p:cNvSpPr txBox="1"/>
+          <p:nvPr/>
+        </p:nvSpPr>
+        <p:spPr>
+          <a:xfrm>
+            <a:off x="960120" y="914400"/>
             <a:ext cx="2743200" cy="365760"/>
           </a:xfrm>
           <a:prstGeom prst="rect">
@@ -7447,13 +9971,13 @@
             <a:r>
               <a:rPr lang="en-US" sz="1200" b="1" spc="200" kern="0" dirty="0">
                 <a:solidFill>
-                  <a:srgbClr val="00BFA6"/>
-                </a:solidFill>
-                <a:latin typeface="Calibri" pitchFamily="34" charset="0"/>
-                <a:ea typeface="Calibri" pitchFamily="34" charset="-122"/>
-                <a:cs typeface="Calibri" pitchFamily="34" charset="-120"/>
-              </a:rPr>
-              <a:t>Lecon 1 / 3</a:t>
+                  <a:srgbClr val="06B6D4"/>
+                </a:solidFill>
+                <a:latin typeface="Calibri" pitchFamily="34" charset="0"/>
+                <a:ea typeface="Calibri" pitchFamily="34" charset="-122"/>
+                <a:cs typeface="Calibri" pitchFamily="34" charset="-120"/>
+              </a:rPr>
+              <a:t>Leçon 1 / 3</a:t>
             </a:r>
             <a:endParaRPr lang="en-US" sz="1200" dirty="0"/>
           </a:p>
@@ -7461,14 +9985,14 @@
       </p:sp>
       <p:sp>
         <p:nvSpPr>
-          <p:cNvPr id="4" name="Text 2"/>
-          <p:cNvSpPr txBox="1"/>
-          <p:nvPr/>
-        </p:nvSpPr>
-        <p:spPr>
-          <a:xfrm>
-            <a:off x="822960" y="1645920"/>
-            <a:ext cx="7498080" cy="1280160"/>
+          <p:cNvPr id="7" name="Text 3"/>
+          <p:cNvSpPr txBox="1"/>
+          <p:nvPr/>
+        </p:nvSpPr>
+        <p:spPr>
+          <a:xfrm>
+            <a:off x="960120" y="1371600"/>
+            <a:ext cx="6217920" cy="1463040"/>
           </a:xfrm>
           <a:prstGeom prst="rect">
             <a:avLst/>
@@ -7484,7 +10008,7 @@
               <a:buNone/>
             </a:pPr>
             <a:r>
-              <a:rPr lang="en-US" sz="3000" b="1" dirty="0">
+              <a:rPr lang="en-US" sz="2800" b="1" dirty="0">
                 <a:solidFill>
                   <a:srgbClr val="FFFFFF"/>
                 </a:solidFill>
@@ -7494,19 +10018,19 @@
               </a:rPr>
               <a:t>Qu'est-ce qu'un stablecoin ?</a:t>
             </a:r>
-            <a:endParaRPr lang="en-US" sz="3000" dirty="0"/>
-          </a:p>
-        </p:txBody>
-      </p:sp>
-      <p:sp>
-        <p:nvSpPr>
-          <p:cNvPr id="5" name="Text 3"/>
-          <p:cNvSpPr txBox="1"/>
-          <p:nvPr/>
-        </p:nvSpPr>
-        <p:spPr>
-          <a:xfrm>
-            <a:off x="822960" y="4206240"/>
+            <a:endParaRPr lang="en-US" sz="2800" dirty="0"/>
+          </a:p>
+        </p:txBody>
+      </p:sp>
+      <p:sp>
+        <p:nvSpPr>
+          <p:cNvPr id="8" name="Text 4"/>
+          <p:cNvSpPr txBox="1"/>
+          <p:nvPr/>
+        </p:nvSpPr>
+        <p:spPr>
+          <a:xfrm>
+            <a:off x="960120" y="4114800"/>
             <a:ext cx="5486400" cy="320040"/>
           </a:xfrm>
           <a:prstGeom prst="rect">
@@ -7571,7 +10095,53 @@
       </p:grpSpPr>
       <p:sp>
         <p:nvSpPr>
-          <p:cNvPr id="2" name="Text 0"/>
+          <p:cNvPr id="2" name="Shape 0"/>
+          <p:cNvSpPr/>
+          <p:nvPr/>
+        </p:nvSpPr>
+        <p:spPr>
+          <a:xfrm>
+            <a:off x="7955280" y="182880"/>
+            <a:ext cx="640080" cy="640080"/>
+          </a:xfrm>
+          <a:prstGeom prst="ellipse">
+            <a:avLst/>
+          </a:prstGeom>
+          <a:solidFill>
+            <a:srgbClr val="06B6D4">
+              <a:alpha val="12000"/>
+            </a:srgbClr>
+          </a:solidFill>
+          <a:ln/>
+        </p:spPr>
+      </p:sp>
+      <p:pic>
+        <p:nvPicPr>
+          <p:cNvPr id="3" name="Image 0" descr="preencoded.png">    </p:cNvPr>
+          <p:cNvPicPr>
+            <a:picLocks noChangeAspect="1"/>
+          </p:cNvPicPr>
+          <p:nvPr/>
+        </p:nvPicPr>
+        <p:blipFill>
+          <a:blip r:embed="rId1"/>
+          <a:stretch>
+            <a:fillRect/>
+          </a:stretch>
+        </p:blipFill>
+        <p:spPr>
+          <a:xfrm>
+            <a:off x="8028432" y="256032"/>
+            <a:ext cx="493776" cy="493776"/>
+          </a:xfrm>
+          <a:prstGeom prst="rect">
+            <a:avLst/>
+          </a:prstGeom>
+        </p:spPr>
+      </p:pic>
+      <p:sp>
+        <p:nvSpPr>
+          <p:cNvPr id="4" name="Text 1"/>
           <p:cNvSpPr txBox="1"/>
           <p:nvPr/>
         </p:nvSpPr>
@@ -7614,7 +10184,7 @@
       </p:sp>
       <p:sp>
         <p:nvSpPr>
-          <p:cNvPr id="3" name="Text 1"/>
+          <p:cNvPr id="5" name="Text 2"/>
           <p:cNvSpPr txBox="1"/>
           <p:nvPr/>
         </p:nvSpPr>
@@ -7645,7 +10215,7 @@
                 <a:ea typeface="Calibri" pitchFamily="34" charset="-122"/>
                 <a:cs typeface="Calibri" pitchFamily="34" charset="-120"/>
               </a:rPr>
-              <a:t>Module 6 — Lecon 1</a:t>
+              <a:t>Module 6 — Leçon 1</a:t>
             </a:r>
             <a:endParaRPr lang="en-US" sz="900" dirty="0"/>
           </a:p>
@@ -7691,8 +10261,8 @@
         </p:nvSpPr>
         <p:spPr>
           <a:xfrm>
-            <a:off x="731520" y="365760"/>
-            <a:ext cx="7680960" cy="548640"/>
+            <a:off x="731520" y="274320"/>
+            <a:ext cx="7680960" cy="502920"/>
           </a:xfrm>
           <a:prstGeom prst="rect">
             <a:avLst/>
@@ -7708,9 +10278,9 @@
               <a:buNone/>
             </a:pPr>
             <a:r>
-              <a:rPr lang="en-US" sz="2200" b="1" dirty="0">
-                <a:solidFill>
-                  <a:srgbClr val="00BFA6"/>
+              <a:rPr lang="en-US" sz="2000" b="1" dirty="0">
+                <a:solidFill>
+                  <a:srgbClr val="06B6D4"/>
                 </a:solidFill>
                 <a:latin typeface="Calibri" pitchFamily="34" charset="0"/>
                 <a:ea typeface="Calibri" pitchFamily="34" charset="-122"/>
@@ -7718,7 +10288,7 @@
               </a:rPr>
               <a:t>Le problème que ça résout</a:t>
             </a:r>
-            <a:endParaRPr lang="en-US" sz="2200" dirty="0"/>
+            <a:endParaRPr lang="en-US" sz="2000" dirty="0"/>
           </a:p>
         </p:txBody>
       </p:sp>
@@ -7730,8 +10300,8 @@
         </p:nvSpPr>
         <p:spPr>
           <a:xfrm>
-            <a:off x="731520" y="1051560"/>
-            <a:ext cx="7680960" cy="3657600"/>
+            <a:off x="731520" y="1005840"/>
+            <a:ext cx="4206240" cy="3474720"/>
           </a:xfrm>
           <a:prstGeom prst="rect">
             <a:avLst/>
@@ -7745,13 +10315,13 @@
           <a:p>
             <a:pPr marL="342900" indent="-342900">
               <a:spcAft>
-                <a:spcPts val="800"/>
+                <a:spcPts val="600"/>
               </a:spcAft>
               <a:buSzPct val="100000"/>
               <a:buChar char="•"/>
             </a:pPr>
             <a:r>
-              <a:rPr lang="en-US" sz="1400" dirty="0">
+              <a:rPr lang="en-US" sz="1300" dirty="0">
                 <a:solidFill>
                   <a:srgbClr val="FFFFFF"/>
                 </a:solidFill>
@@ -7759,20 +10329,20 @@
                 <a:ea typeface="Calibri" pitchFamily="34" charset="-122"/>
                 <a:cs typeface="Calibri" pitchFamily="34" charset="-120"/>
               </a:rPr>
-              <a:t>Bitcoin peut monter de 20% en une semaine. Ethereum peut chuter de 15% en un jour. Ces variations sont excellentes pour les traders, mais impraticables pour :</a:t>
-            </a:r>
-            <a:endParaRPr lang="en-US" sz="1400" dirty="0"/>
+              <a:t>Bitcoin peut monter de 20% en une semaine. Ethereum peut chuter de 15% en un jour. Ces variations sont excellentes po...</a:t>
+            </a:r>
+            <a:endParaRPr lang="en-US" sz="1300" dirty="0"/>
           </a:p>
           <a:p>
             <a:pPr marL="342900" indent="-342900">
               <a:spcAft>
-                <a:spcPts val="800"/>
+                <a:spcPts val="600"/>
               </a:spcAft>
               <a:buSzPct val="100000"/>
               <a:buChar char="•"/>
             </a:pPr>
             <a:r>
-              <a:rPr lang="en-US" sz="1400" dirty="0">
+              <a:rPr lang="en-US" sz="1300" dirty="0">
                 <a:solidFill>
                   <a:srgbClr val="FFFFFF"/>
                 </a:solidFill>
@@ -7782,18 +10352,18 @@
               </a:rPr>
               <a:t>Payer votre loyer en crypto.</a:t>
             </a:r>
-            <a:endParaRPr lang="en-US" sz="1400" dirty="0"/>
+            <a:endParaRPr lang="en-US" sz="1300" dirty="0"/>
           </a:p>
           <a:p>
             <a:pPr marL="342900" indent="-342900">
               <a:spcAft>
-                <a:spcPts val="800"/>
+                <a:spcPts val="600"/>
               </a:spcAft>
               <a:buSzPct val="100000"/>
               <a:buChar char="•"/>
             </a:pPr>
             <a:r>
-              <a:rPr lang="en-US" sz="1400" dirty="0">
+              <a:rPr lang="en-US" sz="1300" dirty="0">
                 <a:solidFill>
                   <a:srgbClr val="FFFFFF"/>
                 </a:solidFill>
@@ -7803,18 +10373,82 @@
               </a:rPr>
               <a:t>Recevoir votre salaire en crypto.</a:t>
             </a:r>
-            <a:endParaRPr lang="en-US" sz="1400" dirty="0"/>
-          </a:p>
-          <a:p>
-            <a:pPr marL="342900" indent="-342900">
-              <a:spcAft>
-                <a:spcPts val="800"/>
-              </a:spcAft>
-              <a:buSzPct val="100000"/>
-              <a:buChar char="•"/>
-            </a:pPr>
-            <a:r>
-              <a:rPr lang="en-US" sz="1400" dirty="0">
+            <a:endParaRPr lang="en-US" sz="1300" dirty="0"/>
+          </a:p>
+        </p:txBody>
+      </p:sp>
+      <p:sp>
+        <p:nvSpPr>
+          <p:cNvPr id="4" name="Shape 2"/>
+          <p:cNvSpPr/>
+          <p:nvPr/>
+        </p:nvSpPr>
+        <p:spPr>
+          <a:xfrm>
+            <a:off x="5120640" y="1005840"/>
+            <a:ext cx="3474720" cy="640080"/>
+          </a:xfrm>
+          <a:prstGeom prst="roundRect">
+            <a:avLst>
+              <a:gd name="adj" fmla="val 14286"/>
+            </a:avLst>
+          </a:prstGeom>
+          <a:solidFill>
+            <a:srgbClr val="1A2332"/>
+          </a:solidFill>
+          <a:ln/>
+        </p:spPr>
+      </p:sp>
+      <p:pic>
+        <p:nvPicPr>
+          <p:cNvPr id="5" name="Image 0" descr="preencoded.png">    </p:cNvPr>
+          <p:cNvPicPr>
+            <a:picLocks noChangeAspect="1"/>
+          </p:cNvPicPr>
+          <p:nvPr/>
+        </p:nvPicPr>
+        <p:blipFill>
+          <a:blip r:embed="rId1"/>
+          <a:stretch>
+            <a:fillRect/>
+          </a:stretch>
+        </p:blipFill>
+        <p:spPr>
+          <a:xfrm>
+            <a:off x="5257800" y="1106424"/>
+            <a:ext cx="438912" cy="438912"/>
+          </a:xfrm>
+          <a:prstGeom prst="rect">
+            <a:avLst/>
+          </a:prstGeom>
+        </p:spPr>
+      </p:pic>
+      <p:sp>
+        <p:nvSpPr>
+          <p:cNvPr id="6" name="Text 3"/>
+          <p:cNvSpPr txBox="1"/>
+          <p:nvPr/>
+        </p:nvSpPr>
+        <p:spPr>
+          <a:xfrm>
+            <a:off x="5806440" y="1005840"/>
+            <a:ext cx="2651760" cy="640080"/>
+          </a:xfrm>
+          <a:prstGeom prst="rect">
+            <a:avLst/>
+          </a:prstGeom>
+          <a:noFill/>
+          <a:ln/>
+        </p:spPr>
+        <p:txBody>
+          <a:bodyPr wrap="square" lIns="0" tIns="0" rIns="0" bIns="0" rtlCol="0" anchor="ctr"/>
+          <a:lstStyle/>
+          <a:p>
+            <a:pPr indent="0" marL="0">
+              <a:buNone/>
+            </a:pPr>
+            <a:r>
+              <a:rPr lang="en-US" sz="1200" dirty="0">
                 <a:solidFill>
                   <a:srgbClr val="FFFFFF"/>
                 </a:solidFill>
@@ -7824,18 +10458,82 @@
               </a:rPr>
               <a:t>Épargner sans stress.</a:t>
             </a:r>
-            <a:endParaRPr lang="en-US" sz="1400" dirty="0"/>
-          </a:p>
-          <a:p>
-            <a:pPr marL="342900" indent="-342900">
-              <a:spcAft>
-                <a:spcPts val="800"/>
-              </a:spcAft>
-              <a:buSzPct val="100000"/>
-              <a:buChar char="•"/>
-            </a:pPr>
-            <a:r>
-              <a:rPr lang="en-US" sz="1400" dirty="0">
+            <a:endParaRPr lang="en-US" sz="1200" dirty="0"/>
+          </a:p>
+        </p:txBody>
+      </p:sp>
+      <p:sp>
+        <p:nvSpPr>
+          <p:cNvPr id="7" name="Shape 4"/>
+          <p:cNvSpPr/>
+          <p:nvPr/>
+        </p:nvSpPr>
+        <p:spPr>
+          <a:xfrm>
+            <a:off x="5120640" y="1737360"/>
+            <a:ext cx="3474720" cy="640080"/>
+          </a:xfrm>
+          <a:prstGeom prst="roundRect">
+            <a:avLst>
+              <a:gd name="adj" fmla="val 14286"/>
+            </a:avLst>
+          </a:prstGeom>
+          <a:solidFill>
+            <a:srgbClr val="1A2332"/>
+          </a:solidFill>
+          <a:ln/>
+        </p:spPr>
+      </p:sp>
+      <p:pic>
+        <p:nvPicPr>
+          <p:cNvPr id="8" name="Image 1" descr="preencoded.png">    </p:cNvPr>
+          <p:cNvPicPr>
+            <a:picLocks noChangeAspect="1"/>
+          </p:cNvPicPr>
+          <p:nvPr/>
+        </p:nvPicPr>
+        <p:blipFill>
+          <a:blip r:embed="rId2"/>
+          <a:stretch>
+            <a:fillRect/>
+          </a:stretch>
+        </p:blipFill>
+        <p:spPr>
+          <a:xfrm>
+            <a:off x="5257800" y="1837944"/>
+            <a:ext cx="438912" cy="438912"/>
+          </a:xfrm>
+          <a:prstGeom prst="rect">
+            <a:avLst/>
+          </a:prstGeom>
+        </p:spPr>
+      </p:pic>
+      <p:sp>
+        <p:nvSpPr>
+          <p:cNvPr id="9" name="Text 5"/>
+          <p:cNvSpPr txBox="1"/>
+          <p:nvPr/>
+        </p:nvSpPr>
+        <p:spPr>
+          <a:xfrm>
+            <a:off x="5806440" y="1737360"/>
+            <a:ext cx="2651760" cy="640080"/>
+          </a:xfrm>
+          <a:prstGeom prst="rect">
+            <a:avLst/>
+          </a:prstGeom>
+          <a:noFill/>
+          <a:ln/>
+        </p:spPr>
+        <p:txBody>
+          <a:bodyPr wrap="square" lIns="0" tIns="0" rIns="0" bIns="0" rtlCol="0" anchor="ctr"/>
+          <a:lstStyle/>
+          <a:p>
+            <a:pPr indent="0" marL="0">
+              <a:buNone/>
+            </a:pPr>
+            <a:r>
+              <a:rPr lang="en-US" sz="1200" dirty="0">
                 <a:solidFill>
                   <a:srgbClr val="FFFFFF"/>
                 </a:solidFill>
@@ -7845,18 +10543,82 @@
               </a:rPr>
               <a:t>Faire du commerce international.</a:t>
             </a:r>
-            <a:endParaRPr lang="en-US" sz="1400" dirty="0"/>
-          </a:p>
-          <a:p>
-            <a:pPr marL="342900" indent="-342900">
-              <a:spcAft>
-                <a:spcPts val="800"/>
-              </a:spcAft>
-              <a:buSzPct val="100000"/>
-              <a:buChar char="•"/>
-            </a:pPr>
-            <a:r>
-              <a:rPr lang="en-US" sz="1400" dirty="0">
+            <a:endParaRPr lang="en-US" sz="1200" dirty="0"/>
+          </a:p>
+        </p:txBody>
+      </p:sp>
+      <p:sp>
+        <p:nvSpPr>
+          <p:cNvPr id="10" name="Shape 6"/>
+          <p:cNvSpPr/>
+          <p:nvPr/>
+        </p:nvSpPr>
+        <p:spPr>
+          <a:xfrm>
+            <a:off x="5120640" y="2468880"/>
+            <a:ext cx="3474720" cy="640080"/>
+          </a:xfrm>
+          <a:prstGeom prst="roundRect">
+            <a:avLst>
+              <a:gd name="adj" fmla="val 14286"/>
+            </a:avLst>
+          </a:prstGeom>
+          <a:solidFill>
+            <a:srgbClr val="1A2332"/>
+          </a:solidFill>
+          <a:ln/>
+        </p:spPr>
+      </p:sp>
+      <p:pic>
+        <p:nvPicPr>
+          <p:cNvPr id="11" name="Image 2" descr="preencoded.png">    </p:cNvPr>
+          <p:cNvPicPr>
+            <a:picLocks noChangeAspect="1"/>
+          </p:cNvPicPr>
+          <p:nvPr/>
+        </p:nvPicPr>
+        <p:blipFill>
+          <a:blip r:embed="rId3"/>
+          <a:stretch>
+            <a:fillRect/>
+          </a:stretch>
+        </p:blipFill>
+        <p:spPr>
+          <a:xfrm>
+            <a:off x="5257800" y="2569464"/>
+            <a:ext cx="438912" cy="438912"/>
+          </a:xfrm>
+          <a:prstGeom prst="rect">
+            <a:avLst/>
+          </a:prstGeom>
+        </p:spPr>
+      </p:pic>
+      <p:sp>
+        <p:nvSpPr>
+          <p:cNvPr id="12" name="Text 7"/>
+          <p:cNvSpPr txBox="1"/>
+          <p:nvPr/>
+        </p:nvSpPr>
+        <p:spPr>
+          <a:xfrm>
+            <a:off x="5806440" y="2468880"/>
+            <a:ext cx="2651760" cy="640080"/>
+          </a:xfrm>
+          <a:prstGeom prst="rect">
+            <a:avLst/>
+          </a:prstGeom>
+          <a:noFill/>
+          <a:ln/>
+        </p:spPr>
+        <p:txBody>
+          <a:bodyPr wrap="square" lIns="0" tIns="0" rIns="0" bIns="0" rtlCol="0" anchor="ctr"/>
+          <a:lstStyle/>
+          <a:p>
+            <a:pPr indent="0" marL="0">
+              <a:buNone/>
+            </a:pPr>
+            <a:r>
+              <a:rPr lang="en-US" sz="1200" dirty="0">
                 <a:solidFill>
                   <a:srgbClr val="FFFFFF"/>
                 </a:solidFill>
@@ -7866,46 +10628,7 @@
               </a:rPr>
               <a:t>On a besoin d'une crypto prévisible. C'est là qu'interviennent les stablecoins.</a:t>
             </a:r>
-            <a:endParaRPr lang="en-US" sz="1400" dirty="0"/>
-          </a:p>
-        </p:txBody>
-      </p:sp>
-      <p:sp>
-        <p:nvSpPr>
-          <p:cNvPr id="4" name="Text 2"/>
-          <p:cNvSpPr txBox="1"/>
-          <p:nvPr/>
-        </p:nvSpPr>
-        <p:spPr>
-          <a:xfrm>
-            <a:off x="731520" y="4709160"/>
-            <a:ext cx="7680960" cy="274320"/>
-          </a:xfrm>
-          <a:prstGeom prst="rect">
-            <a:avLst/>
-          </a:prstGeom>
-          <a:noFill/>
-          <a:ln/>
-        </p:spPr>
-        <p:txBody>
-          <a:bodyPr wrap="square" lIns="0" tIns="0" rIns="0" bIns="0" rtlCol="0" anchor="ctr"/>
-          <a:lstStyle/>
-          <a:p>
-            <a:pPr algn="r" indent="0" marL="0">
-              <a:buNone/>
-            </a:pPr>
-            <a:r>
-              <a:rPr lang="en-US" sz="900" dirty="0">
-                <a:solidFill>
-                  <a:srgbClr val="64748B"/>
-                </a:solidFill>
-                <a:latin typeface="Calibri" pitchFamily="34" charset="0"/>
-                <a:ea typeface="Calibri" pitchFamily="34" charset="-122"/>
-                <a:cs typeface="Calibri" pitchFamily="34" charset="-120"/>
-              </a:rPr>
-              <a:t>Module 6 — Lecon 1</a:t>
-            </a:r>
-            <a:endParaRPr lang="en-US" sz="900" dirty="0"/>
+            <a:endParaRPr lang="en-US" sz="1200" dirty="0"/>
           </a:p>
         </p:txBody>
       </p:sp>
@@ -7949,8 +10672,8 @@
         </p:nvSpPr>
         <p:spPr>
           <a:xfrm>
-            <a:off x="731520" y="365760"/>
-            <a:ext cx="7680960" cy="548640"/>
+            <a:off x="731520" y="274320"/>
+            <a:ext cx="7680960" cy="502920"/>
           </a:xfrm>
           <a:prstGeom prst="rect">
             <a:avLst/>
@@ -7966,9 +10689,9 @@
               <a:buNone/>
             </a:pPr>
             <a:r>
-              <a:rPr lang="en-US" sz="2200" b="1" dirty="0">
-                <a:solidFill>
-                  <a:srgbClr val="00BFA6"/>
+              <a:rPr lang="en-US" sz="2000" b="1" dirty="0">
+                <a:solidFill>
+                  <a:srgbClr val="06B6D4"/>
                 </a:solidFill>
                 <a:latin typeface="Calibri" pitchFamily="34" charset="0"/>
                 <a:ea typeface="Calibri" pitchFamily="34" charset="-122"/>
@@ -7976,20 +10699,66 @@
               </a:rPr>
               <a:t>Le principe</a:t>
             </a:r>
-            <a:endParaRPr lang="en-US" sz="2200" dirty="0"/>
-          </a:p>
-        </p:txBody>
-      </p:sp>
-      <p:sp>
-        <p:nvSpPr>
-          <p:cNvPr id="3" name="Text 1"/>
-          <p:cNvSpPr txBox="1"/>
-          <p:nvPr/>
-        </p:nvSpPr>
-        <p:spPr>
-          <a:xfrm>
-            <a:off x="731520" y="1051560"/>
-            <a:ext cx="7680960" cy="3657600"/>
+            <a:endParaRPr lang="en-US" sz="2000" dirty="0"/>
+          </a:p>
+        </p:txBody>
+      </p:sp>
+      <p:sp>
+        <p:nvSpPr>
+          <p:cNvPr id="3" name="Shape 1"/>
+          <p:cNvSpPr/>
+          <p:nvPr/>
+        </p:nvSpPr>
+        <p:spPr>
+          <a:xfrm>
+            <a:off x="594360" y="1005840"/>
+            <a:ext cx="2468880" cy="1371600"/>
+          </a:xfrm>
+          <a:prstGeom prst="roundRect">
+            <a:avLst>
+              <a:gd name="adj" fmla="val 6667"/>
+            </a:avLst>
+          </a:prstGeom>
+          <a:solidFill>
+            <a:srgbClr val="1A2332"/>
+          </a:solidFill>
+          <a:ln/>
+        </p:spPr>
+      </p:sp>
+      <p:pic>
+        <p:nvPicPr>
+          <p:cNvPr id="4" name="Image 0" descr="preencoded.png">    </p:cNvPr>
+          <p:cNvPicPr>
+            <a:picLocks noChangeAspect="1"/>
+          </p:cNvPicPr>
+          <p:nvPr/>
+        </p:nvPicPr>
+        <p:blipFill>
+          <a:blip r:embed="rId1"/>
+          <a:stretch>
+            <a:fillRect/>
+          </a:stretch>
+        </p:blipFill>
+        <p:spPr>
+          <a:xfrm>
+            <a:off x="731520" y="1143000"/>
+            <a:ext cx="502920" cy="502920"/>
+          </a:xfrm>
+          <a:prstGeom prst="rect">
+            <a:avLst/>
+          </a:prstGeom>
+        </p:spPr>
+      </p:pic>
+      <p:sp>
+        <p:nvSpPr>
+          <p:cNvPr id="5" name="Text 2"/>
+          <p:cNvSpPr txBox="1"/>
+          <p:nvPr/>
+        </p:nvSpPr>
+        <p:spPr>
+          <a:xfrm>
+            <a:off x="731520" y="1719072"/>
+            <a:ext cx="2194560" cy="320040"/>
           </a:xfrm>
           <a:prstGeom prst="rect">
             <a:avLst/>
@@ -8001,15 +10770,11 @@
           <a:bodyPr wrap="square" lIns="0" tIns="0" rIns="0" bIns="0" rtlCol="0" anchor="t"/>
           <a:lstStyle/>
           <a:p>
-            <a:pPr marL="342900" indent="-342900">
-              <a:spcAft>
-                <a:spcPts val="800"/>
-              </a:spcAft>
-              <a:buSzPct val="100000"/>
-              <a:buChar char="•"/>
-            </a:pPr>
-            <a:r>
-              <a:rPr lang="en-US" sz="1400" dirty="0">
+            <a:pPr indent="0" marL="0">
+              <a:buNone/>
+            </a:pPr>
+            <a:r>
+              <a:rPr lang="en-US" sz="1100" b="1" dirty="0">
                 <a:solidFill>
                   <a:srgbClr val="FFFFFF"/>
                 </a:solidFill>
@@ -8017,20 +10782,123 @@
                 <a:ea typeface="Calibri" pitchFamily="34" charset="-122"/>
                 <a:cs typeface="Calibri" pitchFamily="34" charset="-120"/>
               </a:rPr>
-              <a:t>Une société (Tether pour l'USDT, Circle pour l'USDC) garde en réserve 1 dollar réel pour chaque token émis. Vous pouvez à tout moment échanger vos tokens contre des dollars aupr...</a:t>
-            </a:r>
-            <a:endParaRPr lang="en-US" sz="1400" dirty="0"/>
-          </a:p>
-          <a:p>
-            <a:pPr marL="342900" indent="-342900">
-              <a:spcAft>
-                <a:spcPts val="800"/>
-              </a:spcAft>
-              <a:buSzPct val="100000"/>
-              <a:buChar char="•"/>
-            </a:pPr>
-            <a:r>
-              <a:rPr lang="en-US" sz="1400" dirty="0">
+              <a:t>Une société (Tether pour l'USDT, Circle pour l'USDC) gard...</a:t>
+            </a:r>
+            <a:endParaRPr lang="en-US" sz="1100" dirty="0"/>
+          </a:p>
+        </p:txBody>
+      </p:sp>
+      <p:sp>
+        <p:nvSpPr>
+          <p:cNvPr id="6" name="Text 3"/>
+          <p:cNvSpPr txBox="1"/>
+          <p:nvPr/>
+        </p:nvSpPr>
+        <p:spPr>
+          <a:xfrm>
+            <a:off x="731520" y="2011680"/>
+            <a:ext cx="2194560" cy="274320"/>
+          </a:xfrm>
+          <a:prstGeom prst="rect">
+            <a:avLst/>
+          </a:prstGeom>
+          <a:noFill/>
+          <a:ln/>
+        </p:spPr>
+        <p:txBody>
+          <a:bodyPr wrap="square" lIns="0" tIns="0" rIns="0" bIns="0" rtlCol="0" anchor="t"/>
+          <a:lstStyle/>
+          <a:p>
+            <a:pPr indent="0" marL="0">
+              <a:buNone/>
+            </a:pPr>
+            <a:r>
+              <a:rPr lang="en-US" sz="900" dirty="0">
+                <a:solidFill>
+                  <a:srgbClr val="94A3B8"/>
+                </a:solidFill>
+                <a:latin typeface="Calibri" pitchFamily="34" charset="0"/>
+                <a:ea typeface="Calibri" pitchFamily="34" charset="-122"/>
+                <a:cs typeface="Calibri" pitchFamily="34" charset="-120"/>
+              </a:rPr>
+              <a:t>1 dollar réel pour chaque token émis.</a:t>
+            </a:r>
+            <a:endParaRPr lang="en-US" sz="900" dirty="0"/>
+          </a:p>
+        </p:txBody>
+      </p:sp>
+      <p:sp>
+        <p:nvSpPr>
+          <p:cNvPr id="7" name="Shape 4"/>
+          <p:cNvSpPr/>
+          <p:nvPr/>
+        </p:nvSpPr>
+        <p:spPr>
+          <a:xfrm>
+            <a:off x="3246120" y="1005840"/>
+            <a:ext cx="2468880" cy="1371600"/>
+          </a:xfrm>
+          <a:prstGeom prst="roundRect">
+            <a:avLst>
+              <a:gd name="adj" fmla="val 6667"/>
+            </a:avLst>
+          </a:prstGeom>
+          <a:solidFill>
+            <a:srgbClr val="1A2332"/>
+          </a:solidFill>
+          <a:ln/>
+        </p:spPr>
+      </p:sp>
+      <p:pic>
+        <p:nvPicPr>
+          <p:cNvPr id="8" name="Image 1" descr="preencoded.png">    </p:cNvPr>
+          <p:cNvPicPr>
+            <a:picLocks noChangeAspect="1"/>
+          </p:cNvPicPr>
+          <p:nvPr/>
+        </p:nvPicPr>
+        <p:blipFill>
+          <a:blip r:embed="rId2"/>
+          <a:stretch>
+            <a:fillRect/>
+          </a:stretch>
+        </p:blipFill>
+        <p:spPr>
+          <a:xfrm>
+            <a:off x="3383280" y="1143000"/>
+            <a:ext cx="502920" cy="502920"/>
+          </a:xfrm>
+          <a:prstGeom prst="rect">
+            <a:avLst/>
+          </a:prstGeom>
+        </p:spPr>
+      </p:pic>
+      <p:sp>
+        <p:nvSpPr>
+          <p:cNvPr id="9" name="Text 5"/>
+          <p:cNvSpPr txBox="1"/>
+          <p:nvPr/>
+        </p:nvSpPr>
+        <p:spPr>
+          <a:xfrm>
+            <a:off x="3383280" y="1719072"/>
+            <a:ext cx="2194560" cy="320040"/>
+          </a:xfrm>
+          <a:prstGeom prst="rect">
+            <a:avLst/>
+          </a:prstGeom>
+          <a:noFill/>
+          <a:ln/>
+        </p:spPr>
+        <p:txBody>
+          <a:bodyPr wrap="square" lIns="0" tIns="0" rIns="0" bIns="0" rtlCol="0" anchor="t"/>
+          <a:lstStyle/>
+          <a:p>
+            <a:pPr indent="0" marL="0">
+              <a:buNone/>
+            </a:pPr>
+            <a:r>
+              <a:rPr lang="en-US" sz="1100" b="1" dirty="0">
                 <a:solidFill>
                   <a:srgbClr val="FFFFFF"/>
                 </a:solidFill>
@@ -8038,22 +10906,22 @@
                 <a:ea typeface="Calibri" pitchFamily="34" charset="-122"/>
                 <a:cs typeface="Calibri" pitchFamily="34" charset="-120"/>
               </a:rPr>
-              <a:t>Évidemment, il faut faire confiance à l'émetteur : est-ce qu'il a vraiment les réserves qu'il prétend avoir ? Tether publie des rapports d'audit trimestriels. USDC (émis par Cir...</a:t>
-            </a:r>
-            <a:endParaRPr lang="en-US" sz="1400" dirty="0"/>
-          </a:p>
-        </p:txBody>
-      </p:sp>
-      <p:sp>
-        <p:nvSpPr>
-          <p:cNvPr id="4" name="Text 2"/>
-          <p:cNvSpPr txBox="1"/>
-          <p:nvPr/>
-        </p:nvSpPr>
-        <p:spPr>
-          <a:xfrm>
-            <a:off x="731520" y="4709160"/>
-            <a:ext cx="7680960" cy="274320"/>
+              <a:t>Vous pouvez à tout moment échanger vos tokens contre des ...</a:t>
+            </a:r>
+            <a:endParaRPr lang="en-US" sz="1100" dirty="0"/>
+          </a:p>
+        </p:txBody>
+      </p:sp>
+      <p:sp>
+        <p:nvSpPr>
+          <p:cNvPr id="10" name="Text 6"/>
+          <p:cNvSpPr txBox="1"/>
+          <p:nvPr/>
+        </p:nvSpPr>
+        <p:spPr>
+          <a:xfrm>
+            <a:off x="3383280" y="2011680"/>
+            <a:ext cx="2194560" cy="274320"/>
           </a:xfrm>
           <a:prstGeom prst="rect">
             <a:avLst/>
@@ -8062,22 +10930,440 @@
           <a:ln/>
         </p:spPr>
         <p:txBody>
-          <a:bodyPr wrap="square" lIns="0" tIns="0" rIns="0" bIns="0" rtlCol="0" anchor="ctr"/>
-          <a:lstStyle/>
-          <a:p>
-            <a:pPr algn="r" indent="0" marL="0">
+          <a:bodyPr wrap="square" lIns="0" tIns="0" rIns="0" bIns="0" rtlCol="0" anchor="t"/>
+          <a:lstStyle/>
+          <a:p>
+            <a:pPr indent="0" marL="0">
               <a:buNone/>
             </a:pPr>
             <a:r>
               <a:rPr lang="en-US" sz="900" dirty="0">
                 <a:solidFill>
-                  <a:srgbClr val="64748B"/>
-                </a:solidFill>
-                <a:latin typeface="Calibri" pitchFamily="34" charset="0"/>
-                <a:ea typeface="Calibri" pitchFamily="34" charset="-122"/>
-                <a:cs typeface="Calibri" pitchFamily="34" charset="-120"/>
-              </a:rPr>
-              <a:t>Module 6 — Lecon 1</a:t>
+                  <a:srgbClr val="94A3B8"/>
+                </a:solidFill>
+                <a:latin typeface="Calibri" pitchFamily="34" charset="0"/>
+                <a:ea typeface="Calibri" pitchFamily="34" charset="-122"/>
+                <a:cs typeface="Calibri" pitchFamily="34" charset="-120"/>
+              </a:rPr>
+              <a:t>s de l'émetteur (avec de gros minimums).</a:t>
+            </a:r>
+            <a:endParaRPr lang="en-US" sz="900" dirty="0"/>
+          </a:p>
+        </p:txBody>
+      </p:sp>
+      <p:sp>
+        <p:nvSpPr>
+          <p:cNvPr id="11" name="Shape 7"/>
+          <p:cNvSpPr/>
+          <p:nvPr/>
+        </p:nvSpPr>
+        <p:spPr>
+          <a:xfrm>
+            <a:off x="5897880" y="1005840"/>
+            <a:ext cx="2468880" cy="1371600"/>
+          </a:xfrm>
+          <a:prstGeom prst="roundRect">
+            <a:avLst>
+              <a:gd name="adj" fmla="val 6667"/>
+            </a:avLst>
+          </a:prstGeom>
+          <a:solidFill>
+            <a:srgbClr val="1A2332"/>
+          </a:solidFill>
+          <a:ln/>
+        </p:spPr>
+      </p:sp>
+      <p:pic>
+        <p:nvPicPr>
+          <p:cNvPr id="12" name="Image 2" descr="preencoded.png">    </p:cNvPr>
+          <p:cNvPicPr>
+            <a:picLocks noChangeAspect="1"/>
+          </p:cNvPicPr>
+          <p:nvPr/>
+        </p:nvPicPr>
+        <p:blipFill>
+          <a:blip r:embed="rId3"/>
+          <a:stretch>
+            <a:fillRect/>
+          </a:stretch>
+        </p:blipFill>
+        <p:spPr>
+          <a:xfrm>
+            <a:off x="6035040" y="1143000"/>
+            <a:ext cx="502920" cy="502920"/>
+          </a:xfrm>
+          <a:prstGeom prst="rect">
+            <a:avLst/>
+          </a:prstGeom>
+        </p:spPr>
+      </p:pic>
+      <p:sp>
+        <p:nvSpPr>
+          <p:cNvPr id="13" name="Text 8"/>
+          <p:cNvSpPr txBox="1"/>
+          <p:nvPr/>
+        </p:nvSpPr>
+        <p:spPr>
+          <a:xfrm>
+            <a:off x="6035040" y="1719072"/>
+            <a:ext cx="2194560" cy="320040"/>
+          </a:xfrm>
+          <a:prstGeom prst="rect">
+            <a:avLst/>
+          </a:prstGeom>
+          <a:noFill/>
+          <a:ln/>
+        </p:spPr>
+        <p:txBody>
+          <a:bodyPr wrap="square" lIns="0" tIns="0" rIns="0" bIns="0" rtlCol="0" anchor="t"/>
+          <a:lstStyle/>
+          <a:p>
+            <a:pPr indent="0" marL="0">
+              <a:buNone/>
+            </a:pPr>
+            <a:r>
+              <a:rPr lang="en-US" sz="1100" b="1" dirty="0">
+                <a:solidFill>
+                  <a:srgbClr val="FFFFFF"/>
+                </a:solidFill>
+                <a:latin typeface="Calibri" pitchFamily="34" charset="0"/>
+                <a:ea typeface="Calibri" pitchFamily="34" charset="-122"/>
+                <a:cs typeface="Calibri" pitchFamily="34" charset="-120"/>
+              </a:rPr>
+              <a:t>Cette promesse d'échange garantit que le prix reste très ...</a:t>
+            </a:r>
+            <a:endParaRPr lang="en-US" sz="1100" dirty="0"/>
+          </a:p>
+        </p:txBody>
+      </p:sp>
+      <p:sp>
+        <p:nvSpPr>
+          <p:cNvPr id="14" name="Shape 9"/>
+          <p:cNvSpPr/>
+          <p:nvPr/>
+        </p:nvSpPr>
+        <p:spPr>
+          <a:xfrm>
+            <a:off x="594360" y="2514600"/>
+            <a:ext cx="2468880" cy="1371600"/>
+          </a:xfrm>
+          <a:prstGeom prst="roundRect">
+            <a:avLst>
+              <a:gd name="adj" fmla="val 6667"/>
+            </a:avLst>
+          </a:prstGeom>
+          <a:solidFill>
+            <a:srgbClr val="1A2332"/>
+          </a:solidFill>
+          <a:ln/>
+        </p:spPr>
+      </p:sp>
+      <p:pic>
+        <p:nvPicPr>
+          <p:cNvPr id="15" name="Image 3" descr="preencoded.png">    </p:cNvPr>
+          <p:cNvPicPr>
+            <a:picLocks noChangeAspect="1"/>
+          </p:cNvPicPr>
+          <p:nvPr/>
+        </p:nvPicPr>
+        <p:blipFill>
+          <a:blip r:embed="rId4"/>
+          <a:stretch>
+            <a:fillRect/>
+          </a:stretch>
+        </p:blipFill>
+        <p:spPr>
+          <a:xfrm>
+            <a:off x="731520" y="2651760"/>
+            <a:ext cx="502920" cy="502920"/>
+          </a:xfrm>
+          <a:prstGeom prst="rect">
+            <a:avLst/>
+          </a:prstGeom>
+        </p:spPr>
+      </p:pic>
+      <p:sp>
+        <p:nvSpPr>
+          <p:cNvPr id="16" name="Text 10"/>
+          <p:cNvSpPr txBox="1"/>
+          <p:nvPr/>
+        </p:nvSpPr>
+        <p:spPr>
+          <a:xfrm>
+            <a:off x="731520" y="3227832"/>
+            <a:ext cx="2194560" cy="320040"/>
+          </a:xfrm>
+          <a:prstGeom prst="rect">
+            <a:avLst/>
+          </a:prstGeom>
+          <a:noFill/>
+          <a:ln/>
+        </p:spPr>
+        <p:txBody>
+          <a:bodyPr wrap="square" lIns="0" tIns="0" rIns="0" bIns="0" rtlCol="0" anchor="t"/>
+          <a:lstStyle/>
+          <a:p>
+            <a:pPr indent="0" marL="0">
+              <a:buNone/>
+            </a:pPr>
+            <a:r>
+              <a:rPr lang="en-US" sz="1100" b="1" dirty="0">
+                <a:solidFill>
+                  <a:srgbClr val="FFFFFF"/>
+                </a:solidFill>
+                <a:latin typeface="Calibri" pitchFamily="34" charset="0"/>
+                <a:ea typeface="Calibri" pitchFamily="34" charset="-122"/>
+                <a:cs typeface="Calibri" pitchFamily="34" charset="-120"/>
+              </a:rPr>
+              <a:t>Évidemment, il faut faire confiance à l'émetteur : est-ce...</a:t>
+            </a:r>
+            <a:endParaRPr lang="en-US" sz="1100" dirty="0"/>
+          </a:p>
+        </p:txBody>
+      </p:sp>
+      <p:sp>
+        <p:nvSpPr>
+          <p:cNvPr id="17" name="Text 11"/>
+          <p:cNvSpPr txBox="1"/>
+          <p:nvPr/>
+        </p:nvSpPr>
+        <p:spPr>
+          <a:xfrm>
+            <a:off x="731520" y="3520440"/>
+            <a:ext cx="2194560" cy="274320"/>
+          </a:xfrm>
+          <a:prstGeom prst="rect">
+            <a:avLst/>
+          </a:prstGeom>
+          <a:noFill/>
+          <a:ln/>
+        </p:spPr>
+        <p:txBody>
+          <a:bodyPr wrap="square" lIns="0" tIns="0" rIns="0" bIns="0" rtlCol="0" anchor="t"/>
+          <a:lstStyle/>
+          <a:p>
+            <a:pPr indent="0" marL="0">
+              <a:buNone/>
+            </a:pPr>
+            <a:r>
+              <a:rPr lang="en-US" sz="900" dirty="0">
+                <a:solidFill>
+                  <a:srgbClr val="94A3B8"/>
+                </a:solidFill>
+                <a:latin typeface="Calibri" pitchFamily="34" charset="0"/>
+                <a:ea typeface="Calibri" pitchFamily="34" charset="-122"/>
+                <a:cs typeface="Calibri" pitchFamily="34" charset="-120"/>
+              </a:rPr>
+              <a:t>ment les réserves qu'il prétend avoir ?</a:t>
+            </a:r>
+            <a:endParaRPr lang="en-US" sz="900" dirty="0"/>
+          </a:p>
+        </p:txBody>
+      </p:sp>
+      <p:sp>
+        <p:nvSpPr>
+          <p:cNvPr id="18" name="Shape 12"/>
+          <p:cNvSpPr/>
+          <p:nvPr/>
+        </p:nvSpPr>
+        <p:spPr>
+          <a:xfrm>
+            <a:off x="3246120" y="2514600"/>
+            <a:ext cx="2468880" cy="1371600"/>
+          </a:xfrm>
+          <a:prstGeom prst="roundRect">
+            <a:avLst>
+              <a:gd name="adj" fmla="val 6667"/>
+            </a:avLst>
+          </a:prstGeom>
+          <a:solidFill>
+            <a:srgbClr val="1A2332"/>
+          </a:solidFill>
+          <a:ln/>
+        </p:spPr>
+      </p:sp>
+      <p:pic>
+        <p:nvPicPr>
+          <p:cNvPr id="19" name="Image 4" descr="preencoded.png">    </p:cNvPr>
+          <p:cNvPicPr>
+            <a:picLocks noChangeAspect="1"/>
+          </p:cNvPicPr>
+          <p:nvPr/>
+        </p:nvPicPr>
+        <p:blipFill>
+          <a:blip r:embed="rId5"/>
+          <a:stretch>
+            <a:fillRect/>
+          </a:stretch>
+        </p:blipFill>
+        <p:spPr>
+          <a:xfrm>
+            <a:off x="3383280" y="2651760"/>
+            <a:ext cx="502920" cy="502920"/>
+          </a:xfrm>
+          <a:prstGeom prst="rect">
+            <a:avLst/>
+          </a:prstGeom>
+        </p:spPr>
+      </p:pic>
+      <p:sp>
+        <p:nvSpPr>
+          <p:cNvPr id="20" name="Text 13"/>
+          <p:cNvSpPr txBox="1"/>
+          <p:nvPr/>
+        </p:nvSpPr>
+        <p:spPr>
+          <a:xfrm>
+            <a:off x="3383280" y="3227832"/>
+            <a:ext cx="2194560" cy="320040"/>
+          </a:xfrm>
+          <a:prstGeom prst="rect">
+            <a:avLst/>
+          </a:prstGeom>
+          <a:noFill/>
+          <a:ln/>
+        </p:spPr>
+        <p:txBody>
+          <a:bodyPr wrap="square" lIns="0" tIns="0" rIns="0" bIns="0" rtlCol="0" anchor="t"/>
+          <a:lstStyle/>
+          <a:p>
+            <a:pPr indent="0" marL="0">
+              <a:buNone/>
+            </a:pPr>
+            <a:r>
+              <a:rPr lang="en-US" sz="1100" b="1" dirty="0">
+                <a:solidFill>
+                  <a:srgbClr val="FFFFFF"/>
+                </a:solidFill>
+                <a:latin typeface="Calibri" pitchFamily="34" charset="0"/>
+                <a:ea typeface="Calibri" pitchFamily="34" charset="-122"/>
+                <a:cs typeface="Calibri" pitchFamily="34" charset="-120"/>
+              </a:rPr>
+              <a:t>Tether publie des rapports d'audit trimestriels.</a:t>
+            </a:r>
+            <a:endParaRPr lang="en-US" sz="1100" dirty="0"/>
+          </a:p>
+        </p:txBody>
+      </p:sp>
+      <p:sp>
+        <p:nvSpPr>
+          <p:cNvPr id="21" name="Shape 14"/>
+          <p:cNvSpPr/>
+          <p:nvPr/>
+        </p:nvSpPr>
+        <p:spPr>
+          <a:xfrm>
+            <a:off x="5897880" y="2514600"/>
+            <a:ext cx="2468880" cy="1371600"/>
+          </a:xfrm>
+          <a:prstGeom prst="roundRect">
+            <a:avLst>
+              <a:gd name="adj" fmla="val 6667"/>
+            </a:avLst>
+          </a:prstGeom>
+          <a:solidFill>
+            <a:srgbClr val="1A2332"/>
+          </a:solidFill>
+          <a:ln/>
+        </p:spPr>
+      </p:sp>
+      <p:pic>
+        <p:nvPicPr>
+          <p:cNvPr id="22" name="Image 5" descr="preencoded.png">    </p:cNvPr>
+          <p:cNvPicPr>
+            <a:picLocks noChangeAspect="1"/>
+          </p:cNvPicPr>
+          <p:nvPr/>
+        </p:nvPicPr>
+        <p:blipFill>
+          <a:blip r:embed="rId6"/>
+          <a:stretch>
+            <a:fillRect/>
+          </a:stretch>
+        </p:blipFill>
+        <p:spPr>
+          <a:xfrm>
+            <a:off x="6035040" y="2651760"/>
+            <a:ext cx="502920" cy="502920"/>
+          </a:xfrm>
+          <a:prstGeom prst="rect">
+            <a:avLst/>
+          </a:prstGeom>
+        </p:spPr>
+      </p:pic>
+      <p:sp>
+        <p:nvSpPr>
+          <p:cNvPr id="23" name="Text 15"/>
+          <p:cNvSpPr txBox="1"/>
+          <p:nvPr/>
+        </p:nvSpPr>
+        <p:spPr>
+          <a:xfrm>
+            <a:off x="6035040" y="3227832"/>
+            <a:ext cx="2194560" cy="320040"/>
+          </a:xfrm>
+          <a:prstGeom prst="rect">
+            <a:avLst/>
+          </a:prstGeom>
+          <a:noFill/>
+          <a:ln/>
+        </p:spPr>
+        <p:txBody>
+          <a:bodyPr wrap="square" lIns="0" tIns="0" rIns="0" bIns="0" rtlCol="0" anchor="t"/>
+          <a:lstStyle/>
+          <a:p>
+            <a:pPr indent="0" marL="0">
+              <a:buNone/>
+            </a:pPr>
+            <a:r>
+              <a:rPr lang="en-US" sz="1100" b="1" dirty="0">
+                <a:solidFill>
+                  <a:srgbClr val="FFFFFF"/>
+                </a:solidFill>
+                <a:latin typeface="Calibri" pitchFamily="34" charset="0"/>
+                <a:ea typeface="Calibri" pitchFamily="34" charset="-122"/>
+                <a:cs typeface="Calibri" pitchFamily="34" charset="-120"/>
+              </a:rPr>
+              <a:t>USDC (émis par Circle, entreprise américaine régulée) est...</a:t>
+            </a:r>
+            <a:endParaRPr lang="en-US" sz="1100" dirty="0"/>
+          </a:p>
+        </p:txBody>
+      </p:sp>
+      <p:sp>
+        <p:nvSpPr>
+          <p:cNvPr id="24" name="Text 16"/>
+          <p:cNvSpPr txBox="1"/>
+          <p:nvPr/>
+        </p:nvSpPr>
+        <p:spPr>
+          <a:xfrm>
+            <a:off x="6035040" y="3520440"/>
+            <a:ext cx="2194560" cy="274320"/>
+          </a:xfrm>
+          <a:prstGeom prst="rect">
+            <a:avLst/>
+          </a:prstGeom>
+          <a:noFill/>
+          <a:ln/>
+        </p:spPr>
+        <p:txBody>
+          <a:bodyPr wrap="square" lIns="0" tIns="0" rIns="0" bIns="0" rtlCol="0" anchor="t"/>
+          <a:lstStyle/>
+          <a:p>
+            <a:pPr indent="0" marL="0">
+              <a:buNone/>
+            </a:pPr>
+            <a:r>
+              <a:rPr lang="en-US" sz="900" dirty="0">
+                <a:solidFill>
+                  <a:srgbClr val="94A3B8"/>
+                </a:solidFill>
+                <a:latin typeface="Calibri" pitchFamily="34" charset="0"/>
+                <a:ea typeface="Calibri" pitchFamily="34" charset="-122"/>
+                <a:cs typeface="Calibri" pitchFamily="34" charset="-120"/>
+              </a:rPr>
+              <a:t>mme encore plus transparent.</a:t>
             </a:r>
             <a:endParaRPr lang="en-US" sz="900" dirty="0"/>
           </a:p>
@@ -8117,14 +11403,60 @@
       </p:grpSpPr>
       <p:sp>
         <p:nvSpPr>
-          <p:cNvPr id="2" name="Text 0"/>
-          <p:cNvSpPr txBox="1"/>
-          <p:nvPr/>
-        </p:nvSpPr>
-        <p:spPr>
-          <a:xfrm>
-            <a:off x="731520" y="365760"/>
-            <a:ext cx="7680960" cy="548640"/>
+          <p:cNvPr id="2" name="Shape 0"/>
+          <p:cNvSpPr/>
+          <p:nvPr/>
+        </p:nvSpPr>
+        <p:spPr>
+          <a:xfrm>
+            <a:off x="7955280" y="182880"/>
+            <a:ext cx="640080" cy="640080"/>
+          </a:xfrm>
+          <a:prstGeom prst="ellipse">
+            <a:avLst/>
+          </a:prstGeom>
+          <a:solidFill>
+            <a:srgbClr val="06B6D4">
+              <a:alpha val="12000"/>
+            </a:srgbClr>
+          </a:solidFill>
+          <a:ln/>
+        </p:spPr>
+      </p:sp>
+      <p:pic>
+        <p:nvPicPr>
+          <p:cNvPr id="3" name="Image 0" descr="preencoded.png">    </p:cNvPr>
+          <p:cNvPicPr>
+            <a:picLocks noChangeAspect="1"/>
+          </p:cNvPicPr>
+          <p:nvPr/>
+        </p:nvPicPr>
+        <p:blipFill>
+          <a:blip r:embed="rId1"/>
+          <a:stretch>
+            <a:fillRect/>
+          </a:stretch>
+        </p:blipFill>
+        <p:spPr>
+          <a:xfrm>
+            <a:off x="8028432" y="256032"/>
+            <a:ext cx="493776" cy="493776"/>
+          </a:xfrm>
+          <a:prstGeom prst="rect">
+            <a:avLst/>
+          </a:prstGeom>
+        </p:spPr>
+      </p:pic>
+      <p:sp>
+        <p:nvSpPr>
+          <p:cNvPr id="4" name="Text 1"/>
+          <p:cNvSpPr txBox="1"/>
+          <p:nvPr/>
+        </p:nvSpPr>
+        <p:spPr>
+          <a:xfrm>
+            <a:off x="731520" y="274320"/>
+            <a:ext cx="7132320" cy="502920"/>
           </a:xfrm>
           <a:prstGeom prst="rect">
             <a:avLst/>
@@ -8140,9 +11472,9 @@
               <a:buNone/>
             </a:pPr>
             <a:r>
-              <a:rPr lang="en-US" sz="2200" b="1" dirty="0">
-                <a:solidFill>
-                  <a:srgbClr val="00BFA6"/>
+              <a:rPr lang="en-US" sz="2000" b="1" dirty="0">
+                <a:solidFill>
+                  <a:srgbClr val="06B6D4"/>
                 </a:solidFill>
                 <a:latin typeface="Calibri" pitchFamily="34" charset="0"/>
                 <a:ea typeface="Calibri" pitchFamily="34" charset="-122"/>
@@ -8150,19 +11482,19 @@
               </a:rPr>
               <a:t>Les grandes catégories</a:t>
             </a:r>
-            <a:endParaRPr lang="en-US" sz="2200" dirty="0"/>
-          </a:p>
-        </p:txBody>
-      </p:sp>
-      <p:sp>
-        <p:nvSpPr>
-          <p:cNvPr id="3" name="Text 1"/>
-          <p:cNvSpPr txBox="1"/>
-          <p:nvPr/>
-        </p:nvSpPr>
-        <p:spPr>
-          <a:xfrm>
-            <a:off x="731520" y="1051560"/>
+            <a:endParaRPr lang="en-US" sz="2000" dirty="0"/>
+          </a:p>
+        </p:txBody>
+      </p:sp>
+      <p:sp>
+        <p:nvSpPr>
+          <p:cNvPr id="5" name="Text 2"/>
+          <p:cNvSpPr txBox="1"/>
+          <p:nvPr/>
+        </p:nvSpPr>
+        <p:spPr>
+          <a:xfrm>
+            <a:off x="731520" y="960120"/>
             <a:ext cx="7680960" cy="3657600"/>
           </a:xfrm>
           <a:prstGeom prst="rect">
@@ -8262,7 +11594,7 @@
       </p:sp>
       <p:sp>
         <p:nvSpPr>
-          <p:cNvPr id="4" name="Text 2"/>
+          <p:cNvPr id="6" name="Text 3"/>
           <p:cNvSpPr txBox="1"/>
           <p:nvPr/>
         </p:nvSpPr>
@@ -8293,7 +11625,7 @@
                 <a:ea typeface="Calibri" pitchFamily="34" charset="-122"/>
                 <a:cs typeface="Calibri" pitchFamily="34" charset="-120"/>
               </a:rPr>
-              <a:t>Module 6 — Lecon 1</a:t>
+              <a:t>Module 6 — Leçon 1</a:t>
             </a:r>
             <a:endParaRPr lang="en-US" sz="900" dirty="0"/>
           </a:p>
@@ -8331,16 +11663,40 @@
           <a:chExt cx="0" cy="0"/>
         </a:xfrm>
       </p:grpSpPr>
-      <p:sp>
-        <p:nvSpPr>
-          <p:cNvPr id="2" name="Text 0"/>
-          <p:cNvSpPr txBox="1"/>
-          <p:nvPr/>
-        </p:nvSpPr>
-        <p:spPr>
-          <a:xfrm>
-            <a:off x="731520" y="457200"/>
-            <a:ext cx="2743200" cy="365760"/>
+      <p:pic>
+        <p:nvPicPr>
+          <p:cNvPr id="2" name="Image 0" descr="preencoded.png">    </p:cNvPr>
+          <p:cNvPicPr>
+            <a:picLocks noChangeAspect="1"/>
+          </p:cNvPicPr>
+          <p:nvPr/>
+        </p:nvPicPr>
+        <p:blipFill>
+          <a:blip r:embed="rId1"/>
+          <a:stretch>
+            <a:fillRect/>
+          </a:stretch>
+        </p:blipFill>
+        <p:spPr>
+          <a:xfrm>
+            <a:off x="731520" y="320040"/>
+            <a:ext cx="457200" cy="457200"/>
+          </a:xfrm>
+          <a:prstGeom prst="rect">
+            <a:avLst/>
+          </a:prstGeom>
+        </p:spPr>
+      </p:pic>
+      <p:sp>
+        <p:nvSpPr>
+          <p:cNvPr id="3" name="Text 0"/>
+          <p:cNvSpPr txBox="1"/>
+          <p:nvPr/>
+        </p:nvSpPr>
+        <p:spPr>
+          <a:xfrm>
+            <a:off x="1280160" y="365760"/>
+            <a:ext cx="2743200" cy="320040"/>
           </a:xfrm>
           <a:prstGeom prst="rect">
             <a:avLst/>
@@ -8372,14 +11728,14 @@
       </p:sp>
       <p:sp>
         <p:nvSpPr>
-          <p:cNvPr id="3" name="Text 1"/>
-          <p:cNvSpPr txBox="1"/>
-          <p:nvPr/>
-        </p:nvSpPr>
-        <p:spPr>
-          <a:xfrm>
-            <a:off x="731520" y="868680"/>
-            <a:ext cx="7680960" cy="502920"/>
+          <p:cNvPr id="4" name="Text 1"/>
+          <p:cNvSpPr txBox="1"/>
+          <p:nvPr/>
+        </p:nvSpPr>
+        <p:spPr>
+          <a:xfrm>
+            <a:off x="731520" y="822960"/>
+            <a:ext cx="7680960" cy="457200"/>
           </a:xfrm>
           <a:prstGeom prst="rect">
             <a:avLst/>
@@ -8395,7 +11751,7 @@
               <a:buNone/>
             </a:pPr>
             <a:r>
-              <a:rPr lang="en-US" sz="2200" b="1" dirty="0">
+              <a:rPr lang="en-US" sz="2000" b="1" dirty="0">
                 <a:solidFill>
                   <a:srgbClr val="FFFFFF"/>
                 </a:solidFill>
@@ -8405,28 +11761,50 @@
               </a:rPr>
               <a:t>Qu'est-ce qu'un stablecoin ?</a:t>
             </a:r>
-            <a:endParaRPr lang="en-US" sz="2200" dirty="0"/>
-          </a:p>
-        </p:txBody>
-      </p:sp>
-      <p:sp>
-        <p:nvSpPr>
-          <p:cNvPr id="4" name="Text 2"/>
-          <p:cNvSpPr txBox="1"/>
-          <p:nvPr/>
-        </p:nvSpPr>
-        <p:spPr>
-          <a:xfrm>
-            <a:off x="731520" y="1554480"/>
-            <a:ext cx="457200" cy="548640"/>
+            <a:endParaRPr lang="en-US" sz="2000" dirty="0"/>
+          </a:p>
+        </p:txBody>
+      </p:sp>
+      <p:sp>
+        <p:nvSpPr>
+          <p:cNvPr id="5" name="Shape 2"/>
+          <p:cNvSpPr/>
+          <p:nvPr/>
+        </p:nvSpPr>
+        <p:spPr>
+          <a:xfrm>
+            <a:off x="731520" y="1463040"/>
+            <a:ext cx="7680960" cy="548640"/>
           </a:xfrm>
           <a:prstGeom prst="roundRect">
             <a:avLst>
-              <a:gd name="adj" fmla="val 50000"/>
+              <a:gd name="adj" fmla="val 13333"/>
             </a:avLst>
           </a:prstGeom>
           <a:solidFill>
-            <a:srgbClr val="00BFA6"/>
+            <a:srgbClr val="0F1419"/>
+          </a:solidFill>
+          <a:ln/>
+        </p:spPr>
+      </p:sp>
+      <p:sp>
+        <p:nvSpPr>
+          <p:cNvPr id="6" name="Text 3"/>
+          <p:cNvSpPr txBox="1"/>
+          <p:nvPr/>
+        </p:nvSpPr>
+        <p:spPr>
+          <a:xfrm>
+            <a:off x="914400" y="1463040"/>
+            <a:ext cx="411480" cy="548640"/>
+          </a:xfrm>
+          <a:prstGeom prst="roundRect">
+            <a:avLst>
+              <a:gd name="adj" fmla="val 48889"/>
+            </a:avLst>
+          </a:prstGeom>
+          <a:solidFill>
+            <a:srgbClr val="06B6D4"/>
           </a:solidFill>
           <a:ln/>
         </p:spPr>
@@ -8438,7 +11816,7 @@
               <a:buNone/>
             </a:pPr>
             <a:r>
-              <a:rPr lang="en-US" sz="1600" b="1" dirty="0">
+              <a:rPr lang="en-US" sz="1500" b="1" dirty="0">
                 <a:solidFill>
                   <a:srgbClr val="0F1419"/>
                 </a:solidFill>
@@ -8448,20 +11826,20 @@
               </a:rPr>
               <a:t>1</a:t>
             </a:r>
-            <a:endParaRPr lang="en-US" sz="1600" dirty="0"/>
-          </a:p>
-        </p:txBody>
-      </p:sp>
-      <p:sp>
-        <p:nvSpPr>
-          <p:cNvPr id="5" name="Text 3"/>
-          <p:cNvSpPr txBox="1"/>
-          <p:nvPr/>
-        </p:nvSpPr>
-        <p:spPr>
-          <a:xfrm>
-            <a:off x="1371600" y="1554480"/>
-            <a:ext cx="7040880" cy="548640"/>
+            <a:endParaRPr lang="en-US" sz="1500" dirty="0"/>
+          </a:p>
+        </p:txBody>
+      </p:sp>
+      <p:sp>
+        <p:nvSpPr>
+          <p:cNvPr id="7" name="Text 4"/>
+          <p:cNvSpPr txBox="1"/>
+          <p:nvPr/>
+        </p:nvSpPr>
+        <p:spPr>
+          <a:xfrm>
+            <a:off x="1508760" y="1463040"/>
+            <a:ext cx="6766560" cy="548640"/>
           </a:xfrm>
           <a:prstGeom prst="rect">
             <a:avLst/>
@@ -8477,7 +11855,7 @@
               <a:buNone/>
             </a:pPr>
             <a:r>
-              <a:rPr lang="en-US" sz="1400" dirty="0">
+              <a:rPr lang="en-US" sz="1300" dirty="0">
                 <a:solidFill>
                   <a:srgbClr val="FFFFFF"/>
                 </a:solidFill>
@@ -8487,28 +11865,50 @@
               </a:rPr>
               <a:t>Payer votre loyer en crypto.</a:t>
             </a:r>
-            <a:endParaRPr lang="en-US" sz="1400" dirty="0"/>
-          </a:p>
-        </p:txBody>
-      </p:sp>
-      <p:sp>
-        <p:nvSpPr>
-          <p:cNvPr id="6" name="Text 4"/>
-          <p:cNvSpPr txBox="1"/>
-          <p:nvPr/>
-        </p:nvSpPr>
-        <p:spPr>
-          <a:xfrm>
-            <a:off x="731520" y="2212848"/>
-            <a:ext cx="457200" cy="548640"/>
+            <a:endParaRPr lang="en-US" sz="1300" dirty="0"/>
+          </a:p>
+        </p:txBody>
+      </p:sp>
+      <p:sp>
+        <p:nvSpPr>
+          <p:cNvPr id="8" name="Shape 5"/>
+          <p:cNvSpPr/>
+          <p:nvPr/>
+        </p:nvSpPr>
+        <p:spPr>
+          <a:xfrm>
+            <a:off x="731520" y="2103120"/>
+            <a:ext cx="7680960" cy="548640"/>
           </a:xfrm>
           <a:prstGeom prst="roundRect">
             <a:avLst>
-              <a:gd name="adj" fmla="val 50000"/>
+              <a:gd name="adj" fmla="val 13333"/>
             </a:avLst>
           </a:prstGeom>
           <a:solidFill>
-            <a:srgbClr val="00BFA6"/>
+            <a:srgbClr val="0F1419"/>
+          </a:solidFill>
+          <a:ln/>
+        </p:spPr>
+      </p:sp>
+      <p:sp>
+        <p:nvSpPr>
+          <p:cNvPr id="9" name="Text 6"/>
+          <p:cNvSpPr txBox="1"/>
+          <p:nvPr/>
+        </p:nvSpPr>
+        <p:spPr>
+          <a:xfrm>
+            <a:off x="914400" y="2103120"/>
+            <a:ext cx="411480" cy="548640"/>
+          </a:xfrm>
+          <a:prstGeom prst="roundRect">
+            <a:avLst>
+              <a:gd name="adj" fmla="val 48889"/>
+            </a:avLst>
+          </a:prstGeom>
+          <a:solidFill>
+            <a:srgbClr val="06B6D4"/>
           </a:solidFill>
           <a:ln/>
         </p:spPr>
@@ -8520,7 +11920,7 @@
               <a:buNone/>
             </a:pPr>
             <a:r>
-              <a:rPr lang="en-US" sz="1600" b="1" dirty="0">
+              <a:rPr lang="en-US" sz="1500" b="1" dirty="0">
                 <a:solidFill>
                   <a:srgbClr val="0F1419"/>
                 </a:solidFill>
@@ -8530,20 +11930,20 @@
               </a:rPr>
               <a:t>2</a:t>
             </a:r>
-            <a:endParaRPr lang="en-US" sz="1600" dirty="0"/>
-          </a:p>
-        </p:txBody>
-      </p:sp>
-      <p:sp>
-        <p:nvSpPr>
-          <p:cNvPr id="7" name="Text 5"/>
-          <p:cNvSpPr txBox="1"/>
-          <p:nvPr/>
-        </p:nvSpPr>
-        <p:spPr>
-          <a:xfrm>
-            <a:off x="1371600" y="2212848"/>
-            <a:ext cx="7040880" cy="548640"/>
+            <a:endParaRPr lang="en-US" sz="1500" dirty="0"/>
+          </a:p>
+        </p:txBody>
+      </p:sp>
+      <p:sp>
+        <p:nvSpPr>
+          <p:cNvPr id="10" name="Text 7"/>
+          <p:cNvSpPr txBox="1"/>
+          <p:nvPr/>
+        </p:nvSpPr>
+        <p:spPr>
+          <a:xfrm>
+            <a:off x="1508760" y="2103120"/>
+            <a:ext cx="6766560" cy="548640"/>
           </a:xfrm>
           <a:prstGeom prst="rect">
             <a:avLst/>
@@ -8559,7 +11959,7 @@
               <a:buNone/>
             </a:pPr>
             <a:r>
-              <a:rPr lang="en-US" sz="1400" dirty="0">
+              <a:rPr lang="en-US" sz="1300" dirty="0">
                 <a:solidFill>
                   <a:srgbClr val="FFFFFF"/>
                 </a:solidFill>
@@ -8569,28 +11969,50 @@
               </a:rPr>
               <a:t>Recevoir votre salaire en crypto.</a:t>
             </a:r>
-            <a:endParaRPr lang="en-US" sz="1400" dirty="0"/>
-          </a:p>
-        </p:txBody>
-      </p:sp>
-      <p:sp>
-        <p:nvSpPr>
-          <p:cNvPr id="8" name="Text 6"/>
-          <p:cNvSpPr txBox="1"/>
-          <p:nvPr/>
-        </p:nvSpPr>
-        <p:spPr>
-          <a:xfrm>
-            <a:off x="731520" y="2871216"/>
-            <a:ext cx="457200" cy="548640"/>
+            <a:endParaRPr lang="en-US" sz="1300" dirty="0"/>
+          </a:p>
+        </p:txBody>
+      </p:sp>
+      <p:sp>
+        <p:nvSpPr>
+          <p:cNvPr id="11" name="Shape 8"/>
+          <p:cNvSpPr/>
+          <p:nvPr/>
+        </p:nvSpPr>
+        <p:spPr>
+          <a:xfrm>
+            <a:off x="731520" y="2743200"/>
+            <a:ext cx="7680960" cy="548640"/>
           </a:xfrm>
           <a:prstGeom prst="roundRect">
             <a:avLst>
-              <a:gd name="adj" fmla="val 50000"/>
+              <a:gd name="adj" fmla="val 13333"/>
             </a:avLst>
           </a:prstGeom>
           <a:solidFill>
-            <a:srgbClr val="00BFA6"/>
+            <a:srgbClr val="0F1419"/>
+          </a:solidFill>
+          <a:ln/>
+        </p:spPr>
+      </p:sp>
+      <p:sp>
+        <p:nvSpPr>
+          <p:cNvPr id="12" name="Text 9"/>
+          <p:cNvSpPr txBox="1"/>
+          <p:nvPr/>
+        </p:nvSpPr>
+        <p:spPr>
+          <a:xfrm>
+            <a:off x="914400" y="2743200"/>
+            <a:ext cx="411480" cy="548640"/>
+          </a:xfrm>
+          <a:prstGeom prst="roundRect">
+            <a:avLst>
+              <a:gd name="adj" fmla="val 48889"/>
+            </a:avLst>
+          </a:prstGeom>
+          <a:solidFill>
+            <a:srgbClr val="06B6D4"/>
           </a:solidFill>
           <a:ln/>
         </p:spPr>
@@ -8602,7 +12024,7 @@
               <a:buNone/>
             </a:pPr>
             <a:r>
-              <a:rPr lang="en-US" sz="1600" b="1" dirty="0">
+              <a:rPr lang="en-US" sz="1500" b="1" dirty="0">
                 <a:solidFill>
                   <a:srgbClr val="0F1419"/>
                 </a:solidFill>
@@ -8612,20 +12034,20 @@
               </a:rPr>
               <a:t>3</a:t>
             </a:r>
-            <a:endParaRPr lang="en-US" sz="1600" dirty="0"/>
-          </a:p>
-        </p:txBody>
-      </p:sp>
-      <p:sp>
-        <p:nvSpPr>
-          <p:cNvPr id="9" name="Text 7"/>
-          <p:cNvSpPr txBox="1"/>
-          <p:nvPr/>
-        </p:nvSpPr>
-        <p:spPr>
-          <a:xfrm>
-            <a:off x="1371600" y="2871216"/>
-            <a:ext cx="7040880" cy="548640"/>
+            <a:endParaRPr lang="en-US" sz="1500" dirty="0"/>
+          </a:p>
+        </p:txBody>
+      </p:sp>
+      <p:sp>
+        <p:nvSpPr>
+          <p:cNvPr id="13" name="Text 10"/>
+          <p:cNvSpPr txBox="1"/>
+          <p:nvPr/>
+        </p:nvSpPr>
+        <p:spPr>
+          <a:xfrm>
+            <a:off x="1508760" y="2743200"/>
+            <a:ext cx="6766560" cy="548640"/>
           </a:xfrm>
           <a:prstGeom prst="rect">
             <a:avLst/>
@@ -8641,7 +12063,7 @@
               <a:buNone/>
             </a:pPr>
             <a:r>
-              <a:rPr lang="en-US" sz="1400" dirty="0">
+              <a:rPr lang="en-US" sz="1300" dirty="0">
                 <a:solidFill>
                   <a:srgbClr val="FFFFFF"/>
                 </a:solidFill>
@@ -8651,28 +12073,50 @@
               </a:rPr>
               <a:t>Épargner sans stress.</a:t>
             </a:r>
-            <a:endParaRPr lang="en-US" sz="1400" dirty="0"/>
-          </a:p>
-        </p:txBody>
-      </p:sp>
-      <p:sp>
-        <p:nvSpPr>
-          <p:cNvPr id="10" name="Text 8"/>
-          <p:cNvSpPr txBox="1"/>
-          <p:nvPr/>
-        </p:nvSpPr>
-        <p:spPr>
-          <a:xfrm>
-            <a:off x="731520" y="3529584"/>
-            <a:ext cx="457200" cy="548640"/>
+            <a:endParaRPr lang="en-US" sz="1300" dirty="0"/>
+          </a:p>
+        </p:txBody>
+      </p:sp>
+      <p:sp>
+        <p:nvSpPr>
+          <p:cNvPr id="14" name="Shape 11"/>
+          <p:cNvSpPr/>
+          <p:nvPr/>
+        </p:nvSpPr>
+        <p:spPr>
+          <a:xfrm>
+            <a:off x="731520" y="3383280"/>
+            <a:ext cx="7680960" cy="548640"/>
           </a:xfrm>
           <a:prstGeom prst="roundRect">
             <a:avLst>
-              <a:gd name="adj" fmla="val 50000"/>
+              <a:gd name="adj" fmla="val 13333"/>
             </a:avLst>
           </a:prstGeom>
           <a:solidFill>
-            <a:srgbClr val="00BFA6"/>
+            <a:srgbClr val="0F1419"/>
+          </a:solidFill>
+          <a:ln/>
+        </p:spPr>
+      </p:sp>
+      <p:sp>
+        <p:nvSpPr>
+          <p:cNvPr id="15" name="Text 12"/>
+          <p:cNvSpPr txBox="1"/>
+          <p:nvPr/>
+        </p:nvSpPr>
+        <p:spPr>
+          <a:xfrm>
+            <a:off x="914400" y="3383280"/>
+            <a:ext cx="411480" cy="548640"/>
+          </a:xfrm>
+          <a:prstGeom prst="roundRect">
+            <a:avLst>
+              <a:gd name="adj" fmla="val 48889"/>
+            </a:avLst>
+          </a:prstGeom>
+          <a:solidFill>
+            <a:srgbClr val="06B6D4"/>
           </a:solidFill>
           <a:ln/>
         </p:spPr>
@@ -8684,7 +12128,7 @@
               <a:buNone/>
             </a:pPr>
             <a:r>
-              <a:rPr lang="en-US" sz="1600" b="1" dirty="0">
+              <a:rPr lang="en-US" sz="1500" b="1" dirty="0">
                 <a:solidFill>
                   <a:srgbClr val="0F1419"/>
                 </a:solidFill>
@@ -8694,20 +12138,20 @@
               </a:rPr>
               <a:t>4</a:t>
             </a:r>
-            <a:endParaRPr lang="en-US" sz="1600" dirty="0"/>
-          </a:p>
-        </p:txBody>
-      </p:sp>
-      <p:sp>
-        <p:nvSpPr>
-          <p:cNvPr id="11" name="Text 9"/>
-          <p:cNvSpPr txBox="1"/>
-          <p:nvPr/>
-        </p:nvSpPr>
-        <p:spPr>
-          <a:xfrm>
-            <a:off x="1371600" y="3529584"/>
-            <a:ext cx="7040880" cy="548640"/>
+            <a:endParaRPr lang="en-US" sz="1500" dirty="0"/>
+          </a:p>
+        </p:txBody>
+      </p:sp>
+      <p:sp>
+        <p:nvSpPr>
+          <p:cNvPr id="16" name="Text 13"/>
+          <p:cNvSpPr txBox="1"/>
+          <p:nvPr/>
+        </p:nvSpPr>
+        <p:spPr>
+          <a:xfrm>
+            <a:off x="1508760" y="3383280"/>
+            <a:ext cx="6766560" cy="548640"/>
           </a:xfrm>
           <a:prstGeom prst="rect">
             <a:avLst/>
@@ -8723,7 +12167,7 @@
               <a:buNone/>
             </a:pPr>
             <a:r>
-              <a:rPr lang="en-US" sz="1400" dirty="0">
+              <a:rPr lang="en-US" sz="1300" dirty="0">
                 <a:solidFill>
                   <a:srgbClr val="FFFFFF"/>
                 </a:solidFill>
@@ -8733,28 +12177,50 @@
               </a:rPr>
               <a:t>Faire du commerce international.</a:t>
             </a:r>
-            <a:endParaRPr lang="en-US" sz="1400" dirty="0"/>
-          </a:p>
-        </p:txBody>
-      </p:sp>
-      <p:sp>
-        <p:nvSpPr>
-          <p:cNvPr id="12" name="Text 10"/>
-          <p:cNvSpPr txBox="1"/>
-          <p:nvPr/>
-        </p:nvSpPr>
-        <p:spPr>
-          <a:xfrm>
-            <a:off x="731520" y="4187952"/>
-            <a:ext cx="457200" cy="548640"/>
+            <a:endParaRPr lang="en-US" sz="1300" dirty="0"/>
+          </a:p>
+        </p:txBody>
+      </p:sp>
+      <p:sp>
+        <p:nvSpPr>
+          <p:cNvPr id="17" name="Shape 14"/>
+          <p:cNvSpPr/>
+          <p:nvPr/>
+        </p:nvSpPr>
+        <p:spPr>
+          <a:xfrm>
+            <a:off x="731520" y="4023360"/>
+            <a:ext cx="7680960" cy="548640"/>
           </a:xfrm>
           <a:prstGeom prst="roundRect">
             <a:avLst>
-              <a:gd name="adj" fmla="val 50000"/>
+              <a:gd name="adj" fmla="val 13333"/>
             </a:avLst>
           </a:prstGeom>
           <a:solidFill>
-            <a:srgbClr val="00BFA6"/>
+            <a:srgbClr val="0F1419"/>
+          </a:solidFill>
+          <a:ln/>
+        </p:spPr>
+      </p:sp>
+      <p:sp>
+        <p:nvSpPr>
+          <p:cNvPr id="18" name="Text 15"/>
+          <p:cNvSpPr txBox="1"/>
+          <p:nvPr/>
+        </p:nvSpPr>
+        <p:spPr>
+          <a:xfrm>
+            <a:off x="914400" y="4023360"/>
+            <a:ext cx="411480" cy="548640"/>
+          </a:xfrm>
+          <a:prstGeom prst="roundRect">
+            <a:avLst>
+              <a:gd name="adj" fmla="val 48889"/>
+            </a:avLst>
+          </a:prstGeom>
+          <a:solidFill>
+            <a:srgbClr val="06B6D4"/>
           </a:solidFill>
           <a:ln/>
         </p:spPr>
@@ -8766,7 +12232,7 @@
               <a:buNone/>
             </a:pPr>
             <a:r>
-              <a:rPr lang="en-US" sz="1600" b="1" dirty="0">
+              <a:rPr lang="en-US" sz="1500" b="1" dirty="0">
                 <a:solidFill>
                   <a:srgbClr val="0F1419"/>
                 </a:solidFill>
@@ -8776,20 +12242,20 @@
               </a:rPr>
               <a:t>5</a:t>
             </a:r>
-            <a:endParaRPr lang="en-US" sz="1600" dirty="0"/>
-          </a:p>
-        </p:txBody>
-      </p:sp>
-      <p:sp>
-        <p:nvSpPr>
-          <p:cNvPr id="13" name="Text 11"/>
-          <p:cNvSpPr txBox="1"/>
-          <p:nvPr/>
-        </p:nvSpPr>
-        <p:spPr>
-          <a:xfrm>
-            <a:off x="1371600" y="4187952"/>
-            <a:ext cx="7040880" cy="548640"/>
+            <a:endParaRPr lang="en-US" sz="1500" dirty="0"/>
+          </a:p>
+        </p:txBody>
+      </p:sp>
+      <p:sp>
+        <p:nvSpPr>
+          <p:cNvPr id="19" name="Text 16"/>
+          <p:cNvSpPr txBox="1"/>
+          <p:nvPr/>
+        </p:nvSpPr>
+        <p:spPr>
+          <a:xfrm>
+            <a:off x="1508760" y="4023360"/>
+            <a:ext cx="6766560" cy="548640"/>
           </a:xfrm>
           <a:prstGeom prst="rect">
             <a:avLst/>
@@ -8805,7 +12271,7 @@
               <a:buNone/>
             </a:pPr>
             <a:r>
-              <a:rPr lang="en-US" sz="1400" dirty="0">
+              <a:rPr lang="en-US" sz="1300" dirty="0">
                 <a:solidFill>
                   <a:srgbClr val="FFFFFF"/>
                 </a:solidFill>
@@ -8815,7 +12281,7 @@
               </a:rPr>
               <a:t>Stablecoins collatéralisés en fiat : USDT, USDC. 1 token = 1 dollar en réserve. Les plus utilisés (&gt;200 milliards en circulation).</a:t>
             </a:r>
-            <a:endParaRPr lang="en-US" sz="1400" dirty="0"/>
+            <a:endParaRPr lang="en-US" sz="1300" dirty="0"/>
           </a:p>
         </p:txBody>
       </p:sp>
@@ -8851,35 +12317,105 @@
           <a:chExt cx="0" cy="0"/>
         </a:xfrm>
       </p:grpSpPr>
-      <p:sp>
-        <p:nvSpPr>
-          <p:cNvPr id="2" name="Shape 0"/>
+      <p:pic>
+        <p:nvPicPr>
+          <p:cNvPr id="2" name="Image 0" descr="preencoded.png">    </p:cNvPr>
+          <p:cNvPicPr>
+            <a:picLocks noChangeAspect="1"/>
+          </p:cNvPicPr>
+          <p:nvPr/>
+        </p:nvPicPr>
+        <p:blipFill>
+          <a:blip r:embed="rId1"/>
+          <a:stretch>
+            <a:fillRect/>
+          </a:stretch>
+        </p:blipFill>
+        <p:spPr>
+          <a:xfrm>
+            <a:off x="7315200" y="548640"/>
+            <a:ext cx="1280160" cy="1280160"/>
+          </a:xfrm>
+          <a:prstGeom prst="rect">
+            <a:avLst/>
+          </a:prstGeom>
+        </p:spPr>
+      </p:pic>
+      <p:pic>
+        <p:nvPicPr>
+          <p:cNvPr id="3" name="Image 1" descr="preencoded.png">    </p:cNvPr>
+          <p:cNvPicPr>
+            <a:picLocks noChangeAspect="1"/>
+          </p:cNvPicPr>
+          <p:nvPr/>
+        </p:nvPicPr>
+        <p:blipFill>
+          <a:blip r:embed="rId2"/>
+          <a:stretch>
+            <a:fillRect/>
+          </a:stretch>
+        </p:blipFill>
+        <p:spPr>
+          <a:xfrm>
+            <a:off x="7772400" y="2011680"/>
+            <a:ext cx="822960" cy="822960"/>
+          </a:xfrm>
+          <a:prstGeom prst="rect">
+            <a:avLst/>
+          </a:prstGeom>
+        </p:spPr>
+      </p:pic>
+      <p:sp>
+        <p:nvSpPr>
+          <p:cNvPr id="4" name="Shape 0"/>
           <p:cNvSpPr/>
           <p:nvPr/>
         </p:nvSpPr>
         <p:spPr>
           <a:xfrm>
-            <a:off x="548640" y="914400"/>
-            <a:ext cx="45720" cy="2560320"/>
-          </a:xfrm>
-          <a:prstGeom prst="rect">
+            <a:off x="6583680" y="-274320"/>
+            <a:ext cx="3200400" cy="3200400"/>
+          </a:xfrm>
+          <a:prstGeom prst="ellipse">
             <a:avLst/>
           </a:prstGeom>
           <a:solidFill>
-            <a:srgbClr val="00BFA6"/>
+            <a:srgbClr val="06B6D4">
+              <a:alpha val="6000"/>
+            </a:srgbClr>
           </a:solidFill>
           <a:ln/>
         </p:spPr>
       </p:sp>
       <p:sp>
         <p:nvSpPr>
-          <p:cNvPr id="3" name="Text 1"/>
-          <p:cNvSpPr txBox="1"/>
-          <p:nvPr/>
-        </p:nvSpPr>
-        <p:spPr>
-          <a:xfrm>
-            <a:off x="822960" y="1097280"/>
+          <p:cNvPr id="5" name="Shape 1"/>
+          <p:cNvSpPr/>
+          <p:nvPr/>
+        </p:nvSpPr>
+        <p:spPr>
+          <a:xfrm>
+            <a:off x="731520" y="914400"/>
+            <a:ext cx="45720" cy="2194560"/>
+          </a:xfrm>
+          <a:prstGeom prst="rect">
+            <a:avLst/>
+          </a:prstGeom>
+          <a:solidFill>
+            <a:srgbClr val="06B6D4"/>
+          </a:solidFill>
+          <a:ln/>
+        </p:spPr>
+      </p:sp>
+      <p:sp>
+        <p:nvSpPr>
+          <p:cNvPr id="6" name="Text 2"/>
+          <p:cNvSpPr txBox="1"/>
+          <p:nvPr/>
+        </p:nvSpPr>
+        <p:spPr>
+          <a:xfrm>
+            <a:off x="960120" y="914400"/>
             <a:ext cx="2743200" cy="365760"/>
           </a:xfrm>
           <a:prstGeom prst="rect">
@@ -8898,13 +12434,13 @@
             <a:r>
               <a:rPr lang="en-US" sz="1200" b="1" spc="200" kern="0" dirty="0">
                 <a:solidFill>
-                  <a:srgbClr val="00BFA6"/>
-                </a:solidFill>
-                <a:latin typeface="Calibri" pitchFamily="34" charset="0"/>
-                <a:ea typeface="Calibri" pitchFamily="34" charset="-122"/>
-                <a:cs typeface="Calibri" pitchFamily="34" charset="-120"/>
-              </a:rPr>
-              <a:t>Lecon 2 / 3</a:t>
+                  <a:srgbClr val="06B6D4"/>
+                </a:solidFill>
+                <a:latin typeface="Calibri" pitchFamily="34" charset="0"/>
+                <a:ea typeface="Calibri" pitchFamily="34" charset="-122"/>
+                <a:cs typeface="Calibri" pitchFamily="34" charset="-120"/>
+              </a:rPr>
+              <a:t>Leçon 2 / 3</a:t>
             </a:r>
             <a:endParaRPr lang="en-US" sz="1200" dirty="0"/>
           </a:p>
@@ -8912,14 +12448,14 @@
       </p:sp>
       <p:sp>
         <p:nvSpPr>
-          <p:cNvPr id="4" name="Text 2"/>
-          <p:cNvSpPr txBox="1"/>
-          <p:nvPr/>
-        </p:nvSpPr>
-        <p:spPr>
-          <a:xfrm>
-            <a:off x="822960" y="1645920"/>
-            <a:ext cx="7498080" cy="1280160"/>
+          <p:cNvPr id="7" name="Text 3"/>
+          <p:cNvSpPr txBox="1"/>
+          <p:nvPr/>
+        </p:nvSpPr>
+        <p:spPr>
+          <a:xfrm>
+            <a:off x="960120" y="1371600"/>
+            <a:ext cx="6217920" cy="1463040"/>
           </a:xfrm>
           <a:prstGeom prst="rect">
             <a:avLst/>
@@ -8935,7 +12471,7 @@
               <a:buNone/>
             </a:pPr>
             <a:r>
-              <a:rPr lang="en-US" sz="3000" b="1" dirty="0">
+              <a:rPr lang="en-US" sz="2800" b="1" dirty="0">
                 <a:solidFill>
                   <a:srgbClr val="FFFFFF"/>
                 </a:solidFill>
@@ -8945,19 +12481,19 @@
               </a:rPr>
               <a:t>USDT — le pilier de l'échange</a:t>
             </a:r>
-            <a:endParaRPr lang="en-US" sz="3000" dirty="0"/>
-          </a:p>
-        </p:txBody>
-      </p:sp>
-      <p:sp>
-        <p:nvSpPr>
-          <p:cNvPr id="5" name="Text 3"/>
-          <p:cNvSpPr txBox="1"/>
-          <p:nvPr/>
-        </p:nvSpPr>
-        <p:spPr>
-          <a:xfrm>
-            <a:off x="822960" y="4206240"/>
+            <a:endParaRPr lang="en-US" sz="2800" dirty="0"/>
+          </a:p>
+        </p:txBody>
+      </p:sp>
+      <p:sp>
+        <p:nvSpPr>
+          <p:cNvPr id="8" name="Text 4"/>
+          <p:cNvSpPr txBox="1"/>
+          <p:nvPr/>
+        </p:nvSpPr>
+        <p:spPr>
+          <a:xfrm>
+            <a:off x="960120" y="4114800"/>
             <a:ext cx="5486400" cy="320040"/>
           </a:xfrm>
           <a:prstGeom prst="rect">

--- a/public/course-materials/pptx/Module-06-Les-stablecoins-USDT-pourquoi-cest-utile.pptx
+++ b/public/course-materials/pptx/Module-06-Les-stablecoins-USDT-pourquoi-cest-utile.pptx
@@ -3082,7 +3082,7 @@
     <p:bg>
       <p:bgPr>
         <a:solidFill>
-          <a:srgbClr val="0F1419"/>
+          <a:srgbClr val="0F1214"/>
         </a:solidFill>
       </p:bgPr>
     </p:bg>
@@ -3115,7 +3115,7 @@
             <a:avLst/>
           </a:prstGeom>
           <a:solidFill>
-            <a:srgbClr val="06B6D4">
+            <a:srgbClr val="3B968F">
               <a:alpha val="8000"/>
             </a:srgbClr>
           </a:solidFill>
@@ -3137,7 +3137,7 @@
             <a:avLst/>
           </a:prstGeom>
           <a:solidFill>
-            <a:srgbClr val="06B6D4">
+            <a:srgbClr val="3B968F">
               <a:alpha val="5000"/>
             </a:srgbClr>
           </a:solidFill>
@@ -3159,7 +3159,7 @@
             <a:avLst/>
           </a:prstGeom>
           <a:solidFill>
-            <a:srgbClr val="06B6D4"/>
+            <a:srgbClr val="3B968F"/>
           </a:solidFill>
           <a:ln/>
         </p:spPr>
@@ -3215,7 +3215,7 @@
             <a:r>
               <a:rPr lang="en-US" sz="1300" b="1" spc="400" kern="0" dirty="0">
                 <a:solidFill>
-                  <a:srgbClr val="06B6D4"/>
+                  <a:srgbClr val="3B968F"/>
                 </a:solidFill>
                 <a:latin typeface="Calibri" pitchFamily="34" charset="0"/>
                 <a:ea typeface="Calibri" pitchFamily="34" charset="-122"/>
@@ -3281,7 +3281,7 @@
             <a:avLst/>
           </a:prstGeom>
           <a:solidFill>
-            <a:srgbClr val="06B6D4"/>
+            <a:srgbClr val="3B968F"/>
           </a:solidFill>
           <a:ln/>
         </p:spPr>
@@ -3313,7 +3313,7 @@
             <a:r>
               <a:rPr lang="en-US" sz="1100" spc="300" kern="0" dirty="0">
                 <a:solidFill>
-                  <a:srgbClr val="64748B"/>
+                  <a:srgbClr val="5B6672"/>
                 </a:solidFill>
                 <a:latin typeface="Calibri" pitchFamily="34" charset="0"/>
                 <a:ea typeface="Calibri" pitchFamily="34" charset="-122"/>
@@ -3352,7 +3352,7 @@
             <a:r>
               <a:rPr lang="en-US" sz="1100" dirty="0">
                 <a:solidFill>
-                  <a:srgbClr val="94A3B8"/>
+                  <a:srgbClr val="8994A0"/>
                 </a:solidFill>
                 <a:latin typeface="Calibri" pitchFamily="34" charset="0"/>
                 <a:ea typeface="Calibri" pitchFamily="34" charset="-122"/>
@@ -3378,7 +3378,7 @@
     <p:bg>
       <p:bgPr>
         <a:solidFill>
-          <a:srgbClr val="0F1419"/>
+          <a:srgbClr val="0F1214"/>
         </a:solidFill>
       </p:bgPr>
     </p:bg>
@@ -3411,7 +3411,7 @@
             <a:avLst/>
           </a:prstGeom>
           <a:solidFill>
-            <a:srgbClr val="06B6D4">
+            <a:srgbClr val="3B968F">
               <a:alpha val="12000"/>
             </a:srgbClr>
           </a:solidFill>
@@ -3533,7 +3533,7 @@
             <a:r>
               <a:rPr lang="en-US" sz="900" dirty="0">
                 <a:solidFill>
-                  <a:srgbClr val="64748B"/>
+                  <a:srgbClr val="5B6672"/>
                 </a:solidFill>
                 <a:latin typeface="Calibri" pitchFamily="34" charset="0"/>
                 <a:ea typeface="Calibri" pitchFamily="34" charset="-122"/>
@@ -3559,7 +3559,7 @@
     <p:bg>
       <p:bgPr>
         <a:solidFill>
-          <a:srgbClr val="0F1419"/>
+          <a:srgbClr val="0F1214"/>
         </a:solidFill>
       </p:bgPr>
     </p:bg>
@@ -3604,7 +3604,7 @@
             <a:r>
               <a:rPr lang="en-US" sz="2000" b="1" dirty="0">
                 <a:solidFill>
-                  <a:srgbClr val="06B6D4"/>
+                  <a:srgbClr val="3B968F"/>
                 </a:solidFill>
                 <a:latin typeface="Calibri" pitchFamily="34" charset="0"/>
                 <a:ea typeface="Calibri" pitchFamily="34" charset="-122"/>
@@ -3718,7 +3718,7 @@
             </a:avLst>
           </a:prstGeom>
           <a:solidFill>
-            <a:srgbClr val="1A2332"/>
+            <a:srgbClr val="1A2026"/>
           </a:solidFill>
           <a:ln/>
         </p:spPr>
@@ -3803,7 +3803,7 @@
             </a:avLst>
           </a:prstGeom>
           <a:solidFill>
-            <a:srgbClr val="1A2332"/>
+            <a:srgbClr val="1A2026"/>
           </a:solidFill>
           <a:ln/>
         </p:spPr>
@@ -3885,7 +3885,7 @@
     <p:bg>
       <p:bgPr>
         <a:solidFill>
-          <a:srgbClr val="0F1419"/>
+          <a:srgbClr val="0F1214"/>
         </a:solidFill>
       </p:bgPr>
     </p:bg>
@@ -3930,7 +3930,7 @@
             <a:r>
               <a:rPr lang="en-US" sz="2000" b="1" dirty="0">
                 <a:solidFill>
-                  <a:srgbClr val="06B6D4"/>
+                  <a:srgbClr val="3B968F"/>
                 </a:solidFill>
                 <a:latin typeface="Calibri" pitchFamily="34" charset="0"/>
                 <a:ea typeface="Calibri" pitchFamily="34" charset="-122"/>
@@ -3959,7 +3959,7 @@
             </a:avLst>
           </a:prstGeom>
           <a:solidFill>
-            <a:srgbClr val="1A2332"/>
+            <a:srgbClr val="1A2026"/>
           </a:solidFill>
           <a:ln/>
         </p:spPr>
@@ -4054,7 +4054,7 @@
             <a:r>
               <a:rPr lang="en-US" sz="900" dirty="0">
                 <a:solidFill>
-                  <a:srgbClr val="94A3B8"/>
+                  <a:srgbClr val="8994A0"/>
                 </a:solidFill>
                 <a:latin typeface="Calibri" pitchFamily="34" charset="0"/>
                 <a:ea typeface="Calibri" pitchFamily="34" charset="-122"/>
@@ -4083,7 +4083,7 @@
             </a:avLst>
           </a:prstGeom>
           <a:solidFill>
-            <a:srgbClr val="1A2332"/>
+            <a:srgbClr val="1A2026"/>
           </a:solidFill>
           <a:ln/>
         </p:spPr>
@@ -4178,7 +4178,7 @@
             <a:r>
               <a:rPr lang="en-US" sz="900" dirty="0">
                 <a:solidFill>
-                  <a:srgbClr val="94A3B8"/>
+                  <a:srgbClr val="8994A0"/>
                 </a:solidFill>
                 <a:latin typeface="Calibri" pitchFamily="34" charset="0"/>
                 <a:ea typeface="Calibri" pitchFamily="34" charset="-122"/>
@@ -4207,7 +4207,7 @@
             </a:avLst>
           </a:prstGeom>
           <a:solidFill>
-            <a:srgbClr val="1A2332"/>
+            <a:srgbClr val="1A2026"/>
           </a:solidFill>
           <a:ln/>
         </p:spPr>
@@ -4302,7 +4302,7 @@
             <a:r>
               <a:rPr lang="en-US" sz="900" dirty="0">
                 <a:solidFill>
-                  <a:srgbClr val="94A3B8"/>
+                  <a:srgbClr val="8994A0"/>
                 </a:solidFill>
                 <a:latin typeface="Calibri" pitchFamily="34" charset="0"/>
                 <a:ea typeface="Calibri" pitchFamily="34" charset="-122"/>
@@ -4331,7 +4331,7 @@
             </a:avLst>
           </a:prstGeom>
           <a:solidFill>
-            <a:srgbClr val="1A2332"/>
+            <a:srgbClr val="1A2026"/>
           </a:solidFill>
           <a:ln/>
         </p:spPr>
@@ -4426,7 +4426,7 @@
             <a:r>
               <a:rPr lang="en-US" sz="900" dirty="0">
                 <a:solidFill>
-                  <a:srgbClr val="94A3B8"/>
+                  <a:srgbClr val="8994A0"/>
                 </a:solidFill>
                 <a:latin typeface="Calibri" pitchFamily="34" charset="0"/>
                 <a:ea typeface="Calibri" pitchFamily="34" charset="-122"/>
@@ -4455,7 +4455,7 @@
             </a:avLst>
           </a:prstGeom>
           <a:solidFill>
-            <a:srgbClr val="1A2332"/>
+            <a:srgbClr val="1A2026"/>
           </a:solidFill>
           <a:ln/>
         </p:spPr>
@@ -4550,7 +4550,7 @@
             <a:r>
               <a:rPr lang="en-US" sz="900" dirty="0">
                 <a:solidFill>
-                  <a:srgbClr val="94A3B8"/>
+                  <a:srgbClr val="8994A0"/>
                 </a:solidFill>
                 <a:latin typeface="Calibri" pitchFamily="34" charset="0"/>
                 <a:ea typeface="Calibri" pitchFamily="34" charset="-122"/>
@@ -4576,7 +4576,7 @@
     <p:bg>
       <p:bgPr>
         <a:solidFill>
-          <a:srgbClr val="0F1419"/>
+          <a:srgbClr val="0F1214"/>
         </a:solidFill>
       </p:bgPr>
     </p:bg>
@@ -4609,7 +4609,7 @@
             <a:avLst/>
           </a:prstGeom>
           <a:solidFill>
-            <a:srgbClr val="06B6D4">
+            <a:srgbClr val="3B968F">
               <a:alpha val="12000"/>
             </a:srgbClr>
           </a:solidFill>
@@ -4667,7 +4667,7 @@
             <a:r>
               <a:rPr lang="en-US" sz="2000" b="1" dirty="0">
                 <a:solidFill>
-                  <a:srgbClr val="06B6D4"/>
+                  <a:srgbClr val="3B968F"/>
                 </a:solidFill>
                 <a:latin typeface="Calibri" pitchFamily="34" charset="0"/>
                 <a:ea typeface="Calibri" pitchFamily="34" charset="-122"/>
@@ -4791,7 +4791,7 @@
             <a:r>
               <a:rPr lang="en-US" sz="900" dirty="0">
                 <a:solidFill>
-                  <a:srgbClr val="64748B"/>
+                  <a:srgbClr val="5B6672"/>
                 </a:solidFill>
                 <a:latin typeface="Calibri" pitchFamily="34" charset="0"/>
                 <a:ea typeface="Calibri" pitchFamily="34" charset="-122"/>
@@ -4817,7 +4817,7 @@
     <p:bg>
       <p:bgPr>
         <a:solidFill>
-          <a:srgbClr val="1A2332"/>
+          <a:srgbClr val="1A2026"/>
         </a:solidFill>
       </p:bgPr>
     </p:bg>
@@ -4886,7 +4886,7 @@
             <a:r>
               <a:rPr lang="en-US" sz="1200" b="1" spc="300" kern="0" dirty="0">
                 <a:solidFill>
-                  <a:srgbClr val="F59E0B"/>
+                  <a:srgbClr val="5BC1B8"/>
                 </a:solidFill>
                 <a:latin typeface="Calibri" pitchFamily="34" charset="0"/>
                 <a:ea typeface="Calibri" pitchFamily="34" charset="-122"/>
@@ -4954,7 +4954,7 @@
             </a:avLst>
           </a:prstGeom>
           <a:solidFill>
-            <a:srgbClr val="0F1419"/>
+            <a:srgbClr val="0F1214"/>
           </a:solidFill>
           <a:ln/>
         </p:spPr>
@@ -4976,7 +4976,7 @@
             </a:avLst>
           </a:prstGeom>
           <a:solidFill>
-            <a:srgbClr val="06B6D4"/>
+            <a:srgbClr val="3B968F"/>
           </a:solidFill>
           <a:ln/>
         </p:spPr>
@@ -4990,7 +4990,7 @@
             <a:r>
               <a:rPr lang="en-US" sz="1500" b="1" dirty="0">
                 <a:solidFill>
-                  <a:srgbClr val="0F1419"/>
+                  <a:srgbClr val="0F1214"/>
                 </a:solidFill>
                 <a:latin typeface="Calibri" pitchFamily="34" charset="0"/>
                 <a:ea typeface="Calibri" pitchFamily="34" charset="-122"/>
@@ -5058,7 +5058,7 @@
             </a:avLst>
           </a:prstGeom>
           <a:solidFill>
-            <a:srgbClr val="0F1419"/>
+            <a:srgbClr val="0F1214"/>
           </a:solidFill>
           <a:ln/>
         </p:spPr>
@@ -5080,7 +5080,7 @@
             </a:avLst>
           </a:prstGeom>
           <a:solidFill>
-            <a:srgbClr val="06B6D4"/>
+            <a:srgbClr val="3B968F"/>
           </a:solidFill>
           <a:ln/>
         </p:spPr>
@@ -5094,7 +5094,7 @@
             <a:r>
               <a:rPr lang="en-US" sz="1500" b="1" dirty="0">
                 <a:solidFill>
-                  <a:srgbClr val="0F1419"/>
+                  <a:srgbClr val="0F1214"/>
                 </a:solidFill>
                 <a:latin typeface="Calibri" pitchFamily="34" charset="0"/>
                 <a:ea typeface="Calibri" pitchFamily="34" charset="-122"/>
@@ -5162,7 +5162,7 @@
             </a:avLst>
           </a:prstGeom>
           <a:solidFill>
-            <a:srgbClr val="0F1419"/>
+            <a:srgbClr val="0F1214"/>
           </a:solidFill>
           <a:ln/>
         </p:spPr>
@@ -5184,7 +5184,7 @@
             </a:avLst>
           </a:prstGeom>
           <a:solidFill>
-            <a:srgbClr val="06B6D4"/>
+            <a:srgbClr val="3B968F"/>
           </a:solidFill>
           <a:ln/>
         </p:spPr>
@@ -5198,7 +5198,7 @@
             <a:r>
               <a:rPr lang="en-US" sz="1500" b="1" dirty="0">
                 <a:solidFill>
-                  <a:srgbClr val="0F1419"/>
+                  <a:srgbClr val="0F1214"/>
                 </a:solidFill>
                 <a:latin typeface="Calibri" pitchFamily="34" charset="0"/>
                 <a:ea typeface="Calibri" pitchFamily="34" charset="-122"/>
@@ -5266,7 +5266,7 @@
             </a:avLst>
           </a:prstGeom>
           <a:solidFill>
-            <a:srgbClr val="0F1419"/>
+            <a:srgbClr val="0F1214"/>
           </a:solidFill>
           <a:ln/>
         </p:spPr>
@@ -5288,7 +5288,7 @@
             </a:avLst>
           </a:prstGeom>
           <a:solidFill>
-            <a:srgbClr val="06B6D4"/>
+            <a:srgbClr val="3B968F"/>
           </a:solidFill>
           <a:ln/>
         </p:spPr>
@@ -5302,7 +5302,7 @@
             <a:r>
               <a:rPr lang="en-US" sz="1500" b="1" dirty="0">
                 <a:solidFill>
-                  <a:srgbClr val="0F1419"/>
+                  <a:srgbClr val="0F1214"/>
                 </a:solidFill>
                 <a:latin typeface="Calibri" pitchFamily="34" charset="0"/>
                 <a:ea typeface="Calibri" pitchFamily="34" charset="-122"/>
@@ -5370,7 +5370,7 @@
             </a:avLst>
           </a:prstGeom>
           <a:solidFill>
-            <a:srgbClr val="0F1419"/>
+            <a:srgbClr val="0F1214"/>
           </a:solidFill>
           <a:ln/>
         </p:spPr>
@@ -5392,7 +5392,7 @@
             </a:avLst>
           </a:prstGeom>
           <a:solidFill>
-            <a:srgbClr val="06B6D4"/>
+            <a:srgbClr val="3B968F"/>
           </a:solidFill>
           <a:ln/>
         </p:spPr>
@@ -5406,7 +5406,7 @@
             <a:r>
               <a:rPr lang="en-US" sz="1500" b="1" dirty="0">
                 <a:solidFill>
-                  <a:srgbClr val="0F1419"/>
+                  <a:srgbClr val="0F1214"/>
                 </a:solidFill>
                 <a:latin typeface="Calibri" pitchFamily="34" charset="0"/>
                 <a:ea typeface="Calibri" pitchFamily="34" charset="-122"/>
@@ -5471,7 +5471,7 @@
     <p:bg>
       <p:bgPr>
         <a:solidFill>
-          <a:srgbClr val="0F1419"/>
+          <a:srgbClr val="0F1214"/>
         </a:solidFill>
       </p:bgPr>
     </p:bg>
@@ -5506,7 +5506,7 @@
             </a:avLst>
           </a:prstGeom>
           <a:solidFill>
-            <a:srgbClr val="2D1B1B"/>
+            <a:srgbClr val="2A1414"/>
           </a:solidFill>
           <a:ln/>
         </p:spPr>
@@ -5526,7 +5526,7 @@
             <a:avLst/>
           </a:prstGeom>
           <a:solidFill>
-            <a:srgbClr val="EF4444"/>
+            <a:srgbClr val="DC2626"/>
           </a:solidFill>
           <a:ln/>
         </p:spPr>
@@ -5582,7 +5582,7 @@
             <a:r>
               <a:rPr lang="en-US" sz="1200" b="1" spc="300" kern="0" dirty="0">
                 <a:solidFill>
-                  <a:srgbClr val="EF4444"/>
+                  <a:srgbClr val="DC2626"/>
                 </a:solidFill>
                 <a:latin typeface="Calibri" pitchFamily="34" charset="0"/>
                 <a:ea typeface="Calibri" pitchFamily="34" charset="-122"/>
@@ -5647,7 +5647,7 @@
     <p:bg>
       <p:bgPr>
         <a:solidFill>
-          <a:srgbClr val="0D2137"/>
+          <a:srgbClr val="12181D"/>
         </a:solidFill>
       </p:bgPr>
     </p:bg>
@@ -5728,7 +5728,7 @@
             <a:avLst/>
           </a:prstGeom>
           <a:solidFill>
-            <a:srgbClr val="06B6D4">
+            <a:srgbClr val="3B968F">
               <a:alpha val="6000"/>
             </a:srgbClr>
           </a:solidFill>
@@ -5750,7 +5750,7 @@
             <a:avLst/>
           </a:prstGeom>
           <a:solidFill>
-            <a:srgbClr val="06B6D4"/>
+            <a:srgbClr val="3B968F"/>
           </a:solidFill>
           <a:ln/>
         </p:spPr>
@@ -5782,7 +5782,7 @@
             <a:r>
               <a:rPr lang="en-US" sz="1200" b="1" spc="200" kern="0" dirty="0">
                 <a:solidFill>
-                  <a:srgbClr val="06B6D4"/>
+                  <a:srgbClr val="3B968F"/>
                 </a:solidFill>
                 <a:latin typeface="Calibri" pitchFamily="34" charset="0"/>
                 <a:ea typeface="Calibri" pitchFamily="34" charset="-122"/>
@@ -5860,7 +5860,7 @@
             <a:r>
               <a:rPr lang="en-US" sz="1100" dirty="0">
                 <a:solidFill>
-                  <a:srgbClr val="64748B"/>
+                  <a:srgbClr val="5B6672"/>
                 </a:solidFill>
                 <a:latin typeface="Calibri" pitchFamily="34" charset="0"/>
                 <a:ea typeface="Calibri" pitchFamily="34" charset="-122"/>
@@ -5886,7 +5886,7 @@
     <p:bg>
       <p:bgPr>
         <a:solidFill>
-          <a:srgbClr val="0F1419"/>
+          <a:srgbClr val="0F1214"/>
         </a:solidFill>
       </p:bgPr>
     </p:bg>
@@ -5919,7 +5919,7 @@
             <a:avLst/>
           </a:prstGeom>
           <a:solidFill>
-            <a:srgbClr val="06B6D4">
+            <a:srgbClr val="3B968F">
               <a:alpha val="12000"/>
             </a:srgbClr>
           </a:solidFill>
@@ -6125,7 +6125,7 @@
             <a:r>
               <a:rPr lang="en-US" sz="900" dirty="0">
                 <a:solidFill>
-                  <a:srgbClr val="64748B"/>
+                  <a:srgbClr val="5B6672"/>
                 </a:solidFill>
                 <a:latin typeface="Calibri" pitchFamily="34" charset="0"/>
                 <a:ea typeface="Calibri" pitchFamily="34" charset="-122"/>
@@ -6151,7 +6151,7 @@
     <p:bg>
       <p:bgPr>
         <a:solidFill>
-          <a:srgbClr val="0F1419"/>
+          <a:srgbClr val="0F1214"/>
         </a:solidFill>
       </p:bgPr>
     </p:bg>
@@ -6196,7 +6196,7 @@
             <a:r>
               <a:rPr lang="en-US" sz="2000" b="1" dirty="0">
                 <a:solidFill>
-                  <a:srgbClr val="06B6D4"/>
+                  <a:srgbClr val="3B968F"/>
                 </a:solidFill>
                 <a:latin typeface="Calibri" pitchFamily="34" charset="0"/>
                 <a:ea typeface="Calibri" pitchFamily="34" charset="-122"/>
@@ -6310,7 +6310,7 @@
             </a:avLst>
           </a:prstGeom>
           <a:solidFill>
-            <a:srgbClr val="1A2332"/>
+            <a:srgbClr val="1A2026"/>
           </a:solidFill>
           <a:ln/>
         </p:spPr>
@@ -6395,7 +6395,7 @@
             </a:avLst>
           </a:prstGeom>
           <a:solidFill>
-            <a:srgbClr val="1A2332"/>
+            <a:srgbClr val="1A2026"/>
           </a:solidFill>
           <a:ln/>
         </p:spPr>
@@ -6477,7 +6477,7 @@
     <p:bg>
       <p:bgPr>
         <a:solidFill>
-          <a:srgbClr val="0F1419"/>
+          <a:srgbClr val="0F1214"/>
         </a:solidFill>
       </p:bgPr>
     </p:bg>
@@ -6522,7 +6522,7 @@
             <a:r>
               <a:rPr lang="en-US" sz="2000" b="1" dirty="0">
                 <a:solidFill>
-                  <a:srgbClr val="06B6D4"/>
+                  <a:srgbClr val="3B968F"/>
                 </a:solidFill>
                 <a:latin typeface="Calibri" pitchFamily="34" charset="0"/>
                 <a:ea typeface="Calibri" pitchFamily="34" charset="-122"/>
@@ -6551,7 +6551,7 @@
             </a:avLst>
           </a:prstGeom>
           <a:solidFill>
-            <a:srgbClr val="1A2332"/>
+            <a:srgbClr val="1A2026"/>
           </a:solidFill>
           <a:ln/>
         </p:spPr>
@@ -6636,7 +6636,7 @@
             </a:avLst>
           </a:prstGeom>
           <a:solidFill>
-            <a:srgbClr val="1A2332"/>
+            <a:srgbClr val="1A2026"/>
           </a:solidFill>
           <a:ln/>
         </p:spPr>
@@ -6721,7 +6721,7 @@
             </a:avLst>
           </a:prstGeom>
           <a:solidFill>
-            <a:srgbClr val="1A2332"/>
+            <a:srgbClr val="1A2026"/>
           </a:solidFill>
           <a:ln/>
         </p:spPr>
@@ -6806,7 +6806,7 @@
             </a:avLst>
           </a:prstGeom>
           <a:solidFill>
-            <a:srgbClr val="1A2332"/>
+            <a:srgbClr val="1A2026"/>
           </a:solidFill>
           <a:ln/>
         </p:spPr>
@@ -6891,7 +6891,7 @@
             </a:avLst>
           </a:prstGeom>
           <a:solidFill>
-            <a:srgbClr val="1A2332"/>
+            <a:srgbClr val="1A2026"/>
           </a:solidFill>
           <a:ln/>
         </p:spPr>
@@ -6973,7 +6973,7 @@
     <p:bg>
       <p:bgPr>
         <a:solidFill>
-          <a:srgbClr val="0F1419"/>
+          <a:srgbClr val="0F1214"/>
         </a:solidFill>
       </p:bgPr>
     </p:bg>
@@ -7018,7 +7018,7 @@
             <a:r>
               <a:rPr lang="en-US" sz="1200" b="1" spc="300" kern="0" dirty="0">
                 <a:solidFill>
-                  <a:srgbClr val="06B6D4"/>
+                  <a:srgbClr val="3B968F"/>
                 </a:solidFill>
                 <a:latin typeface="Calibri" pitchFamily="34" charset="0"/>
                 <a:ea typeface="Calibri" pitchFamily="34" charset="-122"/>
@@ -7086,7 +7086,7 @@
             </a:avLst>
           </a:prstGeom>
           <a:solidFill>
-            <a:srgbClr val="1A2332"/>
+            <a:srgbClr val="1A2026"/>
           </a:solidFill>
           <a:ln/>
         </p:spPr>
@@ -7118,7 +7118,7 @@
             <a:r>
               <a:rPr lang="en-US" sz="1300" b="1" dirty="0">
                 <a:solidFill>
-                  <a:srgbClr val="06B6D4"/>
+                  <a:srgbClr val="3B968F"/>
                 </a:solidFill>
                 <a:latin typeface="Calibri" pitchFamily="34" charset="0"/>
                 <a:ea typeface="Calibri" pitchFamily="34" charset="-122"/>
@@ -7210,7 +7210,7 @@
             </a:avLst>
           </a:prstGeom>
           <a:solidFill>
-            <a:srgbClr val="1A2332"/>
+            <a:srgbClr val="1A2026"/>
           </a:solidFill>
           <a:ln/>
         </p:spPr>
@@ -7242,7 +7242,7 @@
             <a:r>
               <a:rPr lang="en-US" sz="1300" b="1" dirty="0">
                 <a:solidFill>
-                  <a:srgbClr val="06B6D4"/>
+                  <a:srgbClr val="3B968F"/>
                 </a:solidFill>
                 <a:latin typeface="Calibri" pitchFamily="34" charset="0"/>
                 <a:ea typeface="Calibri" pitchFamily="34" charset="-122"/>
@@ -7334,7 +7334,7 @@
             </a:avLst>
           </a:prstGeom>
           <a:solidFill>
-            <a:srgbClr val="1A2332"/>
+            <a:srgbClr val="1A2026"/>
           </a:solidFill>
           <a:ln/>
         </p:spPr>
@@ -7366,7 +7366,7 @@
             <a:r>
               <a:rPr lang="en-US" sz="1300" b="1" dirty="0">
                 <a:solidFill>
-                  <a:srgbClr val="06B6D4"/>
+                  <a:srgbClr val="3B968F"/>
                 </a:solidFill>
                 <a:latin typeface="Calibri" pitchFamily="34" charset="0"/>
                 <a:ea typeface="Calibri" pitchFamily="34" charset="-122"/>
@@ -7455,7 +7455,7 @@
     <p:bg>
       <p:bgPr>
         <a:solidFill>
-          <a:srgbClr val="0F1419"/>
+          <a:srgbClr val="0F1214"/>
         </a:solidFill>
       </p:bgPr>
     </p:bg>
@@ -7488,7 +7488,7 @@
             <a:avLst/>
           </a:prstGeom>
           <a:solidFill>
-            <a:srgbClr val="06B6D4">
+            <a:srgbClr val="3B968F">
               <a:alpha val="12000"/>
             </a:srgbClr>
           </a:solidFill>
@@ -7546,7 +7546,7 @@
             <a:r>
               <a:rPr lang="en-US" sz="2000" b="1" dirty="0">
                 <a:solidFill>
-                  <a:srgbClr val="06B6D4"/>
+                  <a:srgbClr val="3B968F"/>
                 </a:solidFill>
                 <a:latin typeface="Calibri" pitchFamily="34" charset="0"/>
                 <a:ea typeface="Calibri" pitchFamily="34" charset="-122"/>
@@ -7712,7 +7712,7 @@
             <a:r>
               <a:rPr lang="en-US" sz="900" dirty="0">
                 <a:solidFill>
-                  <a:srgbClr val="64748B"/>
+                  <a:srgbClr val="5B6672"/>
                 </a:solidFill>
                 <a:latin typeface="Calibri" pitchFamily="34" charset="0"/>
                 <a:ea typeface="Calibri" pitchFamily="34" charset="-122"/>
@@ -7738,7 +7738,7 @@
     <p:bg>
       <p:bgPr>
         <a:solidFill>
-          <a:srgbClr val="0F1419"/>
+          <a:srgbClr val="0F1214"/>
         </a:solidFill>
       </p:bgPr>
     </p:bg>
@@ -7771,7 +7771,7 @@
             <a:avLst/>
           </a:prstGeom>
           <a:solidFill>
-            <a:srgbClr val="06B6D4">
+            <a:srgbClr val="3B968F">
               <a:alpha val="12000"/>
             </a:srgbClr>
           </a:solidFill>
@@ -7829,7 +7829,7 @@
             <a:r>
               <a:rPr lang="en-US" sz="2000" b="1" dirty="0">
                 <a:solidFill>
-                  <a:srgbClr val="06B6D4"/>
+                  <a:srgbClr val="3B968F"/>
                 </a:solidFill>
                 <a:latin typeface="Calibri" pitchFamily="34" charset="0"/>
                 <a:ea typeface="Calibri" pitchFamily="34" charset="-122"/>
@@ -7932,7 +7932,7 @@
             <a:r>
               <a:rPr lang="en-US" sz="900" dirty="0">
                 <a:solidFill>
-                  <a:srgbClr val="64748B"/>
+                  <a:srgbClr val="5B6672"/>
                 </a:solidFill>
                 <a:latin typeface="Calibri" pitchFamily="34" charset="0"/>
                 <a:ea typeface="Calibri" pitchFamily="34" charset="-122"/>
@@ -7958,7 +7958,7 @@
     <p:bg>
       <p:bgPr>
         <a:solidFill>
-          <a:srgbClr val="0F1419"/>
+          <a:srgbClr val="0F1214"/>
         </a:solidFill>
       </p:bgPr>
     </p:bg>
@@ -8003,7 +8003,7 @@
             <a:r>
               <a:rPr lang="en-US" sz="2000" b="1" dirty="0">
                 <a:solidFill>
-                  <a:srgbClr val="06B6D4"/>
+                  <a:srgbClr val="3B968F"/>
                 </a:solidFill>
                 <a:latin typeface="Calibri" pitchFamily="34" charset="0"/>
                 <a:ea typeface="Calibri" pitchFamily="34" charset="-122"/>
@@ -8032,7 +8032,7 @@
             </a:avLst>
           </a:prstGeom>
           <a:solidFill>
-            <a:srgbClr val="1A2332"/>
+            <a:srgbClr val="1A2026"/>
           </a:solidFill>
           <a:ln/>
         </p:spPr>
@@ -8127,7 +8127,7 @@
             <a:r>
               <a:rPr lang="en-US" sz="900" dirty="0">
                 <a:solidFill>
-                  <a:srgbClr val="94A3B8"/>
+                  <a:srgbClr val="8994A0"/>
                 </a:solidFill>
                 <a:latin typeface="Calibri" pitchFamily="34" charset="0"/>
                 <a:ea typeface="Calibri" pitchFamily="34" charset="-122"/>
@@ -8156,7 +8156,7 @@
             </a:avLst>
           </a:prstGeom>
           <a:solidFill>
-            <a:srgbClr val="1A2332"/>
+            <a:srgbClr val="1A2026"/>
           </a:solidFill>
           <a:ln/>
         </p:spPr>
@@ -8251,7 +8251,7 @@
             <a:r>
               <a:rPr lang="en-US" sz="900" dirty="0">
                 <a:solidFill>
-                  <a:srgbClr val="94A3B8"/>
+                  <a:srgbClr val="8994A0"/>
                 </a:solidFill>
                 <a:latin typeface="Calibri" pitchFamily="34" charset="0"/>
                 <a:ea typeface="Calibri" pitchFamily="34" charset="-122"/>
@@ -8280,7 +8280,7 @@
             </a:avLst>
           </a:prstGeom>
           <a:solidFill>
-            <a:srgbClr val="1A2332"/>
+            <a:srgbClr val="1A2026"/>
           </a:solidFill>
           <a:ln/>
         </p:spPr>
@@ -8375,7 +8375,7 @@
             <a:r>
               <a:rPr lang="en-US" sz="900" dirty="0">
                 <a:solidFill>
-                  <a:srgbClr val="94A3B8"/>
+                  <a:srgbClr val="8994A0"/>
                 </a:solidFill>
                 <a:latin typeface="Calibri" pitchFamily="34" charset="0"/>
                 <a:ea typeface="Calibri" pitchFamily="34" charset="-122"/>
@@ -8401,7 +8401,7 @@
     <p:bg>
       <p:bgPr>
         <a:solidFill>
-          <a:srgbClr val="0F1419"/>
+          <a:srgbClr val="0F1214"/>
         </a:solidFill>
       </p:bgPr>
     </p:bg>
@@ -8434,7 +8434,7 @@
             <a:avLst/>
           </a:prstGeom>
           <a:solidFill>
-            <a:srgbClr val="06B6D4">
+            <a:srgbClr val="3B968F">
               <a:alpha val="12000"/>
             </a:srgbClr>
           </a:solidFill>
@@ -8492,7 +8492,7 @@
             <a:r>
               <a:rPr lang="en-US" sz="2000" b="1" dirty="0">
                 <a:solidFill>
-                  <a:srgbClr val="06B6D4"/>
+                  <a:srgbClr val="3B968F"/>
                 </a:solidFill>
                 <a:latin typeface="Calibri" pitchFamily="34" charset="0"/>
                 <a:ea typeface="Calibri" pitchFamily="34" charset="-122"/>
@@ -8658,7 +8658,7 @@
             <a:r>
               <a:rPr lang="en-US" sz="900" dirty="0">
                 <a:solidFill>
-                  <a:srgbClr val="64748B"/>
+                  <a:srgbClr val="5B6672"/>
                 </a:solidFill>
                 <a:latin typeface="Calibri" pitchFamily="34" charset="0"/>
                 <a:ea typeface="Calibri" pitchFamily="34" charset="-122"/>
@@ -8684,7 +8684,7 @@
     <p:bg>
       <p:bgPr>
         <a:solidFill>
-          <a:srgbClr val="1A2332"/>
+          <a:srgbClr val="1A2026"/>
         </a:solidFill>
       </p:bgPr>
     </p:bg>
@@ -8753,7 +8753,7 @@
             <a:r>
               <a:rPr lang="en-US" sz="1200" b="1" spc="300" kern="0" dirty="0">
                 <a:solidFill>
-                  <a:srgbClr val="F59E0B"/>
+                  <a:srgbClr val="5BC1B8"/>
                 </a:solidFill>
                 <a:latin typeface="Calibri" pitchFamily="34" charset="0"/>
                 <a:ea typeface="Calibri" pitchFamily="34" charset="-122"/>
@@ -8821,7 +8821,7 @@
             </a:avLst>
           </a:prstGeom>
           <a:solidFill>
-            <a:srgbClr val="0F1419"/>
+            <a:srgbClr val="0F1214"/>
           </a:solidFill>
           <a:ln/>
         </p:spPr>
@@ -8843,7 +8843,7 @@
             </a:avLst>
           </a:prstGeom>
           <a:solidFill>
-            <a:srgbClr val="06B6D4"/>
+            <a:srgbClr val="3B968F"/>
           </a:solidFill>
           <a:ln/>
         </p:spPr>
@@ -8857,7 +8857,7 @@
             <a:r>
               <a:rPr lang="en-US" sz="1500" b="1" dirty="0">
                 <a:solidFill>
-                  <a:srgbClr val="0F1419"/>
+                  <a:srgbClr val="0F1214"/>
                 </a:solidFill>
                 <a:latin typeface="Calibri" pitchFamily="34" charset="0"/>
                 <a:ea typeface="Calibri" pitchFamily="34" charset="-122"/>
@@ -8925,7 +8925,7 @@
             </a:avLst>
           </a:prstGeom>
           <a:solidFill>
-            <a:srgbClr val="0F1419"/>
+            <a:srgbClr val="0F1214"/>
           </a:solidFill>
           <a:ln/>
         </p:spPr>
@@ -8947,7 +8947,7 @@
             </a:avLst>
           </a:prstGeom>
           <a:solidFill>
-            <a:srgbClr val="06B6D4"/>
+            <a:srgbClr val="3B968F"/>
           </a:solidFill>
           <a:ln/>
         </p:spPr>
@@ -8961,7 +8961,7 @@
             <a:r>
               <a:rPr lang="en-US" sz="1500" b="1" dirty="0">
                 <a:solidFill>
-                  <a:srgbClr val="0F1419"/>
+                  <a:srgbClr val="0F1214"/>
                 </a:solidFill>
                 <a:latin typeface="Calibri" pitchFamily="34" charset="0"/>
                 <a:ea typeface="Calibri" pitchFamily="34" charset="-122"/>
@@ -9029,7 +9029,7 @@
             </a:avLst>
           </a:prstGeom>
           <a:solidFill>
-            <a:srgbClr val="0F1419"/>
+            <a:srgbClr val="0F1214"/>
           </a:solidFill>
           <a:ln/>
         </p:spPr>
@@ -9051,7 +9051,7 @@
             </a:avLst>
           </a:prstGeom>
           <a:solidFill>
-            <a:srgbClr val="06B6D4"/>
+            <a:srgbClr val="3B968F"/>
           </a:solidFill>
           <a:ln/>
         </p:spPr>
@@ -9065,7 +9065,7 @@
             <a:r>
               <a:rPr lang="en-US" sz="1500" b="1" dirty="0">
                 <a:solidFill>
-                  <a:srgbClr val="0F1419"/>
+                  <a:srgbClr val="0F1214"/>
                 </a:solidFill>
                 <a:latin typeface="Calibri" pitchFamily="34" charset="0"/>
                 <a:ea typeface="Calibri" pitchFamily="34" charset="-122"/>
@@ -9133,7 +9133,7 @@
             </a:avLst>
           </a:prstGeom>
           <a:solidFill>
-            <a:srgbClr val="0F1419"/>
+            <a:srgbClr val="0F1214"/>
           </a:solidFill>
           <a:ln/>
         </p:spPr>
@@ -9155,7 +9155,7 @@
             </a:avLst>
           </a:prstGeom>
           <a:solidFill>
-            <a:srgbClr val="06B6D4"/>
+            <a:srgbClr val="3B968F"/>
           </a:solidFill>
           <a:ln/>
         </p:spPr>
@@ -9169,7 +9169,7 @@
             <a:r>
               <a:rPr lang="en-US" sz="1500" b="1" dirty="0">
                 <a:solidFill>
-                  <a:srgbClr val="0F1419"/>
+                  <a:srgbClr val="0F1214"/>
                 </a:solidFill>
                 <a:latin typeface="Calibri" pitchFamily="34" charset="0"/>
                 <a:ea typeface="Calibri" pitchFamily="34" charset="-122"/>
@@ -9237,7 +9237,7 @@
             </a:avLst>
           </a:prstGeom>
           <a:solidFill>
-            <a:srgbClr val="0F1419"/>
+            <a:srgbClr val="0F1214"/>
           </a:solidFill>
           <a:ln/>
         </p:spPr>
@@ -9259,7 +9259,7 @@
             </a:avLst>
           </a:prstGeom>
           <a:solidFill>
-            <a:srgbClr val="06B6D4"/>
+            <a:srgbClr val="3B968F"/>
           </a:solidFill>
           <a:ln/>
         </p:spPr>
@@ -9273,7 +9273,7 @@
             <a:r>
               <a:rPr lang="en-US" sz="1500" b="1" dirty="0">
                 <a:solidFill>
-                  <a:srgbClr val="0F1419"/>
+                  <a:srgbClr val="0F1214"/>
                 </a:solidFill>
                 <a:latin typeface="Calibri" pitchFamily="34" charset="0"/>
                 <a:ea typeface="Calibri" pitchFamily="34" charset="-122"/>
@@ -9338,7 +9338,7 @@
     <p:bg>
       <p:bgPr>
         <a:solidFill>
-          <a:srgbClr val="0F1419"/>
+          <a:srgbClr val="0F1214"/>
         </a:solidFill>
       </p:bgPr>
     </p:bg>
@@ -9373,7 +9373,7 @@
             </a:avLst>
           </a:prstGeom>
           <a:solidFill>
-            <a:srgbClr val="2D1B1B"/>
+            <a:srgbClr val="2A1414"/>
           </a:solidFill>
           <a:ln/>
         </p:spPr>
@@ -9393,7 +9393,7 @@
             <a:avLst/>
           </a:prstGeom>
           <a:solidFill>
-            <a:srgbClr val="EF4444"/>
+            <a:srgbClr val="DC2626"/>
           </a:solidFill>
           <a:ln/>
         </p:spPr>
@@ -9449,7 +9449,7 @@
             <a:r>
               <a:rPr lang="en-US" sz="1200" b="1" spc="300" kern="0" dirty="0">
                 <a:solidFill>
-                  <a:srgbClr val="EF4444"/>
+                  <a:srgbClr val="DC2626"/>
                 </a:solidFill>
                 <a:latin typeface="Calibri" pitchFamily="34" charset="0"/>
                 <a:ea typeface="Calibri" pitchFamily="34" charset="-122"/>
@@ -9582,7 +9582,7 @@
     <p:bg>
       <p:bgPr>
         <a:solidFill>
-          <a:srgbClr val="0F1419"/>
+          <a:srgbClr val="0F1214"/>
         </a:solidFill>
       </p:bgPr>
     </p:bg>
@@ -9615,7 +9615,7 @@
             <a:avLst/>
           </a:prstGeom>
           <a:solidFill>
-            <a:srgbClr val="06B6D4">
+            <a:srgbClr val="3B968F">
               <a:alpha val="6000"/>
             </a:srgbClr>
           </a:solidFill>
@@ -9712,7 +9712,7 @@
             <a:r>
               <a:rPr lang="en-US" sz="1300" dirty="0">
                 <a:solidFill>
-                  <a:srgbClr val="94A3B8"/>
+                  <a:srgbClr val="8994A0"/>
                 </a:solidFill>
                 <a:latin typeface="Calibri" pitchFamily="34" charset="0"/>
                 <a:ea typeface="Calibri" pitchFamily="34" charset="-122"/>
@@ -9739,7 +9739,7 @@
             <a:avLst/>
           </a:prstGeom>
           <a:solidFill>
-            <a:srgbClr val="06B6D4"/>
+            <a:srgbClr val="3B968F"/>
           </a:solidFill>
           <a:ln/>
         </p:spPr>
@@ -9771,7 +9771,7 @@
             <a:r>
               <a:rPr lang="en-US" sz="1100" spc="300" kern="0" dirty="0">
                 <a:solidFill>
-                  <a:srgbClr val="64748B"/>
+                  <a:srgbClr val="5B6672"/>
                 </a:solidFill>
                 <a:latin typeface="Calibri" pitchFamily="34" charset="0"/>
                 <a:ea typeface="Calibri" pitchFamily="34" charset="-122"/>
@@ -9810,7 +9810,7 @@
             <a:r>
               <a:rPr lang="en-US" sz="1100" dirty="0">
                 <a:solidFill>
-                  <a:srgbClr val="009E8B"/>
+                  <a:srgbClr val="000000"/>
                 </a:solidFill>
                 <a:latin typeface="Calibri" pitchFamily="34" charset="0"/>
                 <a:ea typeface="Calibri" pitchFamily="34" charset="-122"/>
@@ -9836,7 +9836,7 @@
     <p:bg>
       <p:bgPr>
         <a:solidFill>
-          <a:srgbClr val="0D2137"/>
+          <a:srgbClr val="12181D"/>
         </a:solidFill>
       </p:bgPr>
     </p:bg>
@@ -9917,7 +9917,7 @@
             <a:avLst/>
           </a:prstGeom>
           <a:solidFill>
-            <a:srgbClr val="06B6D4">
+            <a:srgbClr val="3B968F">
               <a:alpha val="6000"/>
             </a:srgbClr>
           </a:solidFill>
@@ -9939,7 +9939,7 @@
             <a:avLst/>
           </a:prstGeom>
           <a:solidFill>
-            <a:srgbClr val="06B6D4"/>
+            <a:srgbClr val="3B968F"/>
           </a:solidFill>
           <a:ln/>
         </p:spPr>
@@ -9971,7 +9971,7 @@
             <a:r>
               <a:rPr lang="en-US" sz="1200" b="1" spc="200" kern="0" dirty="0">
                 <a:solidFill>
-                  <a:srgbClr val="06B6D4"/>
+                  <a:srgbClr val="3B968F"/>
                 </a:solidFill>
                 <a:latin typeface="Calibri" pitchFamily="34" charset="0"/>
                 <a:ea typeface="Calibri" pitchFamily="34" charset="-122"/>
@@ -10049,7 +10049,7 @@
             <a:r>
               <a:rPr lang="en-US" sz="1100" dirty="0">
                 <a:solidFill>
-                  <a:srgbClr val="64748B"/>
+                  <a:srgbClr val="5B6672"/>
                 </a:solidFill>
                 <a:latin typeface="Calibri" pitchFamily="34" charset="0"/>
                 <a:ea typeface="Calibri" pitchFamily="34" charset="-122"/>
@@ -10075,7 +10075,7 @@
     <p:bg>
       <p:bgPr>
         <a:solidFill>
-          <a:srgbClr val="0F1419"/>
+          <a:srgbClr val="0F1214"/>
         </a:solidFill>
       </p:bgPr>
     </p:bg>
@@ -10108,7 +10108,7 @@
             <a:avLst/>
           </a:prstGeom>
           <a:solidFill>
-            <a:srgbClr val="06B6D4">
+            <a:srgbClr val="3B968F">
               <a:alpha val="12000"/>
             </a:srgbClr>
           </a:solidFill>
@@ -10209,7 +10209,7 @@
             <a:r>
               <a:rPr lang="en-US" sz="900" dirty="0">
                 <a:solidFill>
-                  <a:srgbClr val="64748B"/>
+                  <a:srgbClr val="5B6672"/>
                 </a:solidFill>
                 <a:latin typeface="Calibri" pitchFamily="34" charset="0"/>
                 <a:ea typeface="Calibri" pitchFamily="34" charset="-122"/>
@@ -10235,7 +10235,7 @@
     <p:bg>
       <p:bgPr>
         <a:solidFill>
-          <a:srgbClr val="0F1419"/>
+          <a:srgbClr val="0F1214"/>
         </a:solidFill>
       </p:bgPr>
     </p:bg>
@@ -10280,7 +10280,7 @@
             <a:r>
               <a:rPr lang="en-US" sz="2000" b="1" dirty="0">
                 <a:solidFill>
-                  <a:srgbClr val="06B6D4"/>
+                  <a:srgbClr val="3B968F"/>
                 </a:solidFill>
                 <a:latin typeface="Calibri" pitchFamily="34" charset="0"/>
                 <a:ea typeface="Calibri" pitchFamily="34" charset="-122"/>
@@ -10394,7 +10394,7 @@
             </a:avLst>
           </a:prstGeom>
           <a:solidFill>
-            <a:srgbClr val="1A2332"/>
+            <a:srgbClr val="1A2026"/>
           </a:solidFill>
           <a:ln/>
         </p:spPr>
@@ -10479,7 +10479,7 @@
             </a:avLst>
           </a:prstGeom>
           <a:solidFill>
-            <a:srgbClr val="1A2332"/>
+            <a:srgbClr val="1A2026"/>
           </a:solidFill>
           <a:ln/>
         </p:spPr>
@@ -10564,7 +10564,7 @@
             </a:avLst>
           </a:prstGeom>
           <a:solidFill>
-            <a:srgbClr val="1A2332"/>
+            <a:srgbClr val="1A2026"/>
           </a:solidFill>
           <a:ln/>
         </p:spPr>
@@ -10646,7 +10646,7 @@
     <p:bg>
       <p:bgPr>
         <a:solidFill>
-          <a:srgbClr val="0F1419"/>
+          <a:srgbClr val="0F1214"/>
         </a:solidFill>
       </p:bgPr>
     </p:bg>
@@ -10691,7 +10691,7 @@
             <a:r>
               <a:rPr lang="en-US" sz="2000" b="1" dirty="0">
                 <a:solidFill>
-                  <a:srgbClr val="06B6D4"/>
+                  <a:srgbClr val="3B968F"/>
                 </a:solidFill>
                 <a:latin typeface="Calibri" pitchFamily="34" charset="0"/>
                 <a:ea typeface="Calibri" pitchFamily="34" charset="-122"/>
@@ -10720,7 +10720,7 @@
             </a:avLst>
           </a:prstGeom>
           <a:solidFill>
-            <a:srgbClr val="1A2332"/>
+            <a:srgbClr val="1A2026"/>
           </a:solidFill>
           <a:ln/>
         </p:spPr>
@@ -10815,7 +10815,7 @@
             <a:r>
               <a:rPr lang="en-US" sz="900" dirty="0">
                 <a:solidFill>
-                  <a:srgbClr val="94A3B8"/>
+                  <a:srgbClr val="8994A0"/>
                 </a:solidFill>
                 <a:latin typeface="Calibri" pitchFamily="34" charset="0"/>
                 <a:ea typeface="Calibri" pitchFamily="34" charset="-122"/>
@@ -10844,7 +10844,7 @@
             </a:avLst>
           </a:prstGeom>
           <a:solidFill>
-            <a:srgbClr val="1A2332"/>
+            <a:srgbClr val="1A2026"/>
           </a:solidFill>
           <a:ln/>
         </p:spPr>
@@ -10939,7 +10939,7 @@
             <a:r>
               <a:rPr lang="en-US" sz="900" dirty="0">
                 <a:solidFill>
-                  <a:srgbClr val="94A3B8"/>
+                  <a:srgbClr val="8994A0"/>
                 </a:solidFill>
                 <a:latin typeface="Calibri" pitchFamily="34" charset="0"/>
                 <a:ea typeface="Calibri" pitchFamily="34" charset="-122"/>
@@ -10968,7 +10968,7 @@
             </a:avLst>
           </a:prstGeom>
           <a:solidFill>
-            <a:srgbClr val="1A2332"/>
+            <a:srgbClr val="1A2026"/>
           </a:solidFill>
           <a:ln/>
         </p:spPr>
@@ -11053,7 +11053,7 @@
             </a:avLst>
           </a:prstGeom>
           <a:solidFill>
-            <a:srgbClr val="1A2332"/>
+            <a:srgbClr val="1A2026"/>
           </a:solidFill>
           <a:ln/>
         </p:spPr>
@@ -11148,7 +11148,7 @@
             <a:r>
               <a:rPr lang="en-US" sz="900" dirty="0">
                 <a:solidFill>
-                  <a:srgbClr val="94A3B8"/>
+                  <a:srgbClr val="8994A0"/>
                 </a:solidFill>
                 <a:latin typeface="Calibri" pitchFamily="34" charset="0"/>
                 <a:ea typeface="Calibri" pitchFamily="34" charset="-122"/>
@@ -11177,7 +11177,7 @@
             </a:avLst>
           </a:prstGeom>
           <a:solidFill>
-            <a:srgbClr val="1A2332"/>
+            <a:srgbClr val="1A2026"/>
           </a:solidFill>
           <a:ln/>
         </p:spPr>
@@ -11262,7 +11262,7 @@
             </a:avLst>
           </a:prstGeom>
           <a:solidFill>
-            <a:srgbClr val="1A2332"/>
+            <a:srgbClr val="1A2026"/>
           </a:solidFill>
           <a:ln/>
         </p:spPr>
@@ -11357,7 +11357,7 @@
             <a:r>
               <a:rPr lang="en-US" sz="900" dirty="0">
                 <a:solidFill>
-                  <a:srgbClr val="94A3B8"/>
+                  <a:srgbClr val="8994A0"/>
                 </a:solidFill>
                 <a:latin typeface="Calibri" pitchFamily="34" charset="0"/>
                 <a:ea typeface="Calibri" pitchFamily="34" charset="-122"/>
@@ -11383,7 +11383,7 @@
     <p:bg>
       <p:bgPr>
         <a:solidFill>
-          <a:srgbClr val="0F1419"/>
+          <a:srgbClr val="0F1214"/>
         </a:solidFill>
       </p:bgPr>
     </p:bg>
@@ -11416,7 +11416,7 @@
             <a:avLst/>
           </a:prstGeom>
           <a:solidFill>
-            <a:srgbClr val="06B6D4">
+            <a:srgbClr val="3B968F">
               <a:alpha val="12000"/>
             </a:srgbClr>
           </a:solidFill>
@@ -11474,7 +11474,7 @@
             <a:r>
               <a:rPr lang="en-US" sz="2000" b="1" dirty="0">
                 <a:solidFill>
-                  <a:srgbClr val="06B6D4"/>
+                  <a:srgbClr val="3B968F"/>
                 </a:solidFill>
                 <a:latin typeface="Calibri" pitchFamily="34" charset="0"/>
                 <a:ea typeface="Calibri" pitchFamily="34" charset="-122"/>
@@ -11619,7 +11619,7 @@
             <a:r>
               <a:rPr lang="en-US" sz="900" dirty="0">
                 <a:solidFill>
-                  <a:srgbClr val="64748B"/>
+                  <a:srgbClr val="5B6672"/>
                 </a:solidFill>
                 <a:latin typeface="Calibri" pitchFamily="34" charset="0"/>
                 <a:ea typeface="Calibri" pitchFamily="34" charset="-122"/>
@@ -11645,7 +11645,7 @@
     <p:bg>
       <p:bgPr>
         <a:solidFill>
-          <a:srgbClr val="1A2332"/>
+          <a:srgbClr val="1A2026"/>
         </a:solidFill>
       </p:bgPr>
     </p:bg>
@@ -11714,7 +11714,7 @@
             <a:r>
               <a:rPr lang="en-US" sz="1200" b="1" spc="300" kern="0" dirty="0">
                 <a:solidFill>
-                  <a:srgbClr val="F59E0B"/>
+                  <a:srgbClr val="5BC1B8"/>
                 </a:solidFill>
                 <a:latin typeface="Calibri" pitchFamily="34" charset="0"/>
                 <a:ea typeface="Calibri" pitchFamily="34" charset="-122"/>
@@ -11782,7 +11782,7 @@
             </a:avLst>
           </a:prstGeom>
           <a:solidFill>
-            <a:srgbClr val="0F1419"/>
+            <a:srgbClr val="0F1214"/>
           </a:solidFill>
           <a:ln/>
         </p:spPr>
@@ -11804,7 +11804,7 @@
             </a:avLst>
           </a:prstGeom>
           <a:solidFill>
-            <a:srgbClr val="06B6D4"/>
+            <a:srgbClr val="3B968F"/>
           </a:solidFill>
           <a:ln/>
         </p:spPr>
@@ -11818,7 +11818,7 @@
             <a:r>
               <a:rPr lang="en-US" sz="1500" b="1" dirty="0">
                 <a:solidFill>
-                  <a:srgbClr val="0F1419"/>
+                  <a:srgbClr val="0F1214"/>
                 </a:solidFill>
                 <a:latin typeface="Calibri" pitchFamily="34" charset="0"/>
                 <a:ea typeface="Calibri" pitchFamily="34" charset="-122"/>
@@ -11886,7 +11886,7 @@
             </a:avLst>
           </a:prstGeom>
           <a:solidFill>
-            <a:srgbClr val="0F1419"/>
+            <a:srgbClr val="0F1214"/>
           </a:solidFill>
           <a:ln/>
         </p:spPr>
@@ -11908,7 +11908,7 @@
             </a:avLst>
           </a:prstGeom>
           <a:solidFill>
-            <a:srgbClr val="06B6D4"/>
+            <a:srgbClr val="3B968F"/>
           </a:solidFill>
           <a:ln/>
         </p:spPr>
@@ -11922,7 +11922,7 @@
             <a:r>
               <a:rPr lang="en-US" sz="1500" b="1" dirty="0">
                 <a:solidFill>
-                  <a:srgbClr val="0F1419"/>
+                  <a:srgbClr val="0F1214"/>
                 </a:solidFill>
                 <a:latin typeface="Calibri" pitchFamily="34" charset="0"/>
                 <a:ea typeface="Calibri" pitchFamily="34" charset="-122"/>
@@ -11990,7 +11990,7 @@
             </a:avLst>
           </a:prstGeom>
           <a:solidFill>
-            <a:srgbClr val="0F1419"/>
+            <a:srgbClr val="0F1214"/>
           </a:solidFill>
           <a:ln/>
         </p:spPr>
@@ -12012,7 +12012,7 @@
             </a:avLst>
           </a:prstGeom>
           <a:solidFill>
-            <a:srgbClr val="06B6D4"/>
+            <a:srgbClr val="3B968F"/>
           </a:solidFill>
           <a:ln/>
         </p:spPr>
@@ -12026,7 +12026,7 @@
             <a:r>
               <a:rPr lang="en-US" sz="1500" b="1" dirty="0">
                 <a:solidFill>
-                  <a:srgbClr val="0F1419"/>
+                  <a:srgbClr val="0F1214"/>
                 </a:solidFill>
                 <a:latin typeface="Calibri" pitchFamily="34" charset="0"/>
                 <a:ea typeface="Calibri" pitchFamily="34" charset="-122"/>
@@ -12094,7 +12094,7 @@
             </a:avLst>
           </a:prstGeom>
           <a:solidFill>
-            <a:srgbClr val="0F1419"/>
+            <a:srgbClr val="0F1214"/>
           </a:solidFill>
           <a:ln/>
         </p:spPr>
@@ -12116,7 +12116,7 @@
             </a:avLst>
           </a:prstGeom>
           <a:solidFill>
-            <a:srgbClr val="06B6D4"/>
+            <a:srgbClr val="3B968F"/>
           </a:solidFill>
           <a:ln/>
         </p:spPr>
@@ -12130,7 +12130,7 @@
             <a:r>
               <a:rPr lang="en-US" sz="1500" b="1" dirty="0">
                 <a:solidFill>
-                  <a:srgbClr val="0F1419"/>
+                  <a:srgbClr val="0F1214"/>
                 </a:solidFill>
                 <a:latin typeface="Calibri" pitchFamily="34" charset="0"/>
                 <a:ea typeface="Calibri" pitchFamily="34" charset="-122"/>
@@ -12198,7 +12198,7 @@
             </a:avLst>
           </a:prstGeom>
           <a:solidFill>
-            <a:srgbClr val="0F1419"/>
+            <a:srgbClr val="0F1214"/>
           </a:solidFill>
           <a:ln/>
         </p:spPr>
@@ -12220,7 +12220,7 @@
             </a:avLst>
           </a:prstGeom>
           <a:solidFill>
-            <a:srgbClr val="06B6D4"/>
+            <a:srgbClr val="3B968F"/>
           </a:solidFill>
           <a:ln/>
         </p:spPr>
@@ -12234,7 +12234,7 @@
             <a:r>
               <a:rPr lang="en-US" sz="1500" b="1" dirty="0">
                 <a:solidFill>
-                  <a:srgbClr val="0F1419"/>
+                  <a:srgbClr val="0F1214"/>
                 </a:solidFill>
                 <a:latin typeface="Calibri" pitchFamily="34" charset="0"/>
                 <a:ea typeface="Calibri" pitchFamily="34" charset="-122"/>
@@ -12299,7 +12299,7 @@
     <p:bg>
       <p:bgPr>
         <a:solidFill>
-          <a:srgbClr val="0D2137"/>
+          <a:srgbClr val="12181D"/>
         </a:solidFill>
       </p:bgPr>
     </p:bg>
@@ -12380,7 +12380,7 @@
             <a:avLst/>
           </a:prstGeom>
           <a:solidFill>
-            <a:srgbClr val="06B6D4">
+            <a:srgbClr val="3B968F">
               <a:alpha val="6000"/>
             </a:srgbClr>
           </a:solidFill>
@@ -12402,7 +12402,7 @@
             <a:avLst/>
           </a:prstGeom>
           <a:solidFill>
-            <a:srgbClr val="06B6D4"/>
+            <a:srgbClr val="3B968F"/>
           </a:solidFill>
           <a:ln/>
         </p:spPr>
@@ -12434,7 +12434,7 @@
             <a:r>
               <a:rPr lang="en-US" sz="1200" b="1" spc="200" kern="0" dirty="0">
                 <a:solidFill>
-                  <a:srgbClr val="06B6D4"/>
+                  <a:srgbClr val="3B968F"/>
                 </a:solidFill>
                 <a:latin typeface="Calibri" pitchFamily="34" charset="0"/>
                 <a:ea typeface="Calibri" pitchFamily="34" charset="-122"/>
@@ -12512,7 +12512,7 @@
             <a:r>
               <a:rPr lang="en-US" sz="1100" dirty="0">
                 <a:solidFill>
-                  <a:srgbClr val="64748B"/>
+                  <a:srgbClr val="5B6672"/>
                 </a:solidFill>
                 <a:latin typeface="Calibri" pitchFamily="34" charset="0"/>
                 <a:ea typeface="Calibri" pitchFamily="34" charset="-122"/>
